--- a/tbank_reviews_presentation.pptx
+++ b/tbank_reviews_presentation.pptx
@@ -19,9 +19,11 @@
     <p:sldId id="267" r:id="rId13"/>
     <p:sldId id="268" r:id="rId14"/>
     <p:sldId id="269" r:id="rId15"/>
+    <p:sldId id="270" r:id="rId16"/>
+    <p:sldId id="271" r:id="rId17"/>
   </p:sldIdLst>
   <p:notesMasterIdLst>
-    <p:notesMasterId r:id="rId16"/>
+    <p:notesMasterId r:id="rId18"/>
   </p:notesMasterIdLst>
   <p:sldSz cx="12192000" cy="6858000"/>
   <p:notesSz cx="6858000" cy="12192000"/>
@@ -979,6 +981,182 @@
             <a:fld id="{F7021451-1387-4CA6-816F-3879F97B5CBC}" type="slidenum">
               <a:rPr lang="en-US"/>
               <a:t>14</a:t>
+            </a:fld>
+            <a:endParaRPr lang="en-US"/>
+          </a:p>
+        </p:txBody>
+      </p:sp>
+    </p:spTree>
+    <p:extLst>
+      <p:ext uri="{BB962C8B-B14F-4D97-AF65-F5344CB8AC3E}">
+        <p14:creationId xmlns:p14="http://schemas.microsoft.com/office/powerpoint/2010/main" val="1024086991"/>
+      </p:ext>
+    </p:extLst>
+  </p:cSld>
+  <p:clrMapOvr>
+    <a:masterClrMapping/>
+  </p:clrMapOvr>
+</p:notes>
+</file>
+
+<file path=ppt/notesSlides/notesSlide15.xml><?xml version="1.0" encoding="utf-8"?>
+<p:notes xmlns:a="http://schemas.openxmlformats.org/drawingml/2006/main" xmlns:r="http://schemas.openxmlformats.org/officeDocument/2006/relationships" xmlns:p="http://schemas.openxmlformats.org/presentationml/2006/main">
+  <p:cSld>
+    <p:spTree>
+      <p:nvGrpSpPr>
+        <p:cNvPr id="1" name=""/>
+        <p:cNvGrpSpPr/>
+        <p:nvPr/>
+      </p:nvGrpSpPr>
+      <p:grpSpPr>
+        <a:xfrm>
+          <a:off x="0" y="0"/>
+          <a:ext cx="0" cy="0"/>
+          <a:chOff x="0" y="0"/>
+          <a:chExt cx="0" cy="0"/>
+        </a:xfrm>
+      </p:grpSpPr>
+      <p:sp>
+        <p:nvSpPr>
+          <p:cNvPr id="2" name="Slide Image Placeholder 1"/>
+          <p:cNvSpPr>
+            <a:spLocks noGrp="1" noRot="1" noChangeAspect="1"/>
+          </p:cNvSpPr>
+          <p:nvPr>
+            <p:ph type="sldImg"/>
+          </p:nvPr>
+        </p:nvSpPr>
+        <p:spPr/>
+      </p:sp>
+      <p:sp>
+        <p:nvSpPr>
+          <p:cNvPr id="3" name="Notes Placeholder 2"/>
+          <p:cNvSpPr>
+            <a:spLocks noGrp="1"/>
+          </p:cNvSpPr>
+          <p:nvPr>
+            <p:ph type="body" idx="1"/>
+          </p:nvPr>
+        </p:nvSpPr>
+        <p:spPr/>
+        <p:txBody>
+          <a:bodyPr/>
+          <a:lstStyle/>
+          <a:p>
+            <a:r>
+              <a:rPr lang="en-US" dirty="0"/>
+              <a:t/>
+            </a:r>
+            <a:endParaRPr lang="en-US" dirty="0"/>
+          </a:p>
+        </p:txBody>
+      </p:sp>
+      <p:sp>
+        <p:nvSpPr>
+          <p:cNvPr id="4" name="Slide Number Placeholder 3"/>
+          <p:cNvSpPr>
+            <a:spLocks noGrp="1"/>
+          </p:cNvSpPr>
+          <p:nvPr>
+            <p:ph type="sldNum" sz="quarter" idx="10"/>
+          </p:nvPr>
+        </p:nvSpPr>
+        <p:spPr/>
+        <p:txBody>
+          <a:bodyPr/>
+          <a:lstStyle/>
+          <a:p>
+            <a:fld id="{F7021451-1387-4CA6-816F-3879F97B5CBC}" type="slidenum">
+              <a:rPr lang="en-US"/>
+              <a:t>15</a:t>
+            </a:fld>
+            <a:endParaRPr lang="en-US"/>
+          </a:p>
+        </p:txBody>
+      </p:sp>
+    </p:spTree>
+    <p:extLst>
+      <p:ext uri="{BB962C8B-B14F-4D97-AF65-F5344CB8AC3E}">
+        <p14:creationId xmlns:p14="http://schemas.microsoft.com/office/powerpoint/2010/main" val="1024086991"/>
+      </p:ext>
+    </p:extLst>
+  </p:cSld>
+  <p:clrMapOvr>
+    <a:masterClrMapping/>
+  </p:clrMapOvr>
+</p:notes>
+</file>
+
+<file path=ppt/notesSlides/notesSlide16.xml><?xml version="1.0" encoding="utf-8"?>
+<p:notes xmlns:a="http://schemas.openxmlformats.org/drawingml/2006/main" xmlns:r="http://schemas.openxmlformats.org/officeDocument/2006/relationships" xmlns:p="http://schemas.openxmlformats.org/presentationml/2006/main">
+  <p:cSld>
+    <p:spTree>
+      <p:nvGrpSpPr>
+        <p:cNvPr id="1" name=""/>
+        <p:cNvGrpSpPr/>
+        <p:nvPr/>
+      </p:nvGrpSpPr>
+      <p:grpSpPr>
+        <a:xfrm>
+          <a:off x="0" y="0"/>
+          <a:ext cx="0" cy="0"/>
+          <a:chOff x="0" y="0"/>
+          <a:chExt cx="0" cy="0"/>
+        </a:xfrm>
+      </p:grpSpPr>
+      <p:sp>
+        <p:nvSpPr>
+          <p:cNvPr id="2" name="Slide Image Placeholder 1"/>
+          <p:cNvSpPr>
+            <a:spLocks noGrp="1" noRot="1" noChangeAspect="1"/>
+          </p:cNvSpPr>
+          <p:nvPr>
+            <p:ph type="sldImg"/>
+          </p:nvPr>
+        </p:nvSpPr>
+        <p:spPr/>
+      </p:sp>
+      <p:sp>
+        <p:nvSpPr>
+          <p:cNvPr id="3" name="Notes Placeholder 2"/>
+          <p:cNvSpPr>
+            <a:spLocks noGrp="1"/>
+          </p:cNvSpPr>
+          <p:nvPr>
+            <p:ph type="body" idx="1"/>
+          </p:nvPr>
+        </p:nvSpPr>
+        <p:spPr/>
+        <p:txBody>
+          <a:bodyPr/>
+          <a:lstStyle/>
+          <a:p>
+            <a:r>
+              <a:rPr lang="en-US" dirty="0"/>
+              <a:t/>
+            </a:r>
+            <a:endParaRPr lang="en-US" dirty="0"/>
+          </a:p>
+        </p:txBody>
+      </p:sp>
+      <p:sp>
+        <p:nvSpPr>
+          <p:cNvPr id="4" name="Slide Number Placeholder 3"/>
+          <p:cNvSpPr>
+            <a:spLocks noGrp="1"/>
+          </p:cNvSpPr>
+          <p:nvPr>
+            <p:ph type="sldNum" sz="quarter" idx="10"/>
+          </p:nvPr>
+        </p:nvSpPr>
+        <p:spPr/>
+        <p:txBody>
+          <a:bodyPr/>
+          <a:lstStyle/>
+          <a:p>
+            <a:fld id="{F7021451-1387-4CA6-816F-3879F97B5CBC}" type="slidenum">
+              <a:rPr lang="en-US"/>
+              <a:t>16</a:t>
             </a:fld>
             <a:endParaRPr lang="en-US"/>
           </a:p>
@@ -2310,7 +2488,7 @@
         <p:spPr>
           <a:xfrm>
             <a:off x="548640" y="411480"/>
-            <a:ext cx="7315200" cy="320040"/>
+            <a:ext cx="9144000" cy="320040"/>
           </a:xfrm>
           <a:prstGeom prst="rect">
             <a:avLst/>
@@ -2334,7 +2512,7 @@
                 <a:ea typeface="Calibri" pitchFamily="34" charset="-122"/>
                 <a:cs typeface="Calibri" pitchFamily="34" charset="-120"/>
               </a:rPr>
-              <a:t>ГДЕ БОЛИТ</a:t>
+              <a:t>ГИПОТЕЗА H5</a:t>
             </a:r>
             <a:endParaRPr lang="en-US" sz="1300" dirty="0"/>
           </a:p>
@@ -2373,15 +2551,81 @@
                 <a:ea typeface="Cambria" pitchFamily="34" charset="-122"/>
                 <a:cs typeface="Cambria" pitchFamily="34" charset="-120"/>
               </a:rPr>
-              <a:t>Темы и направления с наибольшей долей недовольства</a:t>
+              <a:t>Новые клиенты (&lt; 3 мес.) недовольны заметно сильнее</a:t>
             </a:r>
             <a:endParaRPr lang="en-US" sz="2400" dirty="0"/>
+          </a:p>
+        </p:txBody>
+      </p:sp>
+      <p:sp>
+        <p:nvSpPr>
+          <p:cNvPr id="4" name="Shape 2"/>
+          <p:cNvSpPr/>
+          <p:nvPr/>
+        </p:nvSpPr>
+        <p:spPr>
+          <a:xfrm>
+            <a:off x="548640" y="1508760"/>
+            <a:ext cx="2468880" cy="384048"/>
+          </a:xfrm>
+          <a:prstGeom prst="roundRect">
+            <a:avLst>
+              <a:gd name="adj" fmla="val 19048"/>
+            </a:avLst>
+          </a:prstGeom>
+          <a:solidFill>
+            <a:srgbClr val="131A3A"/>
+          </a:solidFill>
+          <a:ln w="15875">
+            <a:solidFill>
+              <a:srgbClr val="4FD1FF"/>
+            </a:solidFill>
+            <a:prstDash val="solid"/>
+          </a:ln>
+        </p:spPr>
+      </p:sp>
+      <p:sp>
+        <p:nvSpPr>
+          <p:cNvPr id="5" name="Text 3"/>
+          <p:cNvSpPr/>
+          <p:nvPr/>
+        </p:nvSpPr>
+        <p:spPr>
+          <a:xfrm>
+            <a:off x="548640" y="1508760"/>
+            <a:ext cx="2468880" cy="384048"/>
+          </a:xfrm>
+          <a:prstGeom prst="rect">
+            <a:avLst/>
+          </a:prstGeom>
+          <a:noFill/>
+          <a:ln/>
+        </p:spPr>
+        <p:txBody>
+          <a:bodyPr wrap="square" rtlCol="0" anchor="ctr"/>
+          <a:lstStyle/>
+          <a:p>
+            <a:pPr algn="ctr" indent="0" marL="0">
+              <a:buNone/>
+            </a:pPr>
+            <a:r>
+              <a:rPr lang="en-US" sz="1200" b="1" dirty="0">
+                <a:solidFill>
+                  <a:srgbClr val="4FD1FF"/>
+                </a:solidFill>
+                <a:latin typeface="Calibri" pitchFamily="34" charset="0"/>
+                <a:ea typeface="Calibri" pitchFamily="34" charset="-122"/>
+                <a:cs typeface="Calibri" pitchFamily="34" charset="-120"/>
+              </a:rPr>
+              <a:t>ПОДТВЕРЖДЕНА</a:t>
+            </a:r>
+            <a:endParaRPr lang="en-US" sz="1200" dirty="0"/>
           </a:p>
         </p:txBody>
       </p:sp>
       <p:pic>
         <p:nvPicPr>
-          <p:cNvPr id="4" name="Image 0" descr="C:\Users\igora\edu_portfolios\tbank-reviews-analysis\images\05_top_negative_themes.png">    </p:cNvPr>
+          <p:cNvPr id="6" name="Image 0" descr="C:\Users\igora\edu_portfolios\tbank-reviews-analysis\images\08_new_vs_existing.png">    </p:cNvPr>
           <p:cNvPicPr>
             <a:picLocks noChangeAspect="1"/>
           </p:cNvPicPr>
@@ -2394,40 +2638,212 @@
         </p:blipFill>
         <p:spPr>
           <a:xfrm>
-            <a:off x="457200" y="1737360"/>
-            <a:ext cx="5760720" cy="4480560"/>
+            <a:off x="457200" y="2103120"/>
+            <a:ext cx="5029200" cy="4069080"/>
           </a:xfrm>
           <a:prstGeom prst="rect">
             <a:avLst/>
           </a:prstGeom>
         </p:spPr>
       </p:pic>
-      <p:pic>
-        <p:nvPicPr>
-          <p:cNvPr id="5" name="Image 1" descr="C:\Users\igora\edu_portfolios\tbank-reviews-analysis\images\06_business_line.png">    </p:cNvPr>
-          <p:cNvPicPr>
-            <a:picLocks noChangeAspect="1"/>
-          </p:cNvPicPr>
-          <p:nvPr/>
-        </p:nvPicPr>
-        <p:blipFill>
-          <a:blip r:embed="rId2"/>
-          <a:srcRect l="0" r="0" t="0" b="0"/>
-          <a:stretch/>
-        </p:blipFill>
-        <p:spPr>
-          <a:xfrm>
-            <a:off x="6309360" y="1737360"/>
-            <a:ext cx="5760720" cy="4480560"/>
-          </a:xfrm>
-          <a:prstGeom prst="rect">
-            <a:avLst/>
-          </a:prstGeom>
-        </p:spPr>
-      </p:pic>
-      <p:sp>
-        <p:nvSpPr>
-          <p:cNvPr id="6" name="Text 2"/>
+      <p:sp>
+        <p:nvSpPr>
+          <p:cNvPr id="7" name="Text 4"/>
+          <p:cNvSpPr/>
+          <p:nvPr/>
+        </p:nvSpPr>
+        <p:spPr>
+          <a:xfrm>
+            <a:off x="5760720" y="2103120"/>
+            <a:ext cx="6035040" cy="640080"/>
+          </a:xfrm>
+          <a:prstGeom prst="rect">
+            <a:avLst/>
+          </a:prstGeom>
+          <a:noFill/>
+          <a:ln/>
+        </p:spPr>
+        <p:txBody>
+          <a:bodyPr wrap="square" rtlCol="0" anchor="ctr"/>
+          <a:lstStyle/>
+          <a:p>
+            <a:pPr indent="0" marL="0">
+              <a:buNone/>
+            </a:pPr>
+            <a:r>
+              <a:rPr lang="en-US" sz="2600" b="1" dirty="0">
+                <a:solidFill>
+                  <a:srgbClr val="FF6B81"/>
+                </a:solidFill>
+                <a:latin typeface="Cambria" pitchFamily="34" charset="0"/>
+                <a:ea typeface="Cambria" pitchFamily="34" charset="-122"/>
+                <a:cs typeface="Cambria" pitchFamily="34" charset="-120"/>
+              </a:rPr>
+              <a:t>50.5% vs 39.5%</a:t>
+            </a:r>
+            <a:endParaRPr lang="en-US" sz="2600" dirty="0"/>
+          </a:p>
+        </p:txBody>
+      </p:sp>
+      <p:sp>
+        <p:nvSpPr>
+          <p:cNvPr id="8" name="Text 5"/>
+          <p:cNvSpPr/>
+          <p:nvPr/>
+        </p:nvSpPr>
+        <p:spPr>
+          <a:xfrm>
+            <a:off x="5760720" y="2697480"/>
+            <a:ext cx="6035040" cy="457200"/>
+          </a:xfrm>
+          <a:prstGeom prst="rect">
+            <a:avLst/>
+          </a:prstGeom>
+          <a:noFill/>
+          <a:ln/>
+        </p:spPr>
+        <p:txBody>
+          <a:bodyPr wrap="square" rtlCol="0" anchor="ctr"/>
+          <a:lstStyle/>
+          <a:p>
+            <a:pPr indent="0" marL="0">
+              <a:buNone/>
+            </a:pPr>
+            <a:r>
+              <a:rPr lang="en-US" sz="1200" dirty="0">
+                <a:solidFill>
+                  <a:srgbClr val="8891C5"/>
+                </a:solidFill>
+                <a:latin typeface="Calibri" pitchFamily="34" charset="0"/>
+                <a:ea typeface="Calibri" pitchFamily="34" charset="-122"/>
+                <a:cs typeface="Calibri" pitchFamily="34" charset="-120"/>
+              </a:rPr>
+              <a:t>доля детракторов: новые клиенты против действующих, χ² значим</a:t>
+            </a:r>
+            <a:endParaRPr lang="en-US" sz="1200" dirty="0"/>
+          </a:p>
+        </p:txBody>
+      </p:sp>
+      <p:sp>
+        <p:nvSpPr>
+          <p:cNvPr id="9" name="Text 6"/>
+          <p:cNvSpPr/>
+          <p:nvPr/>
+        </p:nvSpPr>
+        <p:spPr>
+          <a:xfrm>
+            <a:off x="5760720" y="3291840"/>
+            <a:ext cx="6035040" cy="411480"/>
+          </a:xfrm>
+          <a:prstGeom prst="rect">
+            <a:avLst/>
+          </a:prstGeom>
+          <a:noFill/>
+          <a:ln/>
+        </p:spPr>
+        <p:txBody>
+          <a:bodyPr wrap="square" rtlCol="0" anchor="ctr"/>
+          <a:lstStyle/>
+          <a:p>
+            <a:pPr indent="0" marL="0">
+              <a:buNone/>
+            </a:pPr>
+            <a:r>
+              <a:rPr lang="en-US" sz="1400" b="1" dirty="0">
+                <a:solidFill>
+                  <a:srgbClr val="4FD1FF"/>
+                </a:solidFill>
+                <a:latin typeface="Cambria" pitchFamily="34" charset="0"/>
+                <a:ea typeface="Cambria" pitchFamily="34" charset="-122"/>
+                <a:cs typeface="Cambria" pitchFamily="34" charset="-120"/>
+              </a:rPr>
+              <a:t>Не продукт хуже — а трение первого касания</a:t>
+            </a:r>
+            <a:endParaRPr lang="en-US" sz="1400" dirty="0"/>
+          </a:p>
+        </p:txBody>
+      </p:sp>
+      <p:sp>
+        <p:nvSpPr>
+          <p:cNvPr id="10" name="Text 7"/>
+          <p:cNvSpPr/>
+          <p:nvPr/>
+        </p:nvSpPr>
+        <p:spPr>
+          <a:xfrm>
+            <a:off x="5760720" y="3749040"/>
+            <a:ext cx="6035040" cy="1554480"/>
+          </a:xfrm>
+          <a:prstGeom prst="rect">
+            <a:avLst/>
+          </a:prstGeom>
+          <a:noFill/>
+          <a:ln/>
+        </p:spPr>
+        <p:txBody>
+          <a:bodyPr wrap="square" rtlCol="0" anchor="t"/>
+          <a:lstStyle/>
+          <a:p>
+            <a:pPr indent="0" marL="0">
+              <a:buNone/>
+            </a:pPr>
+            <a:r>
+              <a:rPr lang="en-US" sz="1200" dirty="0">
+                <a:solidFill>
+                  <a:srgbClr val="E6ECFF"/>
+                </a:solidFill>
+                <a:latin typeface="Calibri" pitchFamily="34" charset="0"/>
+                <a:ea typeface="Calibri" pitchFamily="34" charset="-122"/>
+                <a:cs typeface="Calibri" pitchFamily="34" charset="-120"/>
+              </a:rPr>
+              <a:t>Новые клиенты чаще жалуются на «карты», «акции», «погашение кредитов» — то, что происходит в момент подключения продукта. Реже — на «кэшбек» и «платежи», которые требуют наработанного опыта. Перепредставлены в депозитах (+14 п.п.) и автокредитах (+7 п.п.).</a:t>
+            </a:r>
+            <a:endParaRPr lang="en-US" sz="1200" dirty="0"/>
+          </a:p>
+        </p:txBody>
+      </p:sp>
+      <p:sp>
+        <p:nvSpPr>
+          <p:cNvPr id="11" name="Text 8"/>
+          <p:cNvSpPr/>
+          <p:nvPr/>
+        </p:nvSpPr>
+        <p:spPr>
+          <a:xfrm>
+            <a:off x="5760720" y="5349240"/>
+            <a:ext cx="6035040" cy="1005840"/>
+          </a:xfrm>
+          <a:prstGeom prst="rect">
+            <a:avLst/>
+          </a:prstGeom>
+          <a:noFill/>
+          <a:ln/>
+        </p:spPr>
+        <p:txBody>
+          <a:bodyPr wrap="square" rtlCol="0" anchor="t"/>
+          <a:lstStyle/>
+          <a:p>
+            <a:pPr indent="0" marL="0">
+              <a:buNone/>
+            </a:pPr>
+            <a:r>
+              <a:rPr lang="en-US" sz="1150" i="1" dirty="0">
+                <a:solidFill>
+                  <a:srgbClr val="7C8CFF"/>
+                </a:solidFill>
+                <a:latin typeface="Calibri" pitchFamily="34" charset="0"/>
+                <a:ea typeface="Calibri" pitchFamily="34" charset="-122"/>
+                <a:cs typeface="Calibri" pitchFamily="34" charset="-120"/>
+              </a:rPr>
+              <a:t>Практический вывод: усиленная забота о клиенте в первые недели — это ставка на LTV. Пока клиент не накопил позитивного опыта, он не прощает банку мелкие шероховатости так же легко, как «старожилы».</a:t>
+            </a:r>
+            <a:endParaRPr lang="en-US" sz="1150" dirty="0"/>
+          </a:p>
+        </p:txBody>
+      </p:sp>
+      <p:sp>
+        <p:nvSpPr>
+          <p:cNvPr id="12" name="Text 9"/>
           <p:cNvSpPr/>
           <p:nvPr/>
         </p:nvSpPr>
@@ -2466,7 +2882,7 @@
       </p:sp>
       <p:sp>
         <p:nvSpPr>
-          <p:cNvPr id="7" name="Text 3"/>
+          <p:cNvPr id="13" name="Text 10"/>
           <p:cNvSpPr/>
           <p:nvPr/>
         </p:nvSpPr>
@@ -2544,7 +2960,7 @@
         <p:spPr>
           <a:xfrm>
             <a:off x="548640" y="411480"/>
-            <a:ext cx="7315200" cy="320040"/>
+            <a:ext cx="9144000" cy="320040"/>
           </a:xfrm>
           <a:prstGeom prst="rect">
             <a:avLst/>
@@ -2568,7 +2984,7 @@
                 <a:ea typeface="Calibri" pitchFamily="34" charset="-122"/>
                 <a:cs typeface="Calibri" pitchFamily="34" charset="-120"/>
               </a:rPr>
-              <a:t>ТРЕНД</a:t>
+              <a:t>ПО ПУТИ</a:t>
             </a:r>
             <a:endParaRPr lang="en-US" sz="1300" dirty="0"/>
           </a:p>
@@ -2599,7 +3015,7 @@
               <a:buNone/>
             </a:pPr>
             <a:r>
-              <a:rPr lang="en-US" sz="2600" b="1" dirty="0">
+              <a:rPr lang="en-US" sz="2400" b="1" dirty="0">
                 <a:solidFill>
                   <a:srgbClr val="E6ECFF"/>
                 </a:solidFill>
@@ -2607,84 +3023,83 @@
                 <a:ea typeface="Cambria" pitchFamily="34" charset="-122"/>
                 <a:cs typeface="Cambria" pitchFamily="34" charset="-120"/>
               </a:rPr>
-              <a:t>Динамика недовольства за год</a:t>
-            </a:r>
-            <a:endParaRPr lang="en-US" sz="2600" dirty="0"/>
-          </a:p>
-        </p:txBody>
-      </p:sp>
-      <p:pic>
-        <p:nvPicPr>
-          <p:cNvPr id="4" name="Image 0" descr="C:\Users\igora\edu_portfolios\tbank-reviews-analysis\images\07_monthly_trend.png">    </p:cNvPr>
-          <p:cNvPicPr>
-            <a:picLocks noChangeAspect="1"/>
-          </p:cNvPicPr>
-          <p:nvPr/>
-        </p:nvPicPr>
-        <p:blipFill>
-          <a:blip r:embed="rId1"/>
-          <a:srcRect l="0" r="0" t="0" b="0"/>
-          <a:stretch/>
-        </p:blipFill>
-        <p:spPr>
-          <a:xfrm>
-            <a:off x="731520" y="1737360"/>
-            <a:ext cx="8412480" cy="4206240"/>
-          </a:xfrm>
-          <a:prstGeom prst="rect">
-            <a:avLst/>
-          </a:prstGeom>
-        </p:spPr>
-      </p:pic>
-      <p:sp>
-        <p:nvSpPr>
-          <p:cNvPr id="5" name="Text 2"/>
-          <p:cNvSpPr/>
-          <p:nvPr/>
-        </p:nvSpPr>
-        <p:spPr>
-          <a:xfrm>
-            <a:off x="9418320" y="1920240"/>
-            <a:ext cx="2194560" cy="640080"/>
-          </a:xfrm>
-          <a:prstGeom prst="rect">
-            <a:avLst/>
-          </a:prstGeom>
-          <a:noFill/>
-          <a:ln/>
-        </p:spPr>
-        <p:txBody>
-          <a:bodyPr wrap="square" rtlCol="0" anchor="ctr"/>
-          <a:lstStyle/>
-          <a:p>
-            <a:pPr indent="0" marL="0">
-              <a:buNone/>
-            </a:pPr>
-            <a:r>
-              <a:rPr lang="en-US" sz="2600" b="1" dirty="0">
-                <a:solidFill>
-                  <a:srgbClr val="4FD1FF"/>
+              <a:t>Что проверялось, но не попало в финальные выводы</a:t>
+            </a:r>
+            <a:endParaRPr lang="en-US" sz="2400" dirty="0"/>
+          </a:p>
+        </p:txBody>
+      </p:sp>
+      <p:sp>
+        <p:nvSpPr>
+          <p:cNvPr id="4" name="Shape 2"/>
+          <p:cNvSpPr/>
+          <p:nvPr/>
+        </p:nvSpPr>
+        <p:spPr>
+          <a:xfrm>
+            <a:off x="548640" y="1828800"/>
+            <a:ext cx="11091672" cy="1920240"/>
+          </a:xfrm>
+          <a:prstGeom prst="roundRect">
+            <a:avLst>
+              <a:gd name="adj" fmla="val 4762"/>
+            </a:avLst>
+          </a:prstGeom>
+          <a:solidFill>
+            <a:srgbClr val="131A3A"/>
+          </a:solidFill>
+          <a:ln/>
+        </p:spPr>
+      </p:sp>
+      <p:sp>
+        <p:nvSpPr>
+          <p:cNvPr id="5" name="Text 3"/>
+          <p:cNvSpPr/>
+          <p:nvPr/>
+        </p:nvSpPr>
+        <p:spPr>
+          <a:xfrm>
+            <a:off x="868680" y="2011680"/>
+            <a:ext cx="10451592" cy="457200"/>
+          </a:xfrm>
+          <a:prstGeom prst="rect">
+            <a:avLst/>
+          </a:prstGeom>
+          <a:noFill/>
+          <a:ln/>
+        </p:spPr>
+        <p:txBody>
+          <a:bodyPr wrap="square" rtlCol="0" anchor="ctr"/>
+          <a:lstStyle/>
+          <a:p>
+            <a:pPr indent="0" marL="0">
+              <a:buNone/>
+            </a:pPr>
+            <a:r>
+              <a:rPr lang="en-US" sz="1500" b="1" dirty="0">
+                <a:solidFill>
+                  <a:srgbClr val="8891C5"/>
                 </a:solidFill>
                 <a:latin typeface="Cambria" pitchFamily="34" charset="0"/>
                 <a:ea typeface="Cambria" pitchFamily="34" charset="-122"/>
                 <a:cs typeface="Cambria" pitchFamily="34" charset="-120"/>
               </a:rPr>
-              <a:t>31–48%</a:t>
-            </a:r>
-            <a:endParaRPr lang="en-US" sz="2600" dirty="0"/>
-          </a:p>
-        </p:txBody>
-      </p:sp>
-      <p:sp>
-        <p:nvSpPr>
-          <p:cNvPr id="6" name="Text 3"/>
-          <p:cNvSpPr/>
-          <p:nvPr/>
-        </p:nvSpPr>
-        <p:spPr>
-          <a:xfrm>
-            <a:off x="9418320" y="2514600"/>
-            <a:ext cx="2377440" cy="1005840"/>
+              <a:t>Возраст клиента — проверил дважды</a:t>
+            </a:r>
+            <a:endParaRPr lang="en-US" sz="1500" dirty="0"/>
+          </a:p>
+        </p:txBody>
+      </p:sp>
+      <p:sp>
+        <p:nvSpPr>
+          <p:cNvPr id="6" name="Text 4"/>
+          <p:cNvSpPr/>
+          <p:nvPr/>
+        </p:nvSpPr>
+        <p:spPr>
+          <a:xfrm>
+            <a:off x="868680" y="2514600"/>
+            <a:ext cx="10451592" cy="1097280"/>
           </a:xfrm>
           <a:prstGeom prst="rect">
             <a:avLst/>
@@ -2700,54 +3115,76 @@
               <a:buNone/>
             </a:pPr>
             <a:r>
-              <a:rPr lang="en-US" sz="1150" dirty="0">
+              <a:rPr lang="en-US" sz="1200" dirty="0">
+                <a:solidFill>
+                  <a:srgbClr val="E6ECFF"/>
+                </a:solidFill>
+                <a:latin typeface="Calibri" pitchFamily="34" charset="0"/>
+                <a:ea typeface="Calibri" pitchFamily="34" charset="-122"/>
+                <a:cs typeface="Calibri" pitchFamily="34" charset="-120"/>
+              </a:rPr>
+              <a:t>Сначала «в среднем» (разница &lt; 0.15 балла — нет эффекта). Потом отдельно внутри мобильного приложения и кредитных карт — тоже без эффекта. Единственная наводка (страховые случаи, сеньоры недовольнее) держится на выборке 10-30 человек — недостаточно, чтобы делать вывод.</a:t>
+            </a:r>
+            <a:endParaRPr lang="en-US" sz="1200" dirty="0"/>
+          </a:p>
+        </p:txBody>
+      </p:sp>
+      <p:sp>
+        <p:nvSpPr>
+          <p:cNvPr id="7" name="Shape 5"/>
+          <p:cNvSpPr/>
+          <p:nvPr/>
+        </p:nvSpPr>
+        <p:spPr>
+          <a:xfrm>
+            <a:off x="548640" y="3977640"/>
+            <a:ext cx="11091672" cy="1920240"/>
+          </a:xfrm>
+          <a:prstGeom prst="roundRect">
+            <a:avLst>
+              <a:gd name="adj" fmla="val 4762"/>
+            </a:avLst>
+          </a:prstGeom>
+          <a:solidFill>
+            <a:srgbClr val="131A3A"/>
+          </a:solidFill>
+          <a:ln/>
+        </p:spPr>
+      </p:sp>
+      <p:sp>
+        <p:nvSpPr>
+          <p:cNvPr id="8" name="Text 6"/>
+          <p:cNvSpPr/>
+          <p:nvPr/>
+        </p:nvSpPr>
+        <p:spPr>
+          <a:xfrm>
+            <a:off x="868680" y="4160520"/>
+            <a:ext cx="10451592" cy="457200"/>
+          </a:xfrm>
+          <a:prstGeom prst="rect">
+            <a:avLst/>
+          </a:prstGeom>
+          <a:noFill/>
+          <a:ln/>
+        </p:spPr>
+        <p:txBody>
+          <a:bodyPr wrap="square" rtlCol="0" anchor="ctr"/>
+          <a:lstStyle/>
+          <a:p>
+            <a:pPr indent="0" marL="0">
+              <a:buNone/>
+            </a:pPr>
+            <a:r>
+              <a:rPr lang="en-US" sz="1500" b="1" dirty="0">
                 <a:solidFill>
                   <a:srgbClr val="8891C5"/>
                 </a:solidFill>
-                <a:latin typeface="Calibri" pitchFamily="34" charset="0"/>
-                <a:ea typeface="Calibri" pitchFamily="34" charset="-122"/>
-                <a:cs typeface="Calibri" pitchFamily="34" charset="-120"/>
-              </a:rPr>
-              <a:t>диапазон доли детракторов весь год, без резких обвалов</a:t>
-            </a:r>
-            <a:endParaRPr lang="en-US" sz="1150" dirty="0"/>
-          </a:p>
-        </p:txBody>
-      </p:sp>
-      <p:sp>
-        <p:nvSpPr>
-          <p:cNvPr id="7" name="Text 4"/>
-          <p:cNvSpPr/>
-          <p:nvPr/>
-        </p:nvSpPr>
-        <p:spPr>
-          <a:xfrm>
-            <a:off x="9418320" y="3749040"/>
-            <a:ext cx="2194560" cy="365760"/>
-          </a:xfrm>
-          <a:prstGeom prst="rect">
-            <a:avLst/>
-          </a:prstGeom>
-          <a:noFill/>
-          <a:ln/>
-        </p:spPr>
-        <p:txBody>
-          <a:bodyPr wrap="square" rtlCol="0" anchor="ctr"/>
-          <a:lstStyle/>
-          <a:p>
-            <a:pPr indent="0" marL="0">
-              <a:buNone/>
-            </a:pPr>
-            <a:r>
-              <a:rPr lang="en-US" sz="1500" b="1" dirty="0">
-                <a:solidFill>
-                  <a:srgbClr val="4FD1FF"/>
-                </a:solidFill>
-                <a:latin typeface="Calibri" pitchFamily="34" charset="0"/>
-                <a:ea typeface="Calibri" pitchFamily="34" charset="-122"/>
-                <a:cs typeface="Calibri" pitchFamily="34" charset="-120"/>
-              </a:rPr>
-              <a:t>Апрель</a:t>
+                <a:latin typeface="Cambria" pitchFamily="34" charset="0"/>
+                <a:ea typeface="Cambria" pitchFamily="34" charset="-122"/>
+                <a:cs typeface="Cambria" pitchFamily="34" charset="-120"/>
+              </a:rPr>
+              <a:t>«Решение проблемы поднимает CSAT»</a:t>
             </a:r>
             <a:endParaRPr lang="en-US" sz="1500" dirty="0"/>
           </a:p>
@@ -2755,124 +3192,46 @@
       </p:sp>
       <p:sp>
         <p:nvSpPr>
-          <p:cNvPr id="8" name="Text 5"/>
-          <p:cNvSpPr/>
-          <p:nvPr/>
-        </p:nvSpPr>
-        <p:spPr>
-          <a:xfrm>
-            <a:off x="9418320" y="4114800"/>
-            <a:ext cx="2377440" cy="457200"/>
-          </a:xfrm>
-          <a:prstGeom prst="rect">
-            <a:avLst/>
-          </a:prstGeom>
-          <a:noFill/>
-          <a:ln/>
-        </p:spPr>
-        <p:txBody>
-          <a:bodyPr wrap="square" rtlCol="0" anchor="ctr"/>
-          <a:lstStyle/>
-          <a:p>
-            <a:pPr indent="0" marL="0">
-              <a:buNone/>
-            </a:pPr>
-            <a:r>
-              <a:rPr lang="en-US" sz="1150" dirty="0">
-                <a:solidFill>
-                  <a:srgbClr val="8891C5"/>
-                </a:solidFill>
-                <a:latin typeface="Calibri" pitchFamily="34" charset="0"/>
-                <a:ea typeface="Calibri" pitchFamily="34" charset="-122"/>
-                <a:cs typeface="Calibri" pitchFamily="34" charset="-120"/>
-              </a:rPr>
-              <a:t>минимум года — 31%</a:t>
-            </a:r>
-            <a:endParaRPr lang="en-US" sz="1150" dirty="0"/>
-          </a:p>
-        </p:txBody>
-      </p:sp>
-      <p:sp>
-        <p:nvSpPr>
-          <p:cNvPr id="9" name="Text 6"/>
-          <p:cNvSpPr/>
-          <p:nvPr/>
-        </p:nvSpPr>
-        <p:spPr>
-          <a:xfrm>
-            <a:off x="9418320" y="4709160"/>
-            <a:ext cx="2194560" cy="365760"/>
-          </a:xfrm>
-          <a:prstGeom prst="rect">
-            <a:avLst/>
-          </a:prstGeom>
-          <a:noFill/>
-          <a:ln/>
-        </p:spPr>
-        <p:txBody>
-          <a:bodyPr wrap="square" rtlCol="0" anchor="ctr"/>
-          <a:lstStyle/>
-          <a:p>
-            <a:pPr indent="0" marL="0">
-              <a:buNone/>
-            </a:pPr>
-            <a:r>
-              <a:rPr lang="en-US" sz="1500" b="1" dirty="0">
-                <a:solidFill>
-                  <a:srgbClr val="FF6B81"/>
-                </a:solidFill>
-                <a:latin typeface="Calibri" pitchFamily="34" charset="0"/>
-                <a:ea typeface="Calibri" pitchFamily="34" charset="-122"/>
-                <a:cs typeface="Calibri" pitchFamily="34" charset="-120"/>
-              </a:rPr>
-              <a:t>Авг–окт</a:t>
-            </a:r>
-            <a:endParaRPr lang="en-US" sz="1500" dirty="0"/>
-          </a:p>
-        </p:txBody>
-      </p:sp>
-      <p:sp>
-        <p:nvSpPr>
-          <p:cNvPr id="10" name="Text 7"/>
-          <p:cNvSpPr/>
-          <p:nvPr/>
-        </p:nvSpPr>
-        <p:spPr>
-          <a:xfrm>
-            <a:off x="9418320" y="5074920"/>
-            <a:ext cx="2377440" cy="457200"/>
-          </a:xfrm>
-          <a:prstGeom prst="rect">
-            <a:avLst/>
-          </a:prstGeom>
-          <a:noFill/>
-          <a:ln/>
-        </p:spPr>
-        <p:txBody>
-          <a:bodyPr wrap="square" rtlCol="0" anchor="ctr"/>
-          <a:lstStyle/>
-          <a:p>
-            <a:pPr indent="0" marL="0">
-              <a:buNone/>
-            </a:pPr>
-            <a:r>
-              <a:rPr lang="en-US" sz="1150" dirty="0">
-                <a:solidFill>
-                  <a:srgbClr val="8891C5"/>
-                </a:solidFill>
-                <a:latin typeface="Calibri" pitchFamily="34" charset="0"/>
-                <a:ea typeface="Calibri" pitchFamily="34" charset="-122"/>
-                <a:cs typeface="Calibri" pitchFamily="34" charset="-120"/>
-              </a:rPr>
-              <a:t>рост к концу года — 42–44%</a:t>
-            </a:r>
-            <a:endParaRPr lang="en-US" sz="1150" dirty="0"/>
-          </a:p>
-        </p:txBody>
-      </p:sp>
-      <p:sp>
-        <p:nvSpPr>
-          <p:cNvPr id="11" name="Text 8"/>
+          <p:cNvPr id="9" name="Text 7"/>
+          <p:cNvSpPr/>
+          <p:nvPr/>
+        </p:nvSpPr>
+        <p:spPr>
+          <a:xfrm>
+            <a:off x="868680" y="4663440"/>
+            <a:ext cx="10451592" cy="1097280"/>
+          </a:xfrm>
+          <a:prstGeom prst="rect">
+            <a:avLst/>
+          </a:prstGeom>
+          <a:noFill/>
+          <a:ln/>
+        </p:spPr>
+        <p:txBody>
+          <a:bodyPr wrap="square" rtlCol="0" anchor="t"/>
+          <a:lstStyle/>
+          <a:p>
+            <a:pPr indent="0" marL="0">
+              <a:buNone/>
+            </a:pPr>
+            <a:r>
+              <a:rPr lang="en-US" sz="1200" dirty="0">
+                <a:solidFill>
+                  <a:srgbClr val="E6ECFF"/>
+                </a:solidFill>
+                <a:latin typeface="Calibri" pitchFamily="34" charset="0"/>
+                <a:ea typeface="Calibri" pitchFamily="34" charset="-122"/>
+                <a:cs typeface="Calibri" pitchFamily="34" charset="-120"/>
+              </a:rPr>
+              <a:t>В датасете нет повторной оценки после решения — гипотезу в исходной формулировке нельзя проверить. Переформулирована в H4 (охват поддержки по направлениям).</a:t>
+            </a:r>
+            <a:endParaRPr lang="en-US" sz="1200" dirty="0"/>
+          </a:p>
+        </p:txBody>
+      </p:sp>
+      <p:sp>
+        <p:nvSpPr>
+          <p:cNvPr id="10" name="Text 8"/>
           <p:cNvSpPr/>
           <p:nvPr/>
         </p:nvSpPr>
@@ -2911,7 +3270,7 @@
       </p:sp>
       <p:sp>
         <p:nvSpPr>
-          <p:cNvPr id="12" name="Text 9"/>
+          <p:cNvPr id="11" name="Text 9"/>
           <p:cNvSpPr/>
           <p:nvPr/>
         </p:nvSpPr>
@@ -2989,7 +3348,7 @@
         <p:spPr>
           <a:xfrm>
             <a:off x="548640" y="411480"/>
-            <a:ext cx="7315200" cy="320040"/>
+            <a:ext cx="9144000" cy="320040"/>
           </a:xfrm>
           <a:prstGeom prst="rect">
             <a:avLst/>
@@ -3013,7 +3372,7 @@
                 <a:ea typeface="Calibri" pitchFamily="34" charset="-122"/>
                 <a:cs typeface="Calibri" pitchFamily="34" charset="-120"/>
               </a:rPr>
-              <a:t>ИТОГ</a:t>
+              <a:t>ГДЕ БОЛИТ</a:t>
             </a:r>
             <a:endParaRPr lang="en-US" sz="1300" dirty="0"/>
           </a:p>
@@ -3044,7 +3403,7 @@
               <a:buNone/>
             </a:pPr>
             <a:r>
-              <a:rPr lang="en-US" sz="2800" b="1" dirty="0">
+              <a:rPr lang="en-US" sz="2400" b="1" dirty="0">
                 <a:solidFill>
                   <a:srgbClr val="E6ECFF"/>
                 </a:solidFill>
@@ -3052,515 +3411,61 @@
                 <a:ea typeface="Cambria" pitchFamily="34" charset="-122"/>
                 <a:cs typeface="Cambria" pitchFamily="34" charset="-120"/>
               </a:rPr>
-              <a:t>Пять находок из пяти гипотез</a:t>
-            </a:r>
-            <a:endParaRPr lang="en-US" sz="2800" dirty="0"/>
-          </a:p>
-        </p:txBody>
-      </p:sp>
-      <p:sp>
-        <p:nvSpPr>
-          <p:cNvPr id="4" name="Shape 2"/>
-          <p:cNvSpPr/>
-          <p:nvPr/>
-        </p:nvSpPr>
-        <p:spPr>
-          <a:xfrm>
-            <a:off x="548640" y="1783080"/>
-            <a:ext cx="11091672" cy="777240"/>
-          </a:xfrm>
-          <a:prstGeom prst="roundRect">
-            <a:avLst>
-              <a:gd name="adj" fmla="val 9412"/>
-            </a:avLst>
-          </a:prstGeom>
-          <a:solidFill>
-            <a:srgbClr val="131A3A"/>
-          </a:solidFill>
-          <a:ln/>
-        </p:spPr>
-      </p:sp>
-      <p:sp>
-        <p:nvSpPr>
-          <p:cNvPr id="5" name="Text 3"/>
-          <p:cNvSpPr/>
-          <p:nvPr/>
-        </p:nvSpPr>
-        <p:spPr>
-          <a:xfrm>
-            <a:off x="822960" y="1783080"/>
-            <a:ext cx="914400" cy="777240"/>
-          </a:xfrm>
-          <a:prstGeom prst="rect">
-            <a:avLst/>
-          </a:prstGeom>
-          <a:noFill/>
-          <a:ln/>
-        </p:spPr>
-        <p:txBody>
-          <a:bodyPr wrap="square" rtlCol="0" anchor="ctr"/>
-          <a:lstStyle/>
-          <a:p>
-            <a:pPr indent="0" marL="0">
-              <a:buNone/>
-            </a:pPr>
-            <a:r>
-              <a:rPr lang="en-US" sz="1600" b="1" dirty="0">
-                <a:solidFill>
-                  <a:srgbClr val="4FD1FF"/>
-                </a:solidFill>
-                <a:latin typeface="Cambria" pitchFamily="34" charset="0"/>
-                <a:ea typeface="Cambria" pitchFamily="34" charset="-122"/>
-                <a:cs typeface="Cambria" pitchFamily="34" charset="-120"/>
-              </a:rPr>
-              <a:t>H1</a:t>
-            </a:r>
-            <a:endParaRPr lang="en-US" sz="1600" dirty="0"/>
-          </a:p>
-        </p:txBody>
-      </p:sp>
-      <p:sp>
-        <p:nvSpPr>
-          <p:cNvPr id="6" name="Text 4"/>
-          <p:cNvSpPr/>
-          <p:nvPr/>
-        </p:nvSpPr>
-        <p:spPr>
-          <a:xfrm>
-            <a:off x="1828800" y="1783080"/>
-            <a:ext cx="9811512" cy="777240"/>
-          </a:xfrm>
-          <a:prstGeom prst="rect">
-            <a:avLst/>
-          </a:prstGeom>
-          <a:noFill/>
-          <a:ln/>
-        </p:spPr>
-        <p:txBody>
-          <a:bodyPr wrap="square" rtlCol="0" anchor="ctr"/>
-          <a:lstStyle/>
-          <a:p>
-            <a:pPr indent="0" marL="0">
-              <a:buNone/>
-            </a:pPr>
-            <a:r>
-              <a:rPr lang="en-US" sz="1400" dirty="0">
-                <a:solidFill>
-                  <a:srgbClr val="E6ECFF"/>
-                </a:solidFill>
-                <a:latin typeface="Calibri" pitchFamily="34" charset="0"/>
-                <a:ea typeface="Calibri" pitchFamily="34" charset="-122"/>
-                <a:cs typeface="Calibri" pitchFamily="34" charset="-120"/>
-              </a:rPr>
-              <a:t>Скорость закрытия обращения сильно связана с оценкой</a:t>
-            </a:r>
-            <a:endParaRPr lang="en-US" sz="1400" dirty="0"/>
-          </a:p>
-        </p:txBody>
-      </p:sp>
-      <p:sp>
-        <p:nvSpPr>
-          <p:cNvPr id="7" name="Shape 5"/>
-          <p:cNvSpPr/>
-          <p:nvPr/>
-        </p:nvSpPr>
-        <p:spPr>
-          <a:xfrm>
-            <a:off x="548640" y="2715768"/>
-            <a:ext cx="11091672" cy="777240"/>
-          </a:xfrm>
-          <a:prstGeom prst="roundRect">
-            <a:avLst>
-              <a:gd name="adj" fmla="val 9412"/>
-            </a:avLst>
-          </a:prstGeom>
-          <a:solidFill>
-            <a:srgbClr val="131A3A"/>
-          </a:solidFill>
-          <a:ln/>
-        </p:spPr>
-      </p:sp>
-      <p:sp>
-        <p:nvSpPr>
-          <p:cNvPr id="8" name="Text 6"/>
-          <p:cNvSpPr/>
-          <p:nvPr/>
-        </p:nvSpPr>
-        <p:spPr>
-          <a:xfrm>
-            <a:off x="822960" y="2715768"/>
-            <a:ext cx="914400" cy="777240"/>
-          </a:xfrm>
-          <a:prstGeom prst="rect">
-            <a:avLst/>
-          </a:prstGeom>
-          <a:noFill/>
-          <a:ln/>
-        </p:spPr>
-        <p:txBody>
-          <a:bodyPr wrap="square" rtlCol="0" anchor="ctr"/>
-          <a:lstStyle/>
-          <a:p>
-            <a:pPr indent="0" marL="0">
-              <a:buNone/>
-            </a:pPr>
-            <a:r>
-              <a:rPr lang="en-US" sz="1600" b="1" dirty="0">
-                <a:solidFill>
-                  <a:srgbClr val="4FD1FF"/>
-                </a:solidFill>
-                <a:latin typeface="Cambria" pitchFamily="34" charset="0"/>
-                <a:ea typeface="Cambria" pitchFamily="34" charset="-122"/>
-                <a:cs typeface="Cambria" pitchFamily="34" charset="-120"/>
-              </a:rPr>
-              <a:t>H2</a:t>
-            </a:r>
-            <a:endParaRPr lang="en-US" sz="1600" dirty="0"/>
-          </a:p>
-        </p:txBody>
-      </p:sp>
-      <p:sp>
-        <p:nvSpPr>
-          <p:cNvPr id="9" name="Text 7"/>
-          <p:cNvSpPr/>
-          <p:nvPr/>
-        </p:nvSpPr>
-        <p:spPr>
-          <a:xfrm>
-            <a:off x="1828800" y="2715768"/>
-            <a:ext cx="9811512" cy="777240"/>
-          </a:xfrm>
-          <a:prstGeom prst="rect">
-            <a:avLst/>
-          </a:prstGeom>
-          <a:noFill/>
-          <a:ln/>
-        </p:spPr>
-        <p:txBody>
-          <a:bodyPr wrap="square" rtlCol="0" anchor="ctr"/>
-          <a:lstStyle/>
-          <a:p>
-            <a:pPr indent="0" marL="0">
-              <a:buNone/>
-            </a:pPr>
-            <a:r>
-              <a:rPr lang="en-US" sz="1400" dirty="0">
-                <a:solidFill>
-                  <a:srgbClr val="E6ECFF"/>
-                </a:solidFill>
-                <a:latin typeface="Calibri" pitchFamily="34" charset="0"/>
-                <a:ea typeface="Calibri" pitchFamily="34" charset="-122"/>
-                <a:cs typeface="Calibri" pitchFamily="34" charset="-120"/>
-              </a:rPr>
-              <a:t>Удовлетворённость растёт вместе с ценностью клиентского сегмента</a:t>
-            </a:r>
-            <a:endParaRPr lang="en-US" sz="1400" dirty="0"/>
-          </a:p>
-        </p:txBody>
-      </p:sp>
-      <p:sp>
-        <p:nvSpPr>
-          <p:cNvPr id="10" name="Shape 8"/>
-          <p:cNvSpPr/>
-          <p:nvPr/>
-        </p:nvSpPr>
-        <p:spPr>
-          <a:xfrm>
-            <a:off x="548640" y="3648456"/>
-            <a:ext cx="11091672" cy="777240"/>
-          </a:xfrm>
-          <a:prstGeom prst="roundRect">
-            <a:avLst>
-              <a:gd name="adj" fmla="val 9412"/>
-            </a:avLst>
-          </a:prstGeom>
-          <a:solidFill>
-            <a:srgbClr val="131A3A"/>
-          </a:solidFill>
-          <a:ln/>
-        </p:spPr>
-      </p:sp>
-      <p:sp>
-        <p:nvSpPr>
-          <p:cNvPr id="11" name="Text 9"/>
-          <p:cNvSpPr/>
-          <p:nvPr/>
-        </p:nvSpPr>
-        <p:spPr>
-          <a:xfrm>
-            <a:off x="822960" y="3648456"/>
-            <a:ext cx="914400" cy="777240"/>
-          </a:xfrm>
-          <a:prstGeom prst="rect">
-            <a:avLst/>
-          </a:prstGeom>
-          <a:noFill/>
-          <a:ln/>
-        </p:spPr>
-        <p:txBody>
-          <a:bodyPr wrap="square" rtlCol="0" anchor="ctr"/>
-          <a:lstStyle/>
-          <a:p>
-            <a:pPr indent="0" marL="0">
-              <a:buNone/>
-            </a:pPr>
-            <a:r>
-              <a:rPr lang="en-US" sz="1600" b="1" dirty="0">
-                <a:solidFill>
-                  <a:srgbClr val="4FD1FF"/>
-                </a:solidFill>
-                <a:latin typeface="Cambria" pitchFamily="34" charset="0"/>
-                <a:ea typeface="Cambria" pitchFamily="34" charset="-122"/>
-                <a:cs typeface="Cambria" pitchFamily="34" charset="-120"/>
-              </a:rPr>
-              <a:t>H3</a:t>
-            </a:r>
-            <a:endParaRPr lang="en-US" sz="1600" dirty="0"/>
-          </a:p>
-        </p:txBody>
-      </p:sp>
-      <p:sp>
-        <p:nvSpPr>
-          <p:cNvPr id="12" name="Text 10"/>
-          <p:cNvSpPr/>
-          <p:nvPr/>
-        </p:nvSpPr>
-        <p:spPr>
-          <a:xfrm>
-            <a:off x="1828800" y="3648456"/>
-            <a:ext cx="9811512" cy="777240"/>
-          </a:xfrm>
-          <a:prstGeom prst="rect">
-            <a:avLst/>
-          </a:prstGeom>
-          <a:noFill/>
-          <a:ln/>
-        </p:spPr>
-        <p:txBody>
-          <a:bodyPr wrap="square" rtlCol="0" anchor="ctr"/>
-          <a:lstStyle/>
-          <a:p>
-            <a:pPr indent="0" marL="0">
-              <a:buNone/>
-            </a:pPr>
-            <a:r>
-              <a:rPr lang="en-US" sz="1400" dirty="0">
-                <a:solidFill>
-                  <a:srgbClr val="E6ECFF"/>
-                </a:solidFill>
-                <a:latin typeface="Calibri" pitchFamily="34" charset="0"/>
-                <a:ea typeface="Calibri" pitchFamily="34" charset="-122"/>
-                <a:cs typeface="Calibri" pitchFamily="34" charset="-120"/>
-              </a:rPr>
-              <a:t>Разница между источниками — это разница каналов, а не только качества сервиса</a:t>
-            </a:r>
-            <a:endParaRPr lang="en-US" sz="1400" dirty="0"/>
-          </a:p>
-        </p:txBody>
-      </p:sp>
-      <p:sp>
-        <p:nvSpPr>
-          <p:cNvPr id="13" name="Shape 11"/>
-          <p:cNvSpPr/>
-          <p:nvPr/>
-        </p:nvSpPr>
-        <p:spPr>
-          <a:xfrm>
-            <a:off x="548640" y="4581144"/>
-            <a:ext cx="11091672" cy="777240"/>
-          </a:xfrm>
-          <a:prstGeom prst="roundRect">
-            <a:avLst>
-              <a:gd name="adj" fmla="val 9412"/>
-            </a:avLst>
-          </a:prstGeom>
-          <a:solidFill>
-            <a:srgbClr val="131A3A"/>
-          </a:solidFill>
-          <a:ln/>
-        </p:spPr>
-      </p:sp>
-      <p:sp>
-        <p:nvSpPr>
-          <p:cNvPr id="14" name="Text 12"/>
-          <p:cNvSpPr/>
-          <p:nvPr/>
-        </p:nvSpPr>
-        <p:spPr>
-          <a:xfrm>
-            <a:off x="822960" y="4581144"/>
-            <a:ext cx="914400" cy="777240"/>
-          </a:xfrm>
-          <a:prstGeom prst="rect">
-            <a:avLst/>
-          </a:prstGeom>
-          <a:noFill/>
-          <a:ln/>
-        </p:spPr>
-        <p:txBody>
-          <a:bodyPr wrap="square" rtlCol="0" anchor="ctr"/>
-          <a:lstStyle/>
-          <a:p>
-            <a:pPr indent="0" marL="0">
-              <a:buNone/>
-            </a:pPr>
-            <a:r>
-              <a:rPr lang="en-US" sz="1600" b="1" dirty="0">
-                <a:solidFill>
-                  <a:srgbClr val="4FD1FF"/>
-                </a:solidFill>
-                <a:latin typeface="Cambria" pitchFamily="34" charset="0"/>
-                <a:ea typeface="Cambria" pitchFamily="34" charset="-122"/>
-                <a:cs typeface="Cambria" pitchFamily="34" charset="-120"/>
-              </a:rPr>
-              <a:t>H4</a:t>
-            </a:r>
-            <a:endParaRPr lang="en-US" sz="1600" dirty="0"/>
-          </a:p>
-        </p:txBody>
-      </p:sp>
-      <p:sp>
-        <p:nvSpPr>
-          <p:cNvPr id="15" name="Text 13"/>
-          <p:cNvSpPr/>
-          <p:nvPr/>
-        </p:nvSpPr>
-        <p:spPr>
-          <a:xfrm>
-            <a:off x="1828800" y="4581144"/>
-            <a:ext cx="9811512" cy="777240"/>
-          </a:xfrm>
-          <a:prstGeom prst="rect">
-            <a:avLst/>
-          </a:prstGeom>
-          <a:noFill/>
-          <a:ln/>
-        </p:spPr>
-        <p:txBody>
-          <a:bodyPr wrap="square" rtlCol="0" anchor="ctr"/>
-          <a:lstStyle/>
-          <a:p>
-            <a:pPr indent="0" marL="0">
-              <a:buNone/>
-            </a:pPr>
-            <a:r>
-              <a:rPr lang="en-US" sz="1400" dirty="0">
-                <a:solidFill>
-                  <a:srgbClr val="E6ECFF"/>
-                </a:solidFill>
-                <a:latin typeface="Calibri" pitchFamily="34" charset="0"/>
-                <a:ea typeface="Calibri" pitchFamily="34" charset="-122"/>
-                <a:cs typeface="Calibri" pitchFamily="34" charset="-120"/>
-              </a:rPr>
-              <a:t>Охват поддержки различается по направлениям бизнеса в разы</a:t>
-            </a:r>
-            <a:endParaRPr lang="en-US" sz="1400" dirty="0"/>
-          </a:p>
-        </p:txBody>
-      </p:sp>
-      <p:sp>
-        <p:nvSpPr>
-          <p:cNvPr id="16" name="Shape 14"/>
-          <p:cNvSpPr/>
-          <p:nvPr/>
-        </p:nvSpPr>
-        <p:spPr>
-          <a:xfrm>
-            <a:off x="548640" y="5513832"/>
-            <a:ext cx="11091672" cy="777240"/>
-          </a:xfrm>
-          <a:prstGeom prst="roundRect">
-            <a:avLst>
-              <a:gd name="adj" fmla="val 9412"/>
-            </a:avLst>
-          </a:prstGeom>
-          <a:solidFill>
-            <a:srgbClr val="131A3A"/>
-          </a:solidFill>
-          <a:ln/>
-        </p:spPr>
-      </p:sp>
-      <p:sp>
-        <p:nvSpPr>
-          <p:cNvPr id="17" name="Text 15"/>
-          <p:cNvSpPr/>
-          <p:nvPr/>
-        </p:nvSpPr>
-        <p:spPr>
-          <a:xfrm>
-            <a:off x="822960" y="5513832"/>
-            <a:ext cx="914400" cy="777240"/>
-          </a:xfrm>
-          <a:prstGeom prst="rect">
-            <a:avLst/>
-          </a:prstGeom>
-          <a:noFill/>
-          <a:ln/>
-        </p:spPr>
-        <p:txBody>
-          <a:bodyPr wrap="square" rtlCol="0" anchor="ctr"/>
-          <a:lstStyle/>
-          <a:p>
-            <a:pPr indent="0" marL="0">
-              <a:buNone/>
-            </a:pPr>
-            <a:r>
-              <a:rPr lang="en-US" sz="1600" b="1" dirty="0">
-                <a:solidFill>
-                  <a:srgbClr val="4FD1FF"/>
-                </a:solidFill>
-                <a:latin typeface="Cambria" pitchFamily="34" charset="0"/>
-                <a:ea typeface="Cambria" pitchFamily="34" charset="-122"/>
-                <a:cs typeface="Cambria" pitchFamily="34" charset="-120"/>
-              </a:rPr>
-              <a:t>H5</a:t>
-            </a:r>
-            <a:endParaRPr lang="en-US" sz="1600" dirty="0"/>
-          </a:p>
-        </p:txBody>
-      </p:sp>
-      <p:sp>
-        <p:nvSpPr>
-          <p:cNvPr id="18" name="Text 16"/>
-          <p:cNvSpPr/>
-          <p:nvPr/>
-        </p:nvSpPr>
-        <p:spPr>
-          <a:xfrm>
-            <a:off x="1828800" y="5513832"/>
-            <a:ext cx="9811512" cy="777240"/>
-          </a:xfrm>
-          <a:prstGeom prst="rect">
-            <a:avLst/>
-          </a:prstGeom>
-          <a:noFill/>
-          <a:ln/>
-        </p:spPr>
-        <p:txBody>
-          <a:bodyPr wrap="square" rtlCol="0" anchor="ctr"/>
-          <a:lstStyle/>
-          <a:p>
-            <a:pPr indent="0" marL="0">
-              <a:buNone/>
-            </a:pPr>
-            <a:r>
-              <a:rPr lang="en-US" sz="1400" dirty="0">
-                <a:solidFill>
-                  <a:srgbClr val="E6ECFF"/>
-                </a:solidFill>
-                <a:latin typeface="Calibri" pitchFamily="34" charset="0"/>
-                <a:ea typeface="Calibri" pitchFamily="34" charset="-122"/>
-                <a:cs typeface="Calibri" pitchFamily="34" charset="-120"/>
-              </a:rPr>
-              <a:t>Новые клиенты (&lt; 3 мес.) заметно менее довольны действующих</a:t>
-            </a:r>
-            <a:endParaRPr lang="en-US" sz="1400" dirty="0"/>
-          </a:p>
-        </p:txBody>
-      </p:sp>
-      <p:sp>
-        <p:nvSpPr>
-          <p:cNvPr id="19" name="Text 17"/>
+              <a:t>Темы и направления с наибольшей долей недовольства</a:t>
+            </a:r>
+            <a:endParaRPr lang="en-US" sz="2400" dirty="0"/>
+          </a:p>
+        </p:txBody>
+      </p:sp>
+      <p:pic>
+        <p:nvPicPr>
+          <p:cNvPr id="4" name="Image 0" descr="C:\Users\igora\edu_portfolios\tbank-reviews-analysis\images\05_top_negative_themes.png">    </p:cNvPr>
+          <p:cNvPicPr>
+            <a:picLocks noChangeAspect="1"/>
+          </p:cNvPicPr>
+          <p:nvPr/>
+        </p:nvPicPr>
+        <p:blipFill>
+          <a:blip r:embed="rId1"/>
+          <a:srcRect l="0" r="0" t="0" b="0"/>
+          <a:stretch/>
+        </p:blipFill>
+        <p:spPr>
+          <a:xfrm>
+            <a:off x="457200" y="1737360"/>
+            <a:ext cx="5760720" cy="4480560"/>
+          </a:xfrm>
+          <a:prstGeom prst="rect">
+            <a:avLst/>
+          </a:prstGeom>
+        </p:spPr>
+      </p:pic>
+      <p:pic>
+        <p:nvPicPr>
+          <p:cNvPr id="5" name="Image 1" descr="C:\Users\igora\edu_portfolios\tbank-reviews-analysis\images\06_business_line.png">    </p:cNvPr>
+          <p:cNvPicPr>
+            <a:picLocks noChangeAspect="1"/>
+          </p:cNvPicPr>
+          <p:nvPr/>
+        </p:nvPicPr>
+        <p:blipFill>
+          <a:blip r:embed="rId2"/>
+          <a:srcRect l="0" r="0" t="0" b="0"/>
+          <a:stretch/>
+        </p:blipFill>
+        <p:spPr>
+          <a:xfrm>
+            <a:off x="6309360" y="1737360"/>
+            <a:ext cx="5760720" cy="4480560"/>
+          </a:xfrm>
+          <a:prstGeom prst="rect">
+            <a:avLst/>
+          </a:prstGeom>
+        </p:spPr>
+      </p:pic>
+      <p:sp>
+        <p:nvSpPr>
+          <p:cNvPr id="6" name="Text 2"/>
           <p:cNvSpPr/>
           <p:nvPr/>
         </p:nvSpPr>
@@ -3599,7 +3504,7 @@
       </p:sp>
       <p:sp>
         <p:nvSpPr>
-          <p:cNvPr id="20" name="Text 18"/>
+          <p:cNvPr id="7" name="Text 3"/>
           <p:cNvSpPr/>
           <p:nvPr/>
         </p:nvSpPr>
@@ -3677,7 +3582,7 @@
         <p:spPr>
           <a:xfrm>
             <a:off x="548640" y="411480"/>
-            <a:ext cx="7315200" cy="320040"/>
+            <a:ext cx="9144000" cy="320040"/>
           </a:xfrm>
           <a:prstGeom prst="rect">
             <a:avLst/>
@@ -3701,7 +3606,7 @@
                 <a:ea typeface="Calibri" pitchFamily="34" charset="-122"/>
                 <a:cs typeface="Calibri" pitchFamily="34" charset="-120"/>
               </a:rPr>
-              <a:t>РЕКОМЕНДАЦИИ</a:t>
+              <a:t>ТРЕНД</a:t>
             </a:r>
             <a:endParaRPr lang="en-US" sz="1300" dirty="0"/>
           </a:p>
@@ -3732,7 +3637,7 @@
               <a:buNone/>
             </a:pPr>
             <a:r>
-              <a:rPr lang="en-US" sz="2800" b="1" dirty="0">
+              <a:rPr lang="en-US" sz="2600" b="1" dirty="0">
                 <a:solidFill>
                   <a:srgbClr val="E6ECFF"/>
                 </a:solidFill>
@@ -3740,120 +3645,84 @@
                 <a:ea typeface="Cambria" pitchFamily="34" charset="-122"/>
                 <a:cs typeface="Cambria" pitchFamily="34" charset="-120"/>
               </a:rPr>
-              <a:t>Что делать продуктовой команде</a:t>
-            </a:r>
-            <a:endParaRPr lang="en-US" sz="2800" dirty="0"/>
-          </a:p>
-        </p:txBody>
-      </p:sp>
-      <p:sp>
-        <p:nvSpPr>
-          <p:cNvPr id="4" name="Shape 2"/>
-          <p:cNvSpPr/>
-          <p:nvPr/>
-        </p:nvSpPr>
-        <p:spPr>
-          <a:xfrm>
-            <a:off x="548640" y="1719072"/>
-            <a:ext cx="411480" cy="411480"/>
-          </a:xfrm>
-          <a:prstGeom prst="ellipse">
-            <a:avLst/>
-          </a:prstGeom>
-          <a:solidFill>
-            <a:srgbClr val="7C8CFF"/>
-          </a:solidFill>
-          <a:ln/>
-        </p:spPr>
-      </p:sp>
-      <p:sp>
-        <p:nvSpPr>
-          <p:cNvPr id="5" name="Text 3"/>
-          <p:cNvSpPr/>
-          <p:nvPr/>
-        </p:nvSpPr>
-        <p:spPr>
-          <a:xfrm>
-            <a:off x="548640" y="1719072"/>
-            <a:ext cx="411480" cy="411480"/>
-          </a:xfrm>
-          <a:prstGeom prst="rect">
-            <a:avLst/>
-          </a:prstGeom>
-          <a:noFill/>
-          <a:ln/>
-        </p:spPr>
-        <p:txBody>
-          <a:bodyPr wrap="square" rtlCol="0" anchor="ctr"/>
-          <a:lstStyle/>
-          <a:p>
-            <a:pPr algn="ctr" indent="0" marL="0">
-              <a:buNone/>
-            </a:pPr>
-            <a:r>
-              <a:rPr lang="en-US" sz="1500" b="1" dirty="0">
-                <a:solidFill>
-                  <a:srgbClr val="0B1026"/>
-                </a:solidFill>
-                <a:latin typeface="Calibri" pitchFamily="34" charset="0"/>
-                <a:ea typeface="Calibri" pitchFamily="34" charset="-122"/>
-                <a:cs typeface="Calibri" pitchFamily="34" charset="-120"/>
-              </a:rPr>
-              <a:t>1</a:t>
-            </a:r>
-            <a:endParaRPr lang="en-US" sz="1500" dirty="0"/>
-          </a:p>
-        </p:txBody>
-      </p:sp>
-      <p:sp>
-        <p:nvSpPr>
-          <p:cNvPr id="6" name="Text 4"/>
-          <p:cNvSpPr/>
-          <p:nvPr/>
-        </p:nvSpPr>
-        <p:spPr>
-          <a:xfrm>
-            <a:off x="1188720" y="1691640"/>
-            <a:ext cx="5029200" cy="502920"/>
-          </a:xfrm>
-          <a:prstGeom prst="rect">
-            <a:avLst/>
-          </a:prstGeom>
-          <a:noFill/>
-          <a:ln/>
-        </p:spPr>
-        <p:txBody>
-          <a:bodyPr wrap="square" rtlCol="0" anchor="t"/>
-          <a:lstStyle/>
-          <a:p>
-            <a:pPr indent="0" marL="0">
-              <a:buNone/>
-            </a:pPr>
-            <a:r>
-              <a:rPr lang="en-US" sz="1400" b="1" dirty="0">
-                <a:solidFill>
-                  <a:srgbClr val="E6ECFF"/>
+              <a:t>Динамика недовольства за год</a:t>
+            </a:r>
+            <a:endParaRPr lang="en-US" sz="2600" dirty="0"/>
+          </a:p>
+        </p:txBody>
+      </p:sp>
+      <p:pic>
+        <p:nvPicPr>
+          <p:cNvPr id="4" name="Image 0" descr="C:\Users\igora\edu_portfolios\tbank-reviews-analysis\images\07_monthly_trend.png">    </p:cNvPr>
+          <p:cNvPicPr>
+            <a:picLocks noChangeAspect="1"/>
+          </p:cNvPicPr>
+          <p:nvPr/>
+        </p:nvPicPr>
+        <p:blipFill>
+          <a:blip r:embed="rId1"/>
+          <a:srcRect l="0" r="0" t="0" b="0"/>
+          <a:stretch/>
+        </p:blipFill>
+        <p:spPr>
+          <a:xfrm>
+            <a:off x="731520" y="1737360"/>
+            <a:ext cx="8412480" cy="4206240"/>
+          </a:xfrm>
+          <a:prstGeom prst="rect">
+            <a:avLst/>
+          </a:prstGeom>
+        </p:spPr>
+      </p:pic>
+      <p:sp>
+        <p:nvSpPr>
+          <p:cNvPr id="5" name="Text 2"/>
+          <p:cNvSpPr/>
+          <p:nvPr/>
+        </p:nvSpPr>
+        <p:spPr>
+          <a:xfrm>
+            <a:off x="9418320" y="2103120"/>
+            <a:ext cx="2377440" cy="640080"/>
+          </a:xfrm>
+          <a:prstGeom prst="rect">
+            <a:avLst/>
+          </a:prstGeom>
+          <a:noFill/>
+          <a:ln/>
+        </p:spPr>
+        <p:txBody>
+          <a:bodyPr wrap="square" rtlCol="0" anchor="ctr"/>
+          <a:lstStyle/>
+          <a:p>
+            <a:pPr indent="0" marL="0">
+              <a:buNone/>
+            </a:pPr>
+            <a:r>
+              <a:rPr lang="en-US" sz="2000" b="1" dirty="0">
+                <a:solidFill>
+                  <a:srgbClr val="4FD1FF"/>
                 </a:solidFill>
                 <a:latin typeface="Cambria" pitchFamily="34" charset="0"/>
                 <a:ea typeface="Cambria" pitchFamily="34" charset="-122"/>
                 <a:cs typeface="Cambria" pitchFamily="34" charset="-120"/>
               </a:rPr>
-              <a:t>Приоритизировать SLA не по доле недовольства, а по объёму × доле</a:t>
-            </a:r>
-            <a:endParaRPr lang="en-US" sz="1400" dirty="0"/>
-          </a:p>
-        </p:txBody>
-      </p:sp>
-      <p:sp>
-        <p:nvSpPr>
-          <p:cNvPr id="7" name="Text 5"/>
-          <p:cNvSpPr/>
-          <p:nvPr/>
-        </p:nvSpPr>
-        <p:spPr>
-          <a:xfrm>
-            <a:off x="6355080" y="1691640"/>
-            <a:ext cx="5303520" cy="502920"/>
+              <a:t>Без обвалов</a:t>
+            </a:r>
+            <a:endParaRPr lang="en-US" sz="2000" dirty="0"/>
+          </a:p>
+        </p:txBody>
+      </p:sp>
+      <p:sp>
+        <p:nvSpPr>
+          <p:cNvPr id="6" name="Text 3"/>
+          <p:cNvSpPr/>
+          <p:nvPr/>
+        </p:nvSpPr>
+        <p:spPr>
+          <a:xfrm>
+            <a:off x="9418320" y="2697480"/>
+            <a:ext cx="2377440" cy="1371600"/>
           </a:xfrm>
           <a:prstGeom prst="rect">
             <a:avLst/>
@@ -3877,7 +3746,7 @@
                 <a:ea typeface="Calibri" pitchFamily="34" charset="-122"/>
                 <a:cs typeface="Calibri" pitchFamily="34" charset="-120"/>
               </a:rPr>
-              <a:t>Кредитные карты (3 084 отзыва, 73%) и мобильный банк (779, 89%) — больший рычаг, чем ипотека (405 отзывов, 98%).</a:t>
+              <a:t>доля детракторов держится в спокойном диапазоне весь год, без разовых катастроф</a:t>
             </a:r>
             <a:endParaRPr lang="en-US" sz="1150" dirty="0"/>
           </a:p>
@@ -3885,555 +3754,7 @@
       </p:sp>
       <p:sp>
         <p:nvSpPr>
-          <p:cNvPr id="8" name="Shape 6"/>
-          <p:cNvSpPr/>
-          <p:nvPr/>
-        </p:nvSpPr>
-        <p:spPr>
-          <a:xfrm>
-            <a:off x="548640" y="2651760"/>
-            <a:ext cx="411480" cy="411480"/>
-          </a:xfrm>
-          <a:prstGeom prst="ellipse">
-            <a:avLst/>
-          </a:prstGeom>
-          <a:solidFill>
-            <a:srgbClr val="7C8CFF"/>
-          </a:solidFill>
-          <a:ln/>
-        </p:spPr>
-      </p:sp>
-      <p:sp>
-        <p:nvSpPr>
-          <p:cNvPr id="9" name="Text 7"/>
-          <p:cNvSpPr/>
-          <p:nvPr/>
-        </p:nvSpPr>
-        <p:spPr>
-          <a:xfrm>
-            <a:off x="548640" y="2651760"/>
-            <a:ext cx="411480" cy="411480"/>
-          </a:xfrm>
-          <a:prstGeom prst="rect">
-            <a:avLst/>
-          </a:prstGeom>
-          <a:noFill/>
-          <a:ln/>
-        </p:spPr>
-        <p:txBody>
-          <a:bodyPr wrap="square" rtlCol="0" anchor="ctr"/>
-          <a:lstStyle/>
-          <a:p>
-            <a:pPr algn="ctr" indent="0" marL="0">
-              <a:buNone/>
-            </a:pPr>
-            <a:r>
-              <a:rPr lang="en-US" sz="1500" b="1" dirty="0">
-                <a:solidFill>
-                  <a:srgbClr val="0B1026"/>
-                </a:solidFill>
-                <a:latin typeface="Calibri" pitchFamily="34" charset="0"/>
-                <a:ea typeface="Calibri" pitchFamily="34" charset="-122"/>
-                <a:cs typeface="Calibri" pitchFamily="34" charset="-120"/>
-              </a:rPr>
-              <a:t>2</a:t>
-            </a:r>
-            <a:endParaRPr lang="en-US" sz="1500" dirty="0"/>
-          </a:p>
-        </p:txBody>
-      </p:sp>
-      <p:sp>
-        <p:nvSpPr>
-          <p:cNvPr id="10" name="Text 8"/>
-          <p:cNvSpPr/>
-          <p:nvPr/>
-        </p:nvSpPr>
-        <p:spPr>
-          <a:xfrm>
-            <a:off x="1188720" y="2624328"/>
-            <a:ext cx="5029200" cy="502920"/>
-          </a:xfrm>
-          <a:prstGeom prst="rect">
-            <a:avLst/>
-          </a:prstGeom>
-          <a:noFill/>
-          <a:ln/>
-        </p:spPr>
-        <p:txBody>
-          <a:bodyPr wrap="square" rtlCol="0" anchor="t"/>
-          <a:lstStyle/>
-          <a:p>
-            <a:pPr indent="0" marL="0">
-              <a:buNone/>
-            </a:pPr>
-            <a:r>
-              <a:rPr lang="en-US" sz="1400" b="1" dirty="0">
-                <a:solidFill>
-                  <a:srgbClr val="E6ECFF"/>
-                </a:solidFill>
-                <a:latin typeface="Cambria" pitchFamily="34" charset="0"/>
-                <a:ea typeface="Cambria" pitchFamily="34" charset="-122"/>
-                <a:cs typeface="Cambria" pitchFamily="34" charset="-120"/>
-              </a:rPr>
-              <a:t>Разобраться с провалом охвата поддержки в mobile</a:t>
-            </a:r>
-            <a:endParaRPr lang="en-US" sz="1400" dirty="0"/>
-          </a:p>
-        </p:txBody>
-      </p:sp>
-      <p:sp>
-        <p:nvSpPr>
-          <p:cNvPr id="11" name="Text 9"/>
-          <p:cNvSpPr/>
-          <p:nvPr/>
-        </p:nvSpPr>
-        <p:spPr>
-          <a:xfrm>
-            <a:off x="6355080" y="2624328"/>
-            <a:ext cx="5303520" cy="502920"/>
-          </a:xfrm>
-          <a:prstGeom prst="rect">
-            <a:avLst/>
-          </a:prstGeom>
-          <a:noFill/>
-          <a:ln/>
-        </p:spPr>
-        <p:txBody>
-          <a:bodyPr wrap="square" rtlCol="0" anchor="t"/>
-          <a:lstStyle/>
-          <a:p>
-            <a:pPr indent="0" marL="0">
-              <a:buNone/>
-            </a:pPr>
-            <a:r>
-              <a:rPr lang="en-US" sz="1150" dirty="0">
-                <a:solidFill>
-                  <a:srgbClr val="8891C5"/>
-                </a:solidFill>
-                <a:latin typeface="Calibri" pitchFamily="34" charset="0"/>
-                <a:ea typeface="Calibri" pitchFamily="34" charset="-122"/>
-                <a:cs typeface="Calibri" pitchFamily="34" charset="-120"/>
-              </a:rPr>
-              <a:t>0.9% решённых обращений среди жалоб — понять, реальный это пробел процесса или артефакт данных.</a:t>
-            </a:r>
-            <a:endParaRPr lang="en-US" sz="1150" dirty="0"/>
-          </a:p>
-        </p:txBody>
-      </p:sp>
-      <p:sp>
-        <p:nvSpPr>
-          <p:cNvPr id="12" name="Shape 10"/>
-          <p:cNvSpPr/>
-          <p:nvPr/>
-        </p:nvSpPr>
-        <p:spPr>
-          <a:xfrm>
-            <a:off x="548640" y="3584448"/>
-            <a:ext cx="411480" cy="411480"/>
-          </a:xfrm>
-          <a:prstGeom prst="ellipse">
-            <a:avLst/>
-          </a:prstGeom>
-          <a:solidFill>
-            <a:srgbClr val="7C8CFF"/>
-          </a:solidFill>
-          <a:ln/>
-        </p:spPr>
-      </p:sp>
-      <p:sp>
-        <p:nvSpPr>
-          <p:cNvPr id="13" name="Text 11"/>
-          <p:cNvSpPr/>
-          <p:nvPr/>
-        </p:nvSpPr>
-        <p:spPr>
-          <a:xfrm>
-            <a:off x="548640" y="3584448"/>
-            <a:ext cx="411480" cy="411480"/>
-          </a:xfrm>
-          <a:prstGeom prst="rect">
-            <a:avLst/>
-          </a:prstGeom>
-          <a:noFill/>
-          <a:ln/>
-        </p:spPr>
-        <p:txBody>
-          <a:bodyPr wrap="square" rtlCol="0" anchor="ctr"/>
-          <a:lstStyle/>
-          <a:p>
-            <a:pPr algn="ctr" indent="0" marL="0">
-              <a:buNone/>
-            </a:pPr>
-            <a:r>
-              <a:rPr lang="en-US" sz="1500" b="1" dirty="0">
-                <a:solidFill>
-                  <a:srgbClr val="0B1026"/>
-                </a:solidFill>
-                <a:latin typeface="Calibri" pitchFamily="34" charset="0"/>
-                <a:ea typeface="Calibri" pitchFamily="34" charset="-122"/>
-                <a:cs typeface="Calibri" pitchFamily="34" charset="-120"/>
-              </a:rPr>
-              <a:t>3</a:t>
-            </a:r>
-            <a:endParaRPr lang="en-US" sz="1500" dirty="0"/>
-          </a:p>
-        </p:txBody>
-      </p:sp>
-      <p:sp>
-        <p:nvSpPr>
-          <p:cNvPr id="14" name="Text 12"/>
-          <p:cNvSpPr/>
-          <p:nvPr/>
-        </p:nvSpPr>
-        <p:spPr>
-          <a:xfrm>
-            <a:off x="1188720" y="3557016"/>
-            <a:ext cx="5029200" cy="502920"/>
-          </a:xfrm>
-          <a:prstGeom prst="rect">
-            <a:avLst/>
-          </a:prstGeom>
-          <a:noFill/>
-          <a:ln/>
-        </p:spPr>
-        <p:txBody>
-          <a:bodyPr wrap="square" rtlCol="0" anchor="t"/>
-          <a:lstStyle/>
-          <a:p>
-            <a:pPr indent="0" marL="0">
-              <a:buNone/>
-            </a:pPr>
-            <a:r>
-              <a:rPr lang="en-US" sz="1400" b="1" dirty="0">
-                <a:solidFill>
-                  <a:srgbClr val="E6ECFF"/>
-                </a:solidFill>
-                <a:latin typeface="Cambria" pitchFamily="34" charset="0"/>
-                <a:ea typeface="Cambria" pitchFamily="34" charset="-122"/>
-                <a:cs typeface="Cambria" pitchFamily="34" charset="-120"/>
-              </a:rPr>
-              <a:t>Изучить и перенести практики premium-поддержки</a:t>
-            </a:r>
-            <a:endParaRPr lang="en-US" sz="1400" dirty="0"/>
-          </a:p>
-        </p:txBody>
-      </p:sp>
-      <p:sp>
-        <p:nvSpPr>
-          <p:cNvPr id="15" name="Text 13"/>
-          <p:cNvSpPr/>
-          <p:nvPr/>
-        </p:nvSpPr>
-        <p:spPr>
-          <a:xfrm>
-            <a:off x="6355080" y="3557016"/>
-            <a:ext cx="5303520" cy="502920"/>
-          </a:xfrm>
-          <a:prstGeom prst="rect">
-            <a:avLst/>
-          </a:prstGeom>
-          <a:noFill/>
-          <a:ln/>
-        </p:spPr>
-        <p:txBody>
-          <a:bodyPr wrap="square" rtlCol="0" anchor="t"/>
-          <a:lstStyle/>
-          <a:p>
-            <a:pPr indent="0" marL="0">
-              <a:buNone/>
-            </a:pPr>
-            <a:r>
-              <a:rPr lang="en-US" sz="1150" dirty="0">
-                <a:solidFill>
-                  <a:srgbClr val="8891C5"/>
-                </a:solidFill>
-                <a:latin typeface="Calibri" pitchFamily="34" charset="0"/>
-                <a:ea typeface="Calibri" pitchFamily="34" charset="-122"/>
-                <a:cs typeface="Calibri" pitchFamily="34" charset="-120"/>
-              </a:rPr>
-              <a:t>0.9 балла разницы между защищёнными и высокодоходными клиентами — понять, что из этого сервиса дёшево перенести.</a:t>
-            </a:r>
-            <a:endParaRPr lang="en-US" sz="1150" dirty="0"/>
-          </a:p>
-        </p:txBody>
-      </p:sp>
-      <p:sp>
-        <p:nvSpPr>
-          <p:cNvPr id="16" name="Shape 14"/>
-          <p:cNvSpPr/>
-          <p:nvPr/>
-        </p:nvSpPr>
-        <p:spPr>
-          <a:xfrm>
-            <a:off x="548640" y="4517136"/>
-            <a:ext cx="411480" cy="411480"/>
-          </a:xfrm>
-          <a:prstGeom prst="ellipse">
-            <a:avLst/>
-          </a:prstGeom>
-          <a:solidFill>
-            <a:srgbClr val="7C8CFF"/>
-          </a:solidFill>
-          <a:ln/>
-        </p:spPr>
-      </p:sp>
-      <p:sp>
-        <p:nvSpPr>
-          <p:cNvPr id="17" name="Text 15"/>
-          <p:cNvSpPr/>
-          <p:nvPr/>
-        </p:nvSpPr>
-        <p:spPr>
-          <a:xfrm>
-            <a:off x="548640" y="4517136"/>
-            <a:ext cx="411480" cy="411480"/>
-          </a:xfrm>
-          <a:prstGeom prst="rect">
-            <a:avLst/>
-          </a:prstGeom>
-          <a:noFill/>
-          <a:ln/>
-        </p:spPr>
-        <p:txBody>
-          <a:bodyPr wrap="square" rtlCol="0" anchor="ctr"/>
-          <a:lstStyle/>
-          <a:p>
-            <a:pPr algn="ctr" indent="0" marL="0">
-              <a:buNone/>
-            </a:pPr>
-            <a:r>
-              <a:rPr lang="en-US" sz="1500" b="1" dirty="0">
-                <a:solidFill>
-                  <a:srgbClr val="0B1026"/>
-                </a:solidFill>
-                <a:latin typeface="Calibri" pitchFamily="34" charset="0"/>
-                <a:ea typeface="Calibri" pitchFamily="34" charset="-122"/>
-                <a:cs typeface="Calibri" pitchFamily="34" charset="-120"/>
-              </a:rPr>
-              <a:t>4</a:t>
-            </a:r>
-            <a:endParaRPr lang="en-US" sz="1500" dirty="0"/>
-          </a:p>
-        </p:txBody>
-      </p:sp>
-      <p:sp>
-        <p:nvSpPr>
-          <p:cNvPr id="18" name="Text 16"/>
-          <p:cNvSpPr/>
-          <p:nvPr/>
-        </p:nvSpPr>
-        <p:spPr>
-          <a:xfrm>
-            <a:off x="1188720" y="4489704"/>
-            <a:ext cx="5029200" cy="502920"/>
-          </a:xfrm>
-          <a:prstGeom prst="rect">
-            <a:avLst/>
-          </a:prstGeom>
-          <a:noFill/>
-          <a:ln/>
-        </p:spPr>
-        <p:txBody>
-          <a:bodyPr wrap="square" rtlCol="0" anchor="t"/>
-          <a:lstStyle/>
-          <a:p>
-            <a:pPr indent="0" marL="0">
-              <a:buNone/>
-            </a:pPr>
-            <a:r>
-              <a:rPr lang="en-US" sz="1400" b="1" dirty="0">
-                <a:solidFill>
-                  <a:srgbClr val="E6ECFF"/>
-                </a:solidFill>
-                <a:latin typeface="Cambria" pitchFamily="34" charset="0"/>
-                <a:ea typeface="Cambria" pitchFamily="34" charset="-122"/>
-                <a:cs typeface="Cambria" pitchFamily="34" charset="-120"/>
-              </a:rPr>
-              <a:t>Не смешивать источники при подсчёте репутационной метрики</a:t>
-            </a:r>
-            <a:endParaRPr lang="en-US" sz="1400" dirty="0"/>
-          </a:p>
-        </p:txBody>
-      </p:sp>
-      <p:sp>
-        <p:nvSpPr>
-          <p:cNvPr id="19" name="Text 17"/>
-          <p:cNvSpPr/>
-          <p:nvPr/>
-        </p:nvSpPr>
-        <p:spPr>
-          <a:xfrm>
-            <a:off x="6355080" y="4489704"/>
-            <a:ext cx="5303520" cy="502920"/>
-          </a:xfrm>
-          <a:prstGeom prst="rect">
-            <a:avLst/>
-          </a:prstGeom>
-          <a:noFill/>
-          <a:ln/>
-        </p:spPr>
-        <p:txBody>
-          <a:bodyPr wrap="square" rtlCol="0" anchor="t"/>
-          <a:lstStyle/>
-          <a:p>
-            <a:pPr indent="0" marL="0">
-              <a:buNone/>
-            </a:pPr>
-            <a:r>
-              <a:rPr lang="en-US" sz="1150" dirty="0">
-                <a:solidFill>
-                  <a:srgbClr val="8891C5"/>
-                </a:solidFill>
-                <a:latin typeface="Calibri" pitchFamily="34" charset="0"/>
-                <a:ea typeface="Calibri" pitchFamily="34" charset="-122"/>
-                <a:cs typeface="Calibri" pitchFamily="34" charset="-120"/>
-              </a:rPr>
-              <a:t>«Пульс» и безымянные обращения — каналы эскалации жалоб, а не витрины мнений; включать их в общий NPS некорректно.</a:t>
-            </a:r>
-            <a:endParaRPr lang="en-US" sz="1150" dirty="0"/>
-          </a:p>
-        </p:txBody>
-      </p:sp>
-      <p:sp>
-        <p:nvSpPr>
-          <p:cNvPr id="20" name="Shape 18"/>
-          <p:cNvSpPr/>
-          <p:nvPr/>
-        </p:nvSpPr>
-        <p:spPr>
-          <a:xfrm>
-            <a:off x="548640" y="5449824"/>
-            <a:ext cx="411480" cy="411480"/>
-          </a:xfrm>
-          <a:prstGeom prst="ellipse">
-            <a:avLst/>
-          </a:prstGeom>
-          <a:solidFill>
-            <a:srgbClr val="7C8CFF"/>
-          </a:solidFill>
-          <a:ln/>
-        </p:spPr>
-      </p:sp>
-      <p:sp>
-        <p:nvSpPr>
-          <p:cNvPr id="21" name="Text 19"/>
-          <p:cNvSpPr/>
-          <p:nvPr/>
-        </p:nvSpPr>
-        <p:spPr>
-          <a:xfrm>
-            <a:off x="548640" y="5449824"/>
-            <a:ext cx="411480" cy="411480"/>
-          </a:xfrm>
-          <a:prstGeom prst="rect">
-            <a:avLst/>
-          </a:prstGeom>
-          <a:noFill/>
-          <a:ln/>
-        </p:spPr>
-        <p:txBody>
-          <a:bodyPr wrap="square" rtlCol="0" anchor="ctr"/>
-          <a:lstStyle/>
-          <a:p>
-            <a:pPr algn="ctr" indent="0" marL="0">
-              <a:buNone/>
-            </a:pPr>
-            <a:r>
-              <a:rPr lang="en-US" sz="1500" b="1" dirty="0">
-                <a:solidFill>
-                  <a:srgbClr val="0B1026"/>
-                </a:solidFill>
-                <a:latin typeface="Calibri" pitchFamily="34" charset="0"/>
-                <a:ea typeface="Calibri" pitchFamily="34" charset="-122"/>
-                <a:cs typeface="Calibri" pitchFamily="34" charset="-120"/>
-              </a:rPr>
-              <a:t>5</a:t>
-            </a:r>
-            <a:endParaRPr lang="en-US" sz="1500" dirty="0"/>
-          </a:p>
-        </p:txBody>
-      </p:sp>
-      <p:sp>
-        <p:nvSpPr>
-          <p:cNvPr id="22" name="Text 20"/>
-          <p:cNvSpPr/>
-          <p:nvPr/>
-        </p:nvSpPr>
-        <p:spPr>
-          <a:xfrm>
-            <a:off x="1188720" y="5422392"/>
-            <a:ext cx="5029200" cy="502920"/>
-          </a:xfrm>
-          <a:prstGeom prst="rect">
-            <a:avLst/>
-          </a:prstGeom>
-          <a:noFill/>
-          <a:ln/>
-        </p:spPr>
-        <p:txBody>
-          <a:bodyPr wrap="square" rtlCol="0" anchor="t"/>
-          <a:lstStyle/>
-          <a:p>
-            <a:pPr indent="0" marL="0">
-              <a:buNone/>
-            </a:pPr>
-            <a:r>
-              <a:rPr lang="en-US" sz="1400" b="1" dirty="0">
-                <a:solidFill>
-                  <a:srgbClr val="E6ECFF"/>
-                </a:solidFill>
-                <a:latin typeface="Cambria" pitchFamily="34" charset="0"/>
-                <a:ea typeface="Cambria" pitchFamily="34" charset="-122"/>
-                <a:cs typeface="Cambria" pitchFamily="34" charset="-120"/>
-              </a:rPr>
-              <a:t>Усилить сопровождение новых клиентов</a:t>
-            </a:r>
-            <a:endParaRPr lang="en-US" sz="1400" dirty="0"/>
-          </a:p>
-        </p:txBody>
-      </p:sp>
-      <p:sp>
-        <p:nvSpPr>
-          <p:cNvPr id="23" name="Text 21"/>
-          <p:cNvSpPr/>
-          <p:nvPr/>
-        </p:nvSpPr>
-        <p:spPr>
-          <a:xfrm>
-            <a:off x="6355080" y="5422392"/>
-            <a:ext cx="5303520" cy="502920"/>
-          </a:xfrm>
-          <a:prstGeom prst="rect">
-            <a:avLst/>
-          </a:prstGeom>
-          <a:noFill/>
-          <a:ln/>
-        </p:spPr>
-        <p:txBody>
-          <a:bodyPr wrap="square" rtlCol="0" anchor="t"/>
-          <a:lstStyle/>
-          <a:p>
-            <a:pPr indent="0" marL="0">
-              <a:buNone/>
-            </a:pPr>
-            <a:r>
-              <a:rPr lang="en-US" sz="1150" dirty="0">
-                <a:solidFill>
-                  <a:srgbClr val="8891C5"/>
-                </a:solidFill>
-                <a:latin typeface="Calibri" pitchFamily="34" charset="0"/>
-                <a:ea typeface="Calibri" pitchFamily="34" charset="-122"/>
-                <a:cs typeface="Calibri" pitchFamily="34" charset="-120"/>
-              </a:rPr>
-              <a:t>Первые 3 месяца — точка наибольшей уязвимости лояльности (2.95 vs 3.37 балла).</a:t>
-            </a:r>
-            <a:endParaRPr lang="en-US" sz="1150" dirty="0"/>
-          </a:p>
-        </p:txBody>
-      </p:sp>
-      <p:sp>
-        <p:nvSpPr>
-          <p:cNvPr id="24" name="Text 22"/>
+          <p:cNvPr id="7" name="Text 4"/>
           <p:cNvSpPr/>
           <p:nvPr/>
         </p:nvSpPr>
@@ -4472,7 +3793,7 @@
       </p:sp>
       <p:sp>
         <p:nvSpPr>
-          <p:cNvPr id="25" name="Text 23"/>
+          <p:cNvPr id="8" name="Text 5"/>
           <p:cNvSpPr/>
           <p:nvPr/>
         </p:nvSpPr>
@@ -4549,6 +3870,1567 @@
         </p:nvSpPr>
         <p:spPr>
           <a:xfrm>
+            <a:off x="548640" y="411480"/>
+            <a:ext cx="9144000" cy="320040"/>
+          </a:xfrm>
+          <a:prstGeom prst="rect">
+            <a:avLst/>
+          </a:prstGeom>
+          <a:noFill/>
+          <a:ln/>
+        </p:spPr>
+        <p:txBody>
+          <a:bodyPr wrap="square" rtlCol="0" anchor="ctr"/>
+          <a:lstStyle/>
+          <a:p>
+            <a:pPr indent="0" marL="0">
+              <a:buNone/>
+            </a:pPr>
+            <a:r>
+              <a:rPr lang="en-US" sz="1300" b="1" spc="200" kern="0" dirty="0">
+                <a:solidFill>
+                  <a:srgbClr val="4FD1FF"/>
+                </a:solidFill>
+                <a:latin typeface="Calibri" pitchFamily="34" charset="0"/>
+                <a:ea typeface="Calibri" pitchFamily="34" charset="-122"/>
+                <a:cs typeface="Calibri" pitchFamily="34" charset="-120"/>
+              </a:rPr>
+              <a:t>ИТОГ</a:t>
+            </a:r>
+            <a:endParaRPr lang="en-US" sz="1300" dirty="0"/>
+          </a:p>
+        </p:txBody>
+      </p:sp>
+      <p:sp>
+        <p:nvSpPr>
+          <p:cNvPr id="3" name="Text 1"/>
+          <p:cNvSpPr/>
+          <p:nvPr/>
+        </p:nvSpPr>
+        <p:spPr>
+          <a:xfrm>
+            <a:off x="548640" y="731520"/>
+            <a:ext cx="11091672" cy="914400"/>
+          </a:xfrm>
+          <a:prstGeom prst="rect">
+            <a:avLst/>
+          </a:prstGeom>
+          <a:noFill/>
+          <a:ln/>
+        </p:spPr>
+        <p:txBody>
+          <a:bodyPr wrap="square" rtlCol="0" anchor="ctr"/>
+          <a:lstStyle/>
+          <a:p>
+            <a:pPr indent="0" marL="0">
+              <a:buNone/>
+            </a:pPr>
+            <a:r>
+              <a:rPr lang="en-US" sz="2800" b="1" dirty="0">
+                <a:solidFill>
+                  <a:srgbClr val="E6ECFF"/>
+                </a:solidFill>
+                <a:latin typeface="Cambria" pitchFamily="34" charset="0"/>
+                <a:ea typeface="Cambria" pitchFamily="34" charset="-122"/>
+                <a:cs typeface="Cambria" pitchFamily="34" charset="-120"/>
+              </a:rPr>
+              <a:t>Пять находок из пяти гипотез</a:t>
+            </a:r>
+            <a:endParaRPr lang="en-US" sz="2800" dirty="0"/>
+          </a:p>
+        </p:txBody>
+      </p:sp>
+      <p:sp>
+        <p:nvSpPr>
+          <p:cNvPr id="4" name="Shape 2"/>
+          <p:cNvSpPr/>
+          <p:nvPr/>
+        </p:nvSpPr>
+        <p:spPr>
+          <a:xfrm>
+            <a:off x="548640" y="1783080"/>
+            <a:ext cx="11091672" cy="777240"/>
+          </a:xfrm>
+          <a:prstGeom prst="roundRect">
+            <a:avLst>
+              <a:gd name="adj" fmla="val 9412"/>
+            </a:avLst>
+          </a:prstGeom>
+          <a:solidFill>
+            <a:srgbClr val="131A3A"/>
+          </a:solidFill>
+          <a:ln/>
+        </p:spPr>
+      </p:sp>
+      <p:sp>
+        <p:nvSpPr>
+          <p:cNvPr id="5" name="Text 3"/>
+          <p:cNvSpPr/>
+          <p:nvPr/>
+        </p:nvSpPr>
+        <p:spPr>
+          <a:xfrm>
+            <a:off x="822960" y="1783080"/>
+            <a:ext cx="914400" cy="777240"/>
+          </a:xfrm>
+          <a:prstGeom prst="rect">
+            <a:avLst/>
+          </a:prstGeom>
+          <a:noFill/>
+          <a:ln/>
+        </p:spPr>
+        <p:txBody>
+          <a:bodyPr wrap="square" rtlCol="0" anchor="ctr"/>
+          <a:lstStyle/>
+          <a:p>
+            <a:pPr indent="0" marL="0">
+              <a:buNone/>
+            </a:pPr>
+            <a:r>
+              <a:rPr lang="en-US" sz="1600" b="1" dirty="0">
+                <a:solidFill>
+                  <a:srgbClr val="4FD1FF"/>
+                </a:solidFill>
+                <a:latin typeface="Cambria" pitchFamily="34" charset="0"/>
+                <a:ea typeface="Cambria" pitchFamily="34" charset="-122"/>
+                <a:cs typeface="Cambria" pitchFamily="34" charset="-120"/>
+              </a:rPr>
+              <a:t>H1</a:t>
+            </a:r>
+            <a:endParaRPr lang="en-US" sz="1600" dirty="0"/>
+          </a:p>
+        </p:txBody>
+      </p:sp>
+      <p:sp>
+        <p:nvSpPr>
+          <p:cNvPr id="6" name="Text 4"/>
+          <p:cNvSpPr/>
+          <p:nvPr/>
+        </p:nvSpPr>
+        <p:spPr>
+          <a:xfrm>
+            <a:off x="1828800" y="1783080"/>
+            <a:ext cx="9811512" cy="777240"/>
+          </a:xfrm>
+          <a:prstGeom prst="rect">
+            <a:avLst/>
+          </a:prstGeom>
+          <a:noFill/>
+          <a:ln/>
+        </p:spPr>
+        <p:txBody>
+          <a:bodyPr wrap="square" rtlCol="0" anchor="ctr"/>
+          <a:lstStyle/>
+          <a:p>
+            <a:pPr indent="0" marL="0">
+              <a:buNone/>
+            </a:pPr>
+            <a:r>
+              <a:rPr lang="en-US" sz="1300" dirty="0">
+                <a:solidFill>
+                  <a:srgbClr val="E6ECFF"/>
+                </a:solidFill>
+                <a:latin typeface="Calibri" pitchFamily="34" charset="0"/>
+                <a:ea typeface="Calibri" pitchFamily="34" charset="-122"/>
+                <a:cs typeface="Calibri" pitchFamily="34" charset="-120"/>
+              </a:rPr>
+              <a:t>Скорость закрытия связана с недовольством — но эффект слабее по независимой метрике csat</a:t>
+            </a:r>
+            <a:endParaRPr lang="en-US" sz="1300" dirty="0"/>
+          </a:p>
+        </p:txBody>
+      </p:sp>
+      <p:sp>
+        <p:nvSpPr>
+          <p:cNvPr id="7" name="Shape 5"/>
+          <p:cNvSpPr/>
+          <p:nvPr/>
+        </p:nvSpPr>
+        <p:spPr>
+          <a:xfrm>
+            <a:off x="548640" y="2715768"/>
+            <a:ext cx="11091672" cy="777240"/>
+          </a:xfrm>
+          <a:prstGeom prst="roundRect">
+            <a:avLst>
+              <a:gd name="adj" fmla="val 9412"/>
+            </a:avLst>
+          </a:prstGeom>
+          <a:solidFill>
+            <a:srgbClr val="131A3A"/>
+          </a:solidFill>
+          <a:ln/>
+        </p:spPr>
+      </p:sp>
+      <p:sp>
+        <p:nvSpPr>
+          <p:cNvPr id="8" name="Text 6"/>
+          <p:cNvSpPr/>
+          <p:nvPr/>
+        </p:nvSpPr>
+        <p:spPr>
+          <a:xfrm>
+            <a:off x="822960" y="2715768"/>
+            <a:ext cx="914400" cy="777240"/>
+          </a:xfrm>
+          <a:prstGeom prst="rect">
+            <a:avLst/>
+          </a:prstGeom>
+          <a:noFill/>
+          <a:ln/>
+        </p:spPr>
+        <p:txBody>
+          <a:bodyPr wrap="square" rtlCol="0" anchor="ctr"/>
+          <a:lstStyle/>
+          <a:p>
+            <a:pPr indent="0" marL="0">
+              <a:buNone/>
+            </a:pPr>
+            <a:r>
+              <a:rPr lang="en-US" sz="1600" b="1" dirty="0">
+                <a:solidFill>
+                  <a:srgbClr val="4FD1FF"/>
+                </a:solidFill>
+                <a:latin typeface="Cambria" pitchFamily="34" charset="0"/>
+                <a:ea typeface="Cambria" pitchFamily="34" charset="-122"/>
+                <a:cs typeface="Cambria" pitchFamily="34" charset="-120"/>
+              </a:rPr>
+              <a:t>H2</a:t>
+            </a:r>
+            <a:endParaRPr lang="en-US" sz="1600" dirty="0"/>
+          </a:p>
+        </p:txBody>
+      </p:sp>
+      <p:sp>
+        <p:nvSpPr>
+          <p:cNvPr id="9" name="Text 7"/>
+          <p:cNvSpPr/>
+          <p:nvPr/>
+        </p:nvSpPr>
+        <p:spPr>
+          <a:xfrm>
+            <a:off x="1828800" y="2715768"/>
+            <a:ext cx="9811512" cy="777240"/>
+          </a:xfrm>
+          <a:prstGeom prst="rect">
+            <a:avLst/>
+          </a:prstGeom>
+          <a:noFill/>
+          <a:ln/>
+        </p:spPr>
+        <p:txBody>
+          <a:bodyPr wrap="square" rtlCol="0" anchor="ctr"/>
+          <a:lstStyle/>
+          <a:p>
+            <a:pPr indent="0" marL="0">
+              <a:buNone/>
+            </a:pPr>
+            <a:r>
+              <a:rPr lang="en-US" sz="1300" dirty="0">
+                <a:solidFill>
+                  <a:srgbClr val="E6ECFF"/>
+                </a:solidFill>
+                <a:latin typeface="Calibri" pitchFamily="34" charset="0"/>
+                <a:ea typeface="Calibri" pitchFamily="34" charset="-122"/>
+                <a:cs typeface="Calibri" pitchFamily="34" charset="-120"/>
+              </a:rPr>
+              <a:t>Удовлетворённость растёт вместе с ценностью клиентского сегмента</a:t>
+            </a:r>
+            <a:endParaRPr lang="en-US" sz="1300" dirty="0"/>
+          </a:p>
+        </p:txBody>
+      </p:sp>
+      <p:sp>
+        <p:nvSpPr>
+          <p:cNvPr id="10" name="Shape 8"/>
+          <p:cNvSpPr/>
+          <p:nvPr/>
+        </p:nvSpPr>
+        <p:spPr>
+          <a:xfrm>
+            <a:off x="548640" y="3648456"/>
+            <a:ext cx="11091672" cy="777240"/>
+          </a:xfrm>
+          <a:prstGeom prst="roundRect">
+            <a:avLst>
+              <a:gd name="adj" fmla="val 9412"/>
+            </a:avLst>
+          </a:prstGeom>
+          <a:solidFill>
+            <a:srgbClr val="131A3A"/>
+          </a:solidFill>
+          <a:ln/>
+        </p:spPr>
+      </p:sp>
+      <p:sp>
+        <p:nvSpPr>
+          <p:cNvPr id="11" name="Text 9"/>
+          <p:cNvSpPr/>
+          <p:nvPr/>
+        </p:nvSpPr>
+        <p:spPr>
+          <a:xfrm>
+            <a:off x="822960" y="3648456"/>
+            <a:ext cx="914400" cy="777240"/>
+          </a:xfrm>
+          <a:prstGeom prst="rect">
+            <a:avLst/>
+          </a:prstGeom>
+          <a:noFill/>
+          <a:ln/>
+        </p:spPr>
+        <p:txBody>
+          <a:bodyPr wrap="square" rtlCol="0" anchor="ctr"/>
+          <a:lstStyle/>
+          <a:p>
+            <a:pPr indent="0" marL="0">
+              <a:buNone/>
+            </a:pPr>
+            <a:r>
+              <a:rPr lang="en-US" sz="1600" b="1" dirty="0">
+                <a:solidFill>
+                  <a:srgbClr val="4FD1FF"/>
+                </a:solidFill>
+                <a:latin typeface="Cambria" pitchFamily="34" charset="0"/>
+                <a:ea typeface="Cambria" pitchFamily="34" charset="-122"/>
+                <a:cs typeface="Cambria" pitchFamily="34" charset="-120"/>
+              </a:rPr>
+              <a:t>H3</a:t>
+            </a:r>
+            <a:endParaRPr lang="en-US" sz="1600" dirty="0"/>
+          </a:p>
+        </p:txBody>
+      </p:sp>
+      <p:sp>
+        <p:nvSpPr>
+          <p:cNvPr id="12" name="Text 10"/>
+          <p:cNvSpPr/>
+          <p:nvPr/>
+        </p:nvSpPr>
+        <p:spPr>
+          <a:xfrm>
+            <a:off x="1828800" y="3648456"/>
+            <a:ext cx="9811512" cy="777240"/>
+          </a:xfrm>
+          <a:prstGeom prst="rect">
+            <a:avLst/>
+          </a:prstGeom>
+          <a:noFill/>
+          <a:ln/>
+        </p:spPr>
+        <p:txBody>
+          <a:bodyPr wrap="square" rtlCol="0" anchor="ctr"/>
+          <a:lstStyle/>
+          <a:p>
+            <a:pPr indent="0" marL="0">
+              <a:buNone/>
+            </a:pPr>
+            <a:r>
+              <a:rPr lang="en-US" sz="1300" dirty="0">
+                <a:solidFill>
+                  <a:srgbClr val="E6ECFF"/>
+                </a:solidFill>
+                <a:latin typeface="Calibri" pitchFamily="34" charset="0"/>
+                <a:ea typeface="Calibri" pitchFamily="34" charset="-122"/>
+                <a:cs typeface="Calibri" pitchFamily="34" charset="-120"/>
+              </a:rPr>
+              <a:t>Разница между источниками значима, но умереннее после исправления методики</a:t>
+            </a:r>
+            <a:endParaRPr lang="en-US" sz="1300" dirty="0"/>
+          </a:p>
+        </p:txBody>
+      </p:sp>
+      <p:sp>
+        <p:nvSpPr>
+          <p:cNvPr id="13" name="Shape 11"/>
+          <p:cNvSpPr/>
+          <p:nvPr/>
+        </p:nvSpPr>
+        <p:spPr>
+          <a:xfrm>
+            <a:off x="548640" y="4581144"/>
+            <a:ext cx="11091672" cy="777240"/>
+          </a:xfrm>
+          <a:prstGeom prst="roundRect">
+            <a:avLst>
+              <a:gd name="adj" fmla="val 9412"/>
+            </a:avLst>
+          </a:prstGeom>
+          <a:solidFill>
+            <a:srgbClr val="131A3A"/>
+          </a:solidFill>
+          <a:ln/>
+        </p:spPr>
+      </p:sp>
+      <p:sp>
+        <p:nvSpPr>
+          <p:cNvPr id="14" name="Text 12"/>
+          <p:cNvSpPr/>
+          <p:nvPr/>
+        </p:nvSpPr>
+        <p:spPr>
+          <a:xfrm>
+            <a:off x="822960" y="4581144"/>
+            <a:ext cx="914400" cy="777240"/>
+          </a:xfrm>
+          <a:prstGeom prst="rect">
+            <a:avLst/>
+          </a:prstGeom>
+          <a:noFill/>
+          <a:ln/>
+        </p:spPr>
+        <p:txBody>
+          <a:bodyPr wrap="square" rtlCol="0" anchor="ctr"/>
+          <a:lstStyle/>
+          <a:p>
+            <a:pPr indent="0" marL="0">
+              <a:buNone/>
+            </a:pPr>
+            <a:r>
+              <a:rPr lang="en-US" sz="1600" b="1" dirty="0">
+                <a:solidFill>
+                  <a:srgbClr val="4FD1FF"/>
+                </a:solidFill>
+                <a:latin typeface="Cambria" pitchFamily="34" charset="0"/>
+                <a:ea typeface="Cambria" pitchFamily="34" charset="-122"/>
+                <a:cs typeface="Cambria" pitchFamily="34" charset="-120"/>
+              </a:rPr>
+              <a:t>H4</a:t>
+            </a:r>
+            <a:endParaRPr lang="en-US" sz="1600" dirty="0"/>
+          </a:p>
+        </p:txBody>
+      </p:sp>
+      <p:sp>
+        <p:nvSpPr>
+          <p:cNvPr id="15" name="Text 13"/>
+          <p:cNvSpPr/>
+          <p:nvPr/>
+        </p:nvSpPr>
+        <p:spPr>
+          <a:xfrm>
+            <a:off x="1828800" y="4581144"/>
+            <a:ext cx="9811512" cy="777240"/>
+          </a:xfrm>
+          <a:prstGeom prst="rect">
+            <a:avLst/>
+          </a:prstGeom>
+          <a:noFill/>
+          <a:ln/>
+        </p:spPr>
+        <p:txBody>
+          <a:bodyPr wrap="square" rtlCol="0" anchor="ctr"/>
+          <a:lstStyle/>
+          <a:p>
+            <a:pPr indent="0" marL="0">
+              <a:buNone/>
+            </a:pPr>
+            <a:r>
+              <a:rPr lang="en-US" sz="1300" dirty="0">
+                <a:solidFill>
+                  <a:srgbClr val="E6ECFF"/>
+                </a:solidFill>
+                <a:latin typeface="Calibri" pitchFamily="34" charset="0"/>
+                <a:ea typeface="Calibri" pitchFamily="34" charset="-122"/>
+                <a:cs typeface="Calibri" pitchFamily="34" charset="-120"/>
+              </a:rPr>
+              <a:t>Охват поддержки различается по направлениям бизнеса в разы — приоритет разный для доли и объёма</a:t>
+            </a:r>
+            <a:endParaRPr lang="en-US" sz="1300" dirty="0"/>
+          </a:p>
+        </p:txBody>
+      </p:sp>
+      <p:sp>
+        <p:nvSpPr>
+          <p:cNvPr id="16" name="Shape 14"/>
+          <p:cNvSpPr/>
+          <p:nvPr/>
+        </p:nvSpPr>
+        <p:spPr>
+          <a:xfrm>
+            <a:off x="548640" y="5513832"/>
+            <a:ext cx="11091672" cy="777240"/>
+          </a:xfrm>
+          <a:prstGeom prst="roundRect">
+            <a:avLst>
+              <a:gd name="adj" fmla="val 9412"/>
+            </a:avLst>
+          </a:prstGeom>
+          <a:solidFill>
+            <a:srgbClr val="131A3A"/>
+          </a:solidFill>
+          <a:ln/>
+        </p:spPr>
+      </p:sp>
+      <p:sp>
+        <p:nvSpPr>
+          <p:cNvPr id="17" name="Text 15"/>
+          <p:cNvSpPr/>
+          <p:nvPr/>
+        </p:nvSpPr>
+        <p:spPr>
+          <a:xfrm>
+            <a:off x="822960" y="5513832"/>
+            <a:ext cx="914400" cy="777240"/>
+          </a:xfrm>
+          <a:prstGeom prst="rect">
+            <a:avLst/>
+          </a:prstGeom>
+          <a:noFill/>
+          <a:ln/>
+        </p:spPr>
+        <p:txBody>
+          <a:bodyPr wrap="square" rtlCol="0" anchor="ctr"/>
+          <a:lstStyle/>
+          <a:p>
+            <a:pPr indent="0" marL="0">
+              <a:buNone/>
+            </a:pPr>
+            <a:r>
+              <a:rPr lang="en-US" sz="1600" b="1" dirty="0">
+                <a:solidFill>
+                  <a:srgbClr val="4FD1FF"/>
+                </a:solidFill>
+                <a:latin typeface="Cambria" pitchFamily="34" charset="0"/>
+                <a:ea typeface="Cambria" pitchFamily="34" charset="-122"/>
+                <a:cs typeface="Cambria" pitchFamily="34" charset="-120"/>
+              </a:rPr>
+              <a:t>H5</a:t>
+            </a:r>
+            <a:endParaRPr lang="en-US" sz="1600" dirty="0"/>
+          </a:p>
+        </p:txBody>
+      </p:sp>
+      <p:sp>
+        <p:nvSpPr>
+          <p:cNvPr id="18" name="Text 16"/>
+          <p:cNvSpPr/>
+          <p:nvPr/>
+        </p:nvSpPr>
+        <p:spPr>
+          <a:xfrm>
+            <a:off x="1828800" y="5513832"/>
+            <a:ext cx="9811512" cy="777240"/>
+          </a:xfrm>
+          <a:prstGeom prst="rect">
+            <a:avLst/>
+          </a:prstGeom>
+          <a:noFill/>
+          <a:ln/>
+        </p:spPr>
+        <p:txBody>
+          <a:bodyPr wrap="square" rtlCol="0" anchor="ctr"/>
+          <a:lstStyle/>
+          <a:p>
+            <a:pPr indent="0" marL="0">
+              <a:buNone/>
+            </a:pPr>
+            <a:r>
+              <a:rPr lang="en-US" sz="1300" dirty="0">
+                <a:solidFill>
+                  <a:srgbClr val="E6ECFF"/>
+                </a:solidFill>
+                <a:latin typeface="Calibri" pitchFamily="34" charset="0"/>
+                <a:ea typeface="Calibri" pitchFamily="34" charset="-122"/>
+                <a:cs typeface="Calibri" pitchFamily="34" charset="-120"/>
+              </a:rPr>
+              <a:t>Новые клиенты недовольнее из-за трения первого касания, а не худшего продукта</a:t>
+            </a:r>
+            <a:endParaRPr lang="en-US" sz="1300" dirty="0"/>
+          </a:p>
+        </p:txBody>
+      </p:sp>
+      <p:sp>
+        <p:nvSpPr>
+          <p:cNvPr id="19" name="Text 17"/>
+          <p:cNvSpPr/>
+          <p:nvPr/>
+        </p:nvSpPr>
+        <p:spPr>
+          <a:xfrm>
+            <a:off x="457200" y="6446520"/>
+            <a:ext cx="7315200" cy="274320"/>
+          </a:xfrm>
+          <a:prstGeom prst="rect">
+            <a:avLst/>
+          </a:prstGeom>
+          <a:noFill/>
+          <a:ln/>
+        </p:spPr>
+        <p:txBody>
+          <a:bodyPr wrap="square" rtlCol="0" anchor="ctr"/>
+          <a:lstStyle/>
+          <a:p>
+            <a:pPr indent="0" marL="0">
+              <a:buNone/>
+            </a:pPr>
+            <a:r>
+              <a:rPr lang="en-US" sz="900" dirty="0">
+                <a:solidFill>
+                  <a:srgbClr val="8891C5"/>
+                </a:solidFill>
+                <a:latin typeface="Calibri" pitchFamily="34" charset="0"/>
+                <a:ea typeface="Calibri" pitchFamily="34" charset="-122"/>
+                <a:cs typeface="Calibri" pitchFamily="34" charset="-120"/>
+              </a:rPr>
+              <a:t>Отзывы клиентов Т-Банка — продуктовая аналитика</a:t>
+            </a:r>
+            <a:endParaRPr lang="en-US" sz="900" dirty="0"/>
+          </a:p>
+        </p:txBody>
+      </p:sp>
+      <p:sp>
+        <p:nvSpPr>
+          <p:cNvPr id="20" name="Text 18"/>
+          <p:cNvSpPr/>
+          <p:nvPr/>
+        </p:nvSpPr>
+        <p:spPr>
+          <a:xfrm>
+            <a:off x="11274552" y="6446520"/>
+            <a:ext cx="457200" cy="274320"/>
+          </a:xfrm>
+          <a:prstGeom prst="rect">
+            <a:avLst/>
+          </a:prstGeom>
+          <a:noFill/>
+          <a:ln/>
+        </p:spPr>
+        <p:txBody>
+          <a:bodyPr wrap="square" rtlCol="0" anchor="ctr"/>
+          <a:lstStyle/>
+          <a:p>
+            <a:pPr algn="r" indent="0" marL="0">
+              <a:buNone/>
+            </a:pPr>
+            <a:r>
+              <a:rPr lang="en-US" sz="900" dirty="0">
+                <a:solidFill>
+                  <a:srgbClr val="8891C5"/>
+                </a:solidFill>
+                <a:latin typeface="Calibri" pitchFamily="34" charset="0"/>
+                <a:ea typeface="Calibri" pitchFamily="34" charset="-122"/>
+                <a:cs typeface="Calibri" pitchFamily="34" charset="-120"/>
+              </a:rPr>
+              <a:t>14</a:t>
+            </a:r>
+            <a:endParaRPr lang="en-US" sz="900" dirty="0"/>
+          </a:p>
+        </p:txBody>
+      </p:sp>
+    </p:spTree>
+  </p:cSld>
+  <p:clrMapOvr>
+    <a:masterClrMapping/>
+  </p:clrMapOvr>
+</p:sld>
+</file>
+
+<file path=ppt/slides/slide15.xml><?xml version="1.0" encoding="utf-8"?>
+<p:sld xmlns:a="http://schemas.openxmlformats.org/drawingml/2006/main" xmlns:r="http://schemas.openxmlformats.org/officeDocument/2006/relationships" xmlns:p="http://schemas.openxmlformats.org/presentationml/2006/main">
+  <p:cSld name="Slide 15">
+    <p:bg>
+      <p:bgPr>
+        <a:solidFill>
+          <a:srgbClr val="0B1026"/>
+        </a:solidFill>
+      </p:bgPr>
+    </p:bg>
+    <p:spTree>
+      <p:nvGrpSpPr>
+        <p:cNvPr id="1" name=""/>
+        <p:cNvGrpSpPr/>
+        <p:nvPr/>
+      </p:nvGrpSpPr>
+      <p:grpSpPr>
+        <a:xfrm>
+          <a:off x="0" y="0"/>
+          <a:ext cx="0" cy="0"/>
+          <a:chOff x="0" y="0"/>
+          <a:chExt cx="0" cy="0"/>
+        </a:xfrm>
+      </p:grpSpPr>
+      <p:sp>
+        <p:nvSpPr>
+          <p:cNvPr id="2" name="Text 0"/>
+          <p:cNvSpPr/>
+          <p:nvPr/>
+        </p:nvSpPr>
+        <p:spPr>
+          <a:xfrm>
+            <a:off x="548640" y="411480"/>
+            <a:ext cx="9144000" cy="320040"/>
+          </a:xfrm>
+          <a:prstGeom prst="rect">
+            <a:avLst/>
+          </a:prstGeom>
+          <a:noFill/>
+          <a:ln/>
+        </p:spPr>
+        <p:txBody>
+          <a:bodyPr wrap="square" rtlCol="0" anchor="ctr"/>
+          <a:lstStyle/>
+          <a:p>
+            <a:pPr indent="0" marL="0">
+              <a:buNone/>
+            </a:pPr>
+            <a:r>
+              <a:rPr lang="en-US" sz="1300" b="1" spc="200" kern="0" dirty="0">
+                <a:solidFill>
+                  <a:srgbClr val="4FD1FF"/>
+                </a:solidFill>
+                <a:latin typeface="Calibri" pitchFamily="34" charset="0"/>
+                <a:ea typeface="Calibri" pitchFamily="34" charset="-122"/>
+                <a:cs typeface="Calibri" pitchFamily="34" charset="-120"/>
+              </a:rPr>
+              <a:t>РЕКОМЕНДАЦИИ</a:t>
+            </a:r>
+            <a:endParaRPr lang="en-US" sz="1300" dirty="0"/>
+          </a:p>
+        </p:txBody>
+      </p:sp>
+      <p:sp>
+        <p:nvSpPr>
+          <p:cNvPr id="3" name="Text 1"/>
+          <p:cNvSpPr/>
+          <p:nvPr/>
+        </p:nvSpPr>
+        <p:spPr>
+          <a:xfrm>
+            <a:off x="548640" y="731520"/>
+            <a:ext cx="11091672" cy="914400"/>
+          </a:xfrm>
+          <a:prstGeom prst="rect">
+            <a:avLst/>
+          </a:prstGeom>
+          <a:noFill/>
+          <a:ln/>
+        </p:spPr>
+        <p:txBody>
+          <a:bodyPr wrap="square" rtlCol="0" anchor="ctr"/>
+          <a:lstStyle/>
+          <a:p>
+            <a:pPr indent="0" marL="0">
+              <a:buNone/>
+            </a:pPr>
+            <a:r>
+              <a:rPr lang="en-US" sz="2800" b="1" dirty="0">
+                <a:solidFill>
+                  <a:srgbClr val="E6ECFF"/>
+                </a:solidFill>
+                <a:latin typeface="Cambria" pitchFamily="34" charset="0"/>
+                <a:ea typeface="Cambria" pitchFamily="34" charset="-122"/>
+                <a:cs typeface="Cambria" pitchFamily="34" charset="-120"/>
+              </a:rPr>
+              <a:t>Что делать продуктовой команде</a:t>
+            </a:r>
+            <a:endParaRPr lang="en-US" sz="2800" dirty="0"/>
+          </a:p>
+        </p:txBody>
+      </p:sp>
+      <p:sp>
+        <p:nvSpPr>
+          <p:cNvPr id="4" name="Shape 2"/>
+          <p:cNvSpPr/>
+          <p:nvPr/>
+        </p:nvSpPr>
+        <p:spPr>
+          <a:xfrm>
+            <a:off x="548640" y="1719072"/>
+            <a:ext cx="411480" cy="411480"/>
+          </a:xfrm>
+          <a:prstGeom prst="ellipse">
+            <a:avLst/>
+          </a:prstGeom>
+          <a:solidFill>
+            <a:srgbClr val="7C8CFF"/>
+          </a:solidFill>
+          <a:ln/>
+        </p:spPr>
+      </p:sp>
+      <p:sp>
+        <p:nvSpPr>
+          <p:cNvPr id="5" name="Text 3"/>
+          <p:cNvSpPr/>
+          <p:nvPr/>
+        </p:nvSpPr>
+        <p:spPr>
+          <a:xfrm>
+            <a:off x="548640" y="1719072"/>
+            <a:ext cx="411480" cy="411480"/>
+          </a:xfrm>
+          <a:prstGeom prst="rect">
+            <a:avLst/>
+          </a:prstGeom>
+          <a:noFill/>
+          <a:ln/>
+        </p:spPr>
+        <p:txBody>
+          <a:bodyPr wrap="square" rtlCol="0" anchor="ctr"/>
+          <a:lstStyle/>
+          <a:p>
+            <a:pPr algn="ctr" indent="0" marL="0">
+              <a:buNone/>
+            </a:pPr>
+            <a:r>
+              <a:rPr lang="en-US" sz="1500" b="1" dirty="0">
+                <a:solidFill>
+                  <a:srgbClr val="0B1026"/>
+                </a:solidFill>
+                <a:latin typeface="Calibri" pitchFamily="34" charset="0"/>
+                <a:ea typeface="Calibri" pitchFamily="34" charset="-122"/>
+                <a:cs typeface="Calibri" pitchFamily="34" charset="-120"/>
+              </a:rPr>
+              <a:t>1</a:t>
+            </a:r>
+            <a:endParaRPr lang="en-US" sz="1500" dirty="0"/>
+          </a:p>
+        </p:txBody>
+      </p:sp>
+      <p:sp>
+        <p:nvSpPr>
+          <p:cNvPr id="6" name="Text 4"/>
+          <p:cNvSpPr/>
+          <p:nvPr/>
+        </p:nvSpPr>
+        <p:spPr>
+          <a:xfrm>
+            <a:off x="1188720" y="1691640"/>
+            <a:ext cx="5029200" cy="502920"/>
+          </a:xfrm>
+          <a:prstGeom prst="rect">
+            <a:avLst/>
+          </a:prstGeom>
+          <a:noFill/>
+          <a:ln/>
+        </p:spPr>
+        <p:txBody>
+          <a:bodyPr wrap="square" rtlCol="0" anchor="t"/>
+          <a:lstStyle/>
+          <a:p>
+            <a:pPr indent="0" marL="0">
+              <a:buNone/>
+            </a:pPr>
+            <a:r>
+              <a:rPr lang="en-US" sz="1400" b="1" dirty="0">
+                <a:solidFill>
+                  <a:srgbClr val="E6ECFF"/>
+                </a:solidFill>
+                <a:latin typeface="Cambria" pitchFamily="34" charset="0"/>
+                <a:ea typeface="Cambria" pitchFamily="34" charset="-122"/>
+                <a:cs typeface="Cambria" pitchFamily="34" charset="-120"/>
+              </a:rPr>
+              <a:t>Приоритет по депозитам — объёмный эффект</a:t>
+            </a:r>
+            <a:endParaRPr lang="en-US" sz="1400" dirty="0"/>
+          </a:p>
+        </p:txBody>
+      </p:sp>
+      <p:sp>
+        <p:nvSpPr>
+          <p:cNvPr id="7" name="Text 5"/>
+          <p:cNvSpPr/>
+          <p:nvPr/>
+        </p:nvSpPr>
+        <p:spPr>
+          <a:xfrm>
+            <a:off x="6355080" y="1691640"/>
+            <a:ext cx="5303520" cy="502920"/>
+          </a:xfrm>
+          <a:prstGeom prst="rect">
+            <a:avLst/>
+          </a:prstGeom>
+          <a:noFill/>
+          <a:ln/>
+        </p:spPr>
+        <p:txBody>
+          <a:bodyPr wrap="square" rtlCol="0" anchor="t"/>
+          <a:lstStyle/>
+          <a:p>
+            <a:pPr indent="0" marL="0">
+              <a:buNone/>
+            </a:pPr>
+            <a:r>
+              <a:rPr lang="en-US" sz="1100" dirty="0">
+                <a:solidFill>
+                  <a:srgbClr val="8891C5"/>
+                </a:solidFill>
+                <a:latin typeface="Calibri" pitchFamily="34" charset="0"/>
+                <a:ea typeface="Calibri" pitchFamily="34" charset="-122"/>
+                <a:cs typeface="Calibri" pitchFamily="34" charset="-120"/>
+              </a:rPr>
+              <a:t>≈35% всех нерешённых жалоб банка. Небольшое улучшение здесь даёт больше эффекта на общий счётчик, чем где-либо ещё.</a:t>
+            </a:r>
+            <a:endParaRPr lang="en-US" sz="1100" dirty="0"/>
+          </a:p>
+        </p:txBody>
+      </p:sp>
+      <p:sp>
+        <p:nvSpPr>
+          <p:cNvPr id="8" name="Shape 6"/>
+          <p:cNvSpPr/>
+          <p:nvPr/>
+        </p:nvSpPr>
+        <p:spPr>
+          <a:xfrm>
+            <a:off x="548640" y="2651760"/>
+            <a:ext cx="411480" cy="411480"/>
+          </a:xfrm>
+          <a:prstGeom prst="ellipse">
+            <a:avLst/>
+          </a:prstGeom>
+          <a:solidFill>
+            <a:srgbClr val="7C8CFF"/>
+          </a:solidFill>
+          <a:ln/>
+        </p:spPr>
+      </p:sp>
+      <p:sp>
+        <p:nvSpPr>
+          <p:cNvPr id="9" name="Text 7"/>
+          <p:cNvSpPr/>
+          <p:nvPr/>
+        </p:nvSpPr>
+        <p:spPr>
+          <a:xfrm>
+            <a:off x="548640" y="2651760"/>
+            <a:ext cx="411480" cy="411480"/>
+          </a:xfrm>
+          <a:prstGeom prst="rect">
+            <a:avLst/>
+          </a:prstGeom>
+          <a:noFill/>
+          <a:ln/>
+        </p:spPr>
+        <p:txBody>
+          <a:bodyPr wrap="square" rtlCol="0" anchor="ctr"/>
+          <a:lstStyle/>
+          <a:p>
+            <a:pPr algn="ctr" indent="0" marL="0">
+              <a:buNone/>
+            </a:pPr>
+            <a:r>
+              <a:rPr lang="en-US" sz="1500" b="1" dirty="0">
+                <a:solidFill>
+                  <a:srgbClr val="0B1026"/>
+                </a:solidFill>
+                <a:latin typeface="Calibri" pitchFamily="34" charset="0"/>
+                <a:ea typeface="Calibri" pitchFamily="34" charset="-122"/>
+                <a:cs typeface="Calibri" pitchFamily="34" charset="-120"/>
+              </a:rPr>
+              <a:t>2</a:t>
+            </a:r>
+            <a:endParaRPr lang="en-US" sz="1500" dirty="0"/>
+          </a:p>
+        </p:txBody>
+      </p:sp>
+      <p:sp>
+        <p:nvSpPr>
+          <p:cNvPr id="10" name="Text 8"/>
+          <p:cNvSpPr/>
+          <p:nvPr/>
+        </p:nvSpPr>
+        <p:spPr>
+          <a:xfrm>
+            <a:off x="1188720" y="2624328"/>
+            <a:ext cx="5029200" cy="502920"/>
+          </a:xfrm>
+          <a:prstGeom prst="rect">
+            <a:avLst/>
+          </a:prstGeom>
+          <a:noFill/>
+          <a:ln/>
+        </p:spPr>
+        <p:txBody>
+          <a:bodyPr wrap="square" rtlCol="0" anchor="t"/>
+          <a:lstStyle/>
+          <a:p>
+            <a:pPr indent="0" marL="0">
+              <a:buNone/>
+            </a:pPr>
+            <a:r>
+              <a:rPr lang="en-US" sz="1400" b="1" dirty="0">
+                <a:solidFill>
+                  <a:srgbClr val="E6ECFF"/>
+                </a:solidFill>
+                <a:latin typeface="Cambria" pitchFamily="34" charset="0"/>
+                <a:ea typeface="Cambria" pitchFamily="34" charset="-122"/>
+                <a:cs typeface="Cambria" pitchFamily="34" charset="-120"/>
+              </a:rPr>
+              <a:t>Срочно разобраться с провалом в mobile</a:t>
+            </a:r>
+            <a:endParaRPr lang="en-US" sz="1400" dirty="0"/>
+          </a:p>
+        </p:txBody>
+      </p:sp>
+      <p:sp>
+        <p:nvSpPr>
+          <p:cNvPr id="11" name="Text 9"/>
+          <p:cNvSpPr/>
+          <p:nvPr/>
+        </p:nvSpPr>
+        <p:spPr>
+          <a:xfrm>
+            <a:off x="6355080" y="2624328"/>
+            <a:ext cx="5303520" cy="502920"/>
+          </a:xfrm>
+          <a:prstGeom prst="rect">
+            <a:avLst/>
+          </a:prstGeom>
+          <a:noFill/>
+          <a:ln/>
+        </p:spPr>
+        <p:txBody>
+          <a:bodyPr wrap="square" rtlCol="0" anchor="t"/>
+          <a:lstStyle/>
+          <a:p>
+            <a:pPr indent="0" marL="0">
+              <a:buNone/>
+            </a:pPr>
+            <a:r>
+              <a:rPr lang="en-US" sz="1100" dirty="0">
+                <a:solidFill>
+                  <a:srgbClr val="8891C5"/>
+                </a:solidFill>
+                <a:latin typeface="Calibri" pitchFamily="34" charset="0"/>
+                <a:ea typeface="Calibri" pitchFamily="34" charset="-122"/>
+                <a:cs typeface="Calibri" pitchFamily="34" charset="-120"/>
+              </a:rPr>
+              <a:t>0.9% решённых обращений среди жалоб — понять, реальный это пробел процесса или технический разрыв в маршрутизации заявок.</a:t>
+            </a:r>
+            <a:endParaRPr lang="en-US" sz="1100" dirty="0"/>
+          </a:p>
+        </p:txBody>
+      </p:sp>
+      <p:sp>
+        <p:nvSpPr>
+          <p:cNvPr id="12" name="Shape 10"/>
+          <p:cNvSpPr/>
+          <p:nvPr/>
+        </p:nvSpPr>
+        <p:spPr>
+          <a:xfrm>
+            <a:off x="548640" y="3584448"/>
+            <a:ext cx="411480" cy="411480"/>
+          </a:xfrm>
+          <a:prstGeom prst="ellipse">
+            <a:avLst/>
+          </a:prstGeom>
+          <a:solidFill>
+            <a:srgbClr val="7C8CFF"/>
+          </a:solidFill>
+          <a:ln/>
+        </p:spPr>
+      </p:sp>
+      <p:sp>
+        <p:nvSpPr>
+          <p:cNvPr id="13" name="Text 11"/>
+          <p:cNvSpPr/>
+          <p:nvPr/>
+        </p:nvSpPr>
+        <p:spPr>
+          <a:xfrm>
+            <a:off x="548640" y="3584448"/>
+            <a:ext cx="411480" cy="411480"/>
+          </a:xfrm>
+          <a:prstGeom prst="rect">
+            <a:avLst/>
+          </a:prstGeom>
+          <a:noFill/>
+          <a:ln/>
+        </p:spPr>
+        <p:txBody>
+          <a:bodyPr wrap="square" rtlCol="0" anchor="ctr"/>
+          <a:lstStyle/>
+          <a:p>
+            <a:pPr algn="ctr" indent="0" marL="0">
+              <a:buNone/>
+            </a:pPr>
+            <a:r>
+              <a:rPr lang="en-US" sz="1500" b="1" dirty="0">
+                <a:solidFill>
+                  <a:srgbClr val="0B1026"/>
+                </a:solidFill>
+                <a:latin typeface="Calibri" pitchFamily="34" charset="0"/>
+                <a:ea typeface="Calibri" pitchFamily="34" charset="-122"/>
+                <a:cs typeface="Calibri" pitchFamily="34" charset="-120"/>
+              </a:rPr>
+              <a:t>3</a:t>
+            </a:r>
+            <a:endParaRPr lang="en-US" sz="1500" dirty="0"/>
+          </a:p>
+        </p:txBody>
+      </p:sp>
+      <p:sp>
+        <p:nvSpPr>
+          <p:cNvPr id="14" name="Text 12"/>
+          <p:cNvSpPr/>
+          <p:nvPr/>
+        </p:nvSpPr>
+        <p:spPr>
+          <a:xfrm>
+            <a:off x="1188720" y="3557016"/>
+            <a:ext cx="5029200" cy="502920"/>
+          </a:xfrm>
+          <a:prstGeom prst="rect">
+            <a:avLst/>
+          </a:prstGeom>
+          <a:noFill/>
+          <a:ln/>
+        </p:spPr>
+        <p:txBody>
+          <a:bodyPr wrap="square" rtlCol="0" anchor="t"/>
+          <a:lstStyle/>
+          <a:p>
+            <a:pPr indent="0" marL="0">
+              <a:buNone/>
+            </a:pPr>
+            <a:r>
+              <a:rPr lang="en-US" sz="1400" b="1" dirty="0">
+                <a:solidFill>
+                  <a:srgbClr val="E6ECFF"/>
+                </a:solidFill>
+                <a:latin typeface="Cambria" pitchFamily="34" charset="0"/>
+                <a:ea typeface="Cambria" pitchFamily="34" charset="-122"/>
+                <a:cs typeface="Cambria" pitchFamily="34" charset="-120"/>
+              </a:rPr>
+              <a:t>Изучить и перенести практики premium-поддержки</a:t>
+            </a:r>
+            <a:endParaRPr lang="en-US" sz="1400" dirty="0"/>
+          </a:p>
+        </p:txBody>
+      </p:sp>
+      <p:sp>
+        <p:nvSpPr>
+          <p:cNvPr id="15" name="Text 13"/>
+          <p:cNvSpPr/>
+          <p:nvPr/>
+        </p:nvSpPr>
+        <p:spPr>
+          <a:xfrm>
+            <a:off x="6355080" y="3557016"/>
+            <a:ext cx="5303520" cy="502920"/>
+          </a:xfrm>
+          <a:prstGeom prst="rect">
+            <a:avLst/>
+          </a:prstGeom>
+          <a:noFill/>
+          <a:ln/>
+        </p:spPr>
+        <p:txBody>
+          <a:bodyPr wrap="square" rtlCol="0" anchor="t"/>
+          <a:lstStyle/>
+          <a:p>
+            <a:pPr indent="0" marL="0">
+              <a:buNone/>
+            </a:pPr>
+            <a:r>
+              <a:rPr lang="en-US" sz="1100" dirty="0">
+                <a:solidFill>
+                  <a:srgbClr val="8891C5"/>
+                </a:solidFill>
+                <a:latin typeface="Calibri" pitchFamily="34" charset="0"/>
+                <a:ea typeface="Calibri" pitchFamily="34" charset="-122"/>
+                <a:cs typeface="Calibri" pitchFamily="34" charset="-120"/>
+              </a:rPr>
+              <a:t>25 п.п. разницы между защищёнными и высокодоходными клиентами — понять, что из этого сервиса дёшево перенести.</a:t>
+            </a:r>
+            <a:endParaRPr lang="en-US" sz="1100" dirty="0"/>
+          </a:p>
+        </p:txBody>
+      </p:sp>
+      <p:sp>
+        <p:nvSpPr>
+          <p:cNvPr id="16" name="Shape 14"/>
+          <p:cNvSpPr/>
+          <p:nvPr/>
+        </p:nvSpPr>
+        <p:spPr>
+          <a:xfrm>
+            <a:off x="548640" y="4517136"/>
+            <a:ext cx="411480" cy="411480"/>
+          </a:xfrm>
+          <a:prstGeom prst="ellipse">
+            <a:avLst/>
+          </a:prstGeom>
+          <a:solidFill>
+            <a:srgbClr val="7C8CFF"/>
+          </a:solidFill>
+          <a:ln/>
+        </p:spPr>
+      </p:sp>
+      <p:sp>
+        <p:nvSpPr>
+          <p:cNvPr id="17" name="Text 15"/>
+          <p:cNvSpPr/>
+          <p:nvPr/>
+        </p:nvSpPr>
+        <p:spPr>
+          <a:xfrm>
+            <a:off x="548640" y="4517136"/>
+            <a:ext cx="411480" cy="411480"/>
+          </a:xfrm>
+          <a:prstGeom prst="rect">
+            <a:avLst/>
+          </a:prstGeom>
+          <a:noFill/>
+          <a:ln/>
+        </p:spPr>
+        <p:txBody>
+          <a:bodyPr wrap="square" rtlCol="0" anchor="ctr"/>
+          <a:lstStyle/>
+          <a:p>
+            <a:pPr algn="ctr" indent="0" marL="0">
+              <a:buNone/>
+            </a:pPr>
+            <a:r>
+              <a:rPr lang="en-US" sz="1500" b="1" dirty="0">
+                <a:solidFill>
+                  <a:srgbClr val="0B1026"/>
+                </a:solidFill>
+                <a:latin typeface="Calibri" pitchFamily="34" charset="0"/>
+                <a:ea typeface="Calibri" pitchFamily="34" charset="-122"/>
+                <a:cs typeface="Calibri" pitchFamily="34" charset="-120"/>
+              </a:rPr>
+              <a:t>4</a:t>
+            </a:r>
+            <a:endParaRPr lang="en-US" sz="1500" dirty="0"/>
+          </a:p>
+        </p:txBody>
+      </p:sp>
+      <p:sp>
+        <p:nvSpPr>
+          <p:cNvPr id="18" name="Text 16"/>
+          <p:cNvSpPr/>
+          <p:nvPr/>
+        </p:nvSpPr>
+        <p:spPr>
+          <a:xfrm>
+            <a:off x="1188720" y="4489704"/>
+            <a:ext cx="5029200" cy="502920"/>
+          </a:xfrm>
+          <a:prstGeom prst="rect">
+            <a:avLst/>
+          </a:prstGeom>
+          <a:noFill/>
+          <a:ln/>
+        </p:spPr>
+        <p:txBody>
+          <a:bodyPr wrap="square" rtlCol="0" anchor="t"/>
+          <a:lstStyle/>
+          <a:p>
+            <a:pPr indent="0" marL="0">
+              <a:buNone/>
+            </a:pPr>
+            <a:r>
+              <a:rPr lang="en-US" sz="1400" b="1" dirty="0">
+                <a:solidFill>
+                  <a:srgbClr val="E6ECFF"/>
+                </a:solidFill>
+                <a:latin typeface="Cambria" pitchFamily="34" charset="0"/>
+                <a:ea typeface="Cambria" pitchFamily="34" charset="-122"/>
+                <a:cs typeface="Cambria" pitchFamily="34" charset="-120"/>
+              </a:rPr>
+              <a:t>Точечная забота о новых клиентах в первые недели</a:t>
+            </a:r>
+            <a:endParaRPr lang="en-US" sz="1400" dirty="0"/>
+          </a:p>
+        </p:txBody>
+      </p:sp>
+      <p:sp>
+        <p:nvSpPr>
+          <p:cNvPr id="19" name="Text 17"/>
+          <p:cNvSpPr/>
+          <p:nvPr/>
+        </p:nvSpPr>
+        <p:spPr>
+          <a:xfrm>
+            <a:off x="6355080" y="4489704"/>
+            <a:ext cx="5303520" cy="502920"/>
+          </a:xfrm>
+          <a:prstGeom prst="rect">
+            <a:avLst/>
+          </a:prstGeom>
+          <a:noFill/>
+          <a:ln/>
+        </p:spPr>
+        <p:txBody>
+          <a:bodyPr wrap="square" rtlCol="0" anchor="t"/>
+          <a:lstStyle/>
+          <a:p>
+            <a:pPr indent="0" marL="0">
+              <a:buNone/>
+            </a:pPr>
+            <a:r>
+              <a:rPr lang="en-US" sz="1100" dirty="0">
+                <a:solidFill>
+                  <a:srgbClr val="8891C5"/>
+                </a:solidFill>
+                <a:latin typeface="Calibri" pitchFamily="34" charset="0"/>
+                <a:ea typeface="Calibri" pitchFamily="34" charset="-122"/>
+                <a:cs typeface="Calibri" pitchFamily="34" charset="-120"/>
+              </a:rPr>
+              <a:t>Недовольство концентрируется вокруг подключения карт, депозитов, автокредитов — ставка на LTV, а не изменение продукта.</a:t>
+            </a:r>
+            <a:endParaRPr lang="en-US" sz="1100" dirty="0"/>
+          </a:p>
+        </p:txBody>
+      </p:sp>
+      <p:sp>
+        <p:nvSpPr>
+          <p:cNvPr id="20" name="Shape 18"/>
+          <p:cNvSpPr/>
+          <p:nvPr/>
+        </p:nvSpPr>
+        <p:spPr>
+          <a:xfrm>
+            <a:off x="548640" y="5449824"/>
+            <a:ext cx="411480" cy="411480"/>
+          </a:xfrm>
+          <a:prstGeom prst="ellipse">
+            <a:avLst/>
+          </a:prstGeom>
+          <a:solidFill>
+            <a:srgbClr val="7C8CFF"/>
+          </a:solidFill>
+          <a:ln/>
+        </p:spPr>
+      </p:sp>
+      <p:sp>
+        <p:nvSpPr>
+          <p:cNvPr id="21" name="Text 19"/>
+          <p:cNvSpPr/>
+          <p:nvPr/>
+        </p:nvSpPr>
+        <p:spPr>
+          <a:xfrm>
+            <a:off x="548640" y="5449824"/>
+            <a:ext cx="411480" cy="411480"/>
+          </a:xfrm>
+          <a:prstGeom prst="rect">
+            <a:avLst/>
+          </a:prstGeom>
+          <a:noFill/>
+          <a:ln/>
+        </p:spPr>
+        <p:txBody>
+          <a:bodyPr wrap="square" rtlCol="0" anchor="ctr"/>
+          <a:lstStyle/>
+          <a:p>
+            <a:pPr algn="ctr" indent="0" marL="0">
+              <a:buNone/>
+            </a:pPr>
+            <a:r>
+              <a:rPr lang="en-US" sz="1500" b="1" dirty="0">
+                <a:solidFill>
+                  <a:srgbClr val="0B1026"/>
+                </a:solidFill>
+                <a:latin typeface="Calibri" pitchFamily="34" charset="0"/>
+                <a:ea typeface="Calibri" pitchFamily="34" charset="-122"/>
+                <a:cs typeface="Calibri" pitchFamily="34" charset="-120"/>
+              </a:rPr>
+              <a:t>5</a:t>
+            </a:r>
+            <a:endParaRPr lang="en-US" sz="1500" dirty="0"/>
+          </a:p>
+        </p:txBody>
+      </p:sp>
+      <p:sp>
+        <p:nvSpPr>
+          <p:cNvPr id="22" name="Text 20"/>
+          <p:cNvSpPr/>
+          <p:nvPr/>
+        </p:nvSpPr>
+        <p:spPr>
+          <a:xfrm>
+            <a:off x="1188720" y="5422392"/>
+            <a:ext cx="5029200" cy="502920"/>
+          </a:xfrm>
+          <a:prstGeom prst="rect">
+            <a:avLst/>
+          </a:prstGeom>
+          <a:noFill/>
+          <a:ln/>
+        </p:spPr>
+        <p:txBody>
+          <a:bodyPr wrap="square" rtlCol="0" anchor="t"/>
+          <a:lstStyle/>
+          <a:p>
+            <a:pPr indent="0" marL="0">
+              <a:buNone/>
+            </a:pPr>
+            <a:r>
+              <a:rPr lang="en-US" sz="1400" b="1" dirty="0">
+                <a:solidFill>
+                  <a:srgbClr val="E6ECFF"/>
+                </a:solidFill>
+                <a:latin typeface="Cambria" pitchFamily="34" charset="0"/>
+                <a:ea typeface="Cambria" pitchFamily="34" charset="-122"/>
+                <a:cs typeface="Cambria" pitchFamily="34" charset="-120"/>
+              </a:rPr>
+              <a:t>Не доверять «слишком ровным» цифрам без перепроверки</a:t>
+            </a:r>
+            <a:endParaRPr lang="en-US" sz="1400" dirty="0"/>
+          </a:p>
+        </p:txBody>
+      </p:sp>
+      <p:sp>
+        <p:nvSpPr>
+          <p:cNvPr id="23" name="Text 21"/>
+          <p:cNvSpPr/>
+          <p:nvPr/>
+        </p:nvSpPr>
+        <p:spPr>
+          <a:xfrm>
+            <a:off x="6355080" y="5422392"/>
+            <a:ext cx="5303520" cy="502920"/>
+          </a:xfrm>
+          <a:prstGeom prst="rect">
+            <a:avLst/>
+          </a:prstGeom>
+          <a:noFill/>
+          <a:ln/>
+        </p:spPr>
+        <p:txBody>
+          <a:bodyPr wrap="square" rtlCol="0" anchor="t"/>
+          <a:lstStyle/>
+          <a:p>
+            <a:pPr indent="0" marL="0">
+              <a:buNone/>
+            </a:pPr>
+            <a:r>
+              <a:rPr lang="en-US" sz="1100" dirty="0">
+                <a:solidFill>
+                  <a:srgbClr val="8891C5"/>
+                </a:solidFill>
+                <a:latin typeface="Calibri" pitchFamily="34" charset="0"/>
+                <a:ea typeface="Calibri" pitchFamily="34" charset="-122"/>
+                <a:cs typeface="Calibri" pitchFamily="34" charset="-120"/>
+              </a:rPr>
+              <a:t>99-100% в одной подвыборке в этом же анализе оказались артефактом ошибки в разметке, а не реальным эффектом.</a:t>
+            </a:r>
+            <a:endParaRPr lang="en-US" sz="1100" dirty="0"/>
+          </a:p>
+        </p:txBody>
+      </p:sp>
+      <p:sp>
+        <p:nvSpPr>
+          <p:cNvPr id="24" name="Text 22"/>
+          <p:cNvSpPr/>
+          <p:nvPr/>
+        </p:nvSpPr>
+        <p:spPr>
+          <a:xfrm>
+            <a:off x="457200" y="6446520"/>
+            <a:ext cx="7315200" cy="274320"/>
+          </a:xfrm>
+          <a:prstGeom prst="rect">
+            <a:avLst/>
+          </a:prstGeom>
+          <a:noFill/>
+          <a:ln/>
+        </p:spPr>
+        <p:txBody>
+          <a:bodyPr wrap="square" rtlCol="0" anchor="ctr"/>
+          <a:lstStyle/>
+          <a:p>
+            <a:pPr indent="0" marL="0">
+              <a:buNone/>
+            </a:pPr>
+            <a:r>
+              <a:rPr lang="en-US" sz="900" dirty="0">
+                <a:solidFill>
+                  <a:srgbClr val="8891C5"/>
+                </a:solidFill>
+                <a:latin typeface="Calibri" pitchFamily="34" charset="0"/>
+                <a:ea typeface="Calibri" pitchFamily="34" charset="-122"/>
+                <a:cs typeface="Calibri" pitchFamily="34" charset="-120"/>
+              </a:rPr>
+              <a:t>Отзывы клиентов Т-Банка — продуктовая аналитика</a:t>
+            </a:r>
+            <a:endParaRPr lang="en-US" sz="900" dirty="0"/>
+          </a:p>
+        </p:txBody>
+      </p:sp>
+      <p:sp>
+        <p:nvSpPr>
+          <p:cNvPr id="25" name="Text 23"/>
+          <p:cNvSpPr/>
+          <p:nvPr/>
+        </p:nvSpPr>
+        <p:spPr>
+          <a:xfrm>
+            <a:off x="11274552" y="6446520"/>
+            <a:ext cx="457200" cy="274320"/>
+          </a:xfrm>
+          <a:prstGeom prst="rect">
+            <a:avLst/>
+          </a:prstGeom>
+          <a:noFill/>
+          <a:ln/>
+        </p:spPr>
+        <p:txBody>
+          <a:bodyPr wrap="square" rtlCol="0" anchor="ctr"/>
+          <a:lstStyle/>
+          <a:p>
+            <a:pPr algn="r" indent="0" marL="0">
+              <a:buNone/>
+            </a:pPr>
+            <a:r>
+              <a:rPr lang="en-US" sz="900" dirty="0">
+                <a:solidFill>
+                  <a:srgbClr val="8891C5"/>
+                </a:solidFill>
+                <a:latin typeface="Calibri" pitchFamily="34" charset="0"/>
+                <a:ea typeface="Calibri" pitchFamily="34" charset="-122"/>
+                <a:cs typeface="Calibri" pitchFamily="34" charset="-120"/>
+              </a:rPr>
+              <a:t>15</a:t>
+            </a:r>
+            <a:endParaRPr lang="en-US" sz="900" dirty="0"/>
+          </a:p>
+        </p:txBody>
+      </p:sp>
+    </p:spTree>
+  </p:cSld>
+  <p:clrMapOvr>
+    <a:masterClrMapping/>
+  </p:clrMapOvr>
+</p:sld>
+</file>
+
+<file path=ppt/slides/slide16.xml><?xml version="1.0" encoding="utf-8"?>
+<p:sld xmlns:a="http://schemas.openxmlformats.org/drawingml/2006/main" xmlns:r="http://schemas.openxmlformats.org/officeDocument/2006/relationships" xmlns:p="http://schemas.openxmlformats.org/presentationml/2006/main">
+  <p:cSld name="Slide 16">
+    <p:bg>
+      <p:bgPr>
+        <a:solidFill>
+          <a:srgbClr val="0B1026"/>
+        </a:solidFill>
+      </p:bgPr>
+    </p:bg>
+    <p:spTree>
+      <p:nvGrpSpPr>
+        <p:cNvPr id="1" name=""/>
+        <p:cNvGrpSpPr/>
+        <p:nvPr/>
+      </p:nvGrpSpPr>
+      <p:grpSpPr>
+        <a:xfrm>
+          <a:off x="0" y="0"/>
+          <a:ext cx="0" cy="0"/>
+          <a:chOff x="0" y="0"/>
+          <a:chExt cx="0" cy="0"/>
+        </a:xfrm>
+      </p:grpSpPr>
+      <p:sp>
+        <p:nvSpPr>
+          <p:cNvPr id="2" name="Text 0"/>
+          <p:cNvSpPr/>
+          <p:nvPr/>
+        </p:nvSpPr>
+        <p:spPr>
+          <a:xfrm>
             <a:off x="822960" y="2651760"/>
             <a:ext cx="10058400" cy="1097280"/>
           </a:xfrm>
@@ -4799,7 +5681,7 @@
         <p:spPr>
           <a:xfrm>
             <a:off x="548640" y="411480"/>
-            <a:ext cx="7315200" cy="320040"/>
+            <a:ext cx="9144000" cy="320040"/>
           </a:xfrm>
           <a:prstGeom prst="rect">
             <a:avLst/>
@@ -4993,7 +5875,7 @@
               <a:buNone/>
             </a:pPr>
             <a:r>
-              <a:rPr lang="en-US" sz="3000" b="1" dirty="0">
+              <a:rPr lang="en-US" sz="2800" b="1" dirty="0">
                 <a:solidFill>
                   <a:srgbClr val="4FD1FF"/>
                 </a:solidFill>
@@ -5003,7 +5885,7 @@
               </a:rPr>
               <a:t>56 820</a:t>
             </a:r>
-            <a:endParaRPr lang="en-US" sz="3000" dirty="0"/>
+            <a:endParaRPr lang="en-US" sz="2800" dirty="0"/>
           </a:p>
         </p:txBody>
       </p:sp>
@@ -5032,7 +5914,7 @@
               <a:buNone/>
             </a:pPr>
             <a:r>
-              <a:rPr lang="en-US" sz="1150" dirty="0">
+              <a:rPr lang="en-US" sz="1100" dirty="0">
                 <a:solidFill>
                   <a:srgbClr val="8891C5"/>
                 </a:solidFill>
@@ -5042,7 +5924,7 @@
               </a:rPr>
               <a:t>отзывов клиентов</a:t>
             </a:r>
-            <a:endParaRPr lang="en-US" sz="1150" dirty="0"/>
+            <a:endParaRPr lang="en-US" sz="1100" dirty="0"/>
           </a:p>
         </p:txBody>
       </p:sp>
@@ -5093,7 +5975,7 @@
               <a:buNone/>
             </a:pPr>
             <a:r>
-              <a:rPr lang="en-US" sz="3000" b="1" dirty="0">
+              <a:rPr lang="en-US" sz="2800" b="1" dirty="0">
                 <a:solidFill>
                   <a:srgbClr val="7C8CFF"/>
                 </a:solidFill>
@@ -5103,7 +5985,7 @@
               </a:rPr>
               <a:t>20</a:t>
             </a:r>
-            <a:endParaRPr lang="en-US" sz="3000" dirty="0"/>
+            <a:endParaRPr lang="en-US" sz="2800" dirty="0"/>
           </a:p>
         </p:txBody>
       </p:sp>
@@ -5132,7 +6014,7 @@
               <a:buNone/>
             </a:pPr>
             <a:r>
-              <a:rPr lang="en-US" sz="1150" dirty="0">
+              <a:rPr lang="en-US" sz="1100" dirty="0">
                 <a:solidFill>
                   <a:srgbClr val="8891C5"/>
                 </a:solidFill>
@@ -5142,7 +6024,7 @@
               </a:rPr>
               <a:t>источников данных</a:t>
             </a:r>
-            <a:endParaRPr lang="en-US" sz="1150" dirty="0"/>
+            <a:endParaRPr lang="en-US" sz="1100" dirty="0"/>
           </a:p>
         </p:txBody>
       </p:sp>
@@ -5193,7 +6075,7 @@
               <a:buNone/>
             </a:pPr>
             <a:r>
-              <a:rPr lang="en-US" sz="3000" b="1" dirty="0">
+              <a:rPr lang="en-US" sz="2800" b="1" dirty="0">
                 <a:solidFill>
                   <a:srgbClr val="4FD1FF"/>
                 </a:solidFill>
@@ -5203,7 +6085,7 @@
               </a:rPr>
               <a:t>25</a:t>
             </a:r>
-            <a:endParaRPr lang="en-US" sz="3000" dirty="0"/>
+            <a:endParaRPr lang="en-US" sz="2800" dirty="0"/>
           </a:p>
         </p:txBody>
       </p:sp>
@@ -5232,7 +6114,7 @@
               <a:buNone/>
             </a:pPr>
             <a:r>
-              <a:rPr lang="en-US" sz="1150" dirty="0">
+              <a:rPr lang="en-US" sz="1100" dirty="0">
                 <a:solidFill>
                   <a:srgbClr val="8891C5"/>
                 </a:solidFill>
@@ -5242,7 +6124,7 @@
               </a:rPr>
               <a:t>переменных</a:t>
             </a:r>
-            <a:endParaRPr lang="en-US" sz="1150" dirty="0"/>
+            <a:endParaRPr lang="en-US" sz="1100" dirty="0"/>
           </a:p>
         </p:txBody>
       </p:sp>
@@ -5293,7 +6175,7 @@
               <a:buNone/>
             </a:pPr>
             <a:r>
-              <a:rPr lang="en-US" sz="3000" b="1" dirty="0">
+              <a:rPr lang="en-US" sz="2800" b="1" dirty="0">
                 <a:solidFill>
                   <a:srgbClr val="FF6B81"/>
                 </a:solidFill>
@@ -5301,9 +6183,9 @@
                 <a:ea typeface="Cambria" pitchFamily="34" charset="-122"/>
                 <a:cs typeface="Cambria" pitchFamily="34" charset="-120"/>
               </a:rPr>
-              <a:t>39%</a:t>
-            </a:r>
-            <a:endParaRPr lang="en-US" sz="3000" dirty="0"/>
+              <a:t>36%</a:t>
+            </a:r>
+            <a:endParaRPr lang="en-US" sz="2800" dirty="0"/>
           </a:p>
         </p:txBody>
       </p:sp>
@@ -5332,7 +6214,7 @@
               <a:buNone/>
             </a:pPr>
             <a:r>
-              <a:rPr lang="en-US" sz="1150" dirty="0">
+              <a:rPr lang="en-US" sz="1100" dirty="0">
                 <a:solidFill>
                   <a:srgbClr val="8891C5"/>
                 </a:solidFill>
@@ -5342,7 +6224,7 @@
               </a:rPr>
               <a:t>доля детракторов</a:t>
             </a:r>
-            <a:endParaRPr lang="en-US" sz="1150" dirty="0"/>
+            <a:endParaRPr lang="en-US" sz="1100" dirty="0"/>
           </a:p>
         </p:txBody>
       </p:sp>
@@ -5465,7 +6347,7 @@
         <p:spPr>
           <a:xfrm>
             <a:off x="548640" y="411480"/>
-            <a:ext cx="7315200" cy="320040"/>
+            <a:ext cx="9144000" cy="320040"/>
           </a:xfrm>
           <a:prstGeom prst="rect">
             <a:avLst/>
@@ -5520,7 +6402,7 @@
               <a:buNone/>
             </a:pPr>
             <a:r>
-              <a:rPr lang="en-US" sz="3200" b="1" dirty="0">
+              <a:rPr lang="en-US" sz="2800" b="1" dirty="0">
                 <a:solidFill>
                   <a:srgbClr val="E6ECFF"/>
                 </a:solidFill>
@@ -5530,7 +6412,7 @@
               </a:rPr>
               <a:t>Чему в данных можно доверять</a:t>
             </a:r>
-            <a:endParaRPr lang="en-US" sz="3200" dirty="0"/>
+            <a:endParaRPr lang="en-US" sz="2800" dirty="0"/>
           </a:p>
         </p:txBody>
       </p:sp>
@@ -5542,12 +6424,12 @@
         </p:nvSpPr>
         <p:spPr>
           <a:xfrm>
-            <a:off x="548640" y="1783080"/>
-            <a:ext cx="11091672" cy="1234440"/>
+            <a:off x="548640" y="1737360"/>
+            <a:ext cx="11091672" cy="1371600"/>
           </a:xfrm>
           <a:prstGeom prst="roundRect">
             <a:avLst>
-              <a:gd name="adj" fmla="val 7407"/>
+              <a:gd name="adj" fmla="val 6667"/>
             </a:avLst>
           </a:prstGeom>
           <a:solidFill>
@@ -5584,24 +6466,24 @@
         </p:nvSpPr>
         <p:spPr>
           <a:xfrm>
-            <a:off x="1097280" y="1920240"/>
-            <a:ext cx="3017520" cy="960120"/>
-          </a:xfrm>
-          <a:prstGeom prst="rect">
-            <a:avLst/>
-          </a:prstGeom>
-          <a:noFill/>
-          <a:ln/>
-        </p:spPr>
-        <p:txBody>
-          <a:bodyPr wrap="square" rtlCol="0" anchor="ctr"/>
-          <a:lstStyle/>
-          <a:p>
-            <a:pPr indent="0" marL="0">
-              <a:buNone/>
-            </a:pPr>
-            <a:r>
-              <a:rPr lang="en-US" sz="1600" b="1" dirty="0">
+            <a:off x="1097280" y="1874520"/>
+            <a:ext cx="3200400" cy="1097280"/>
+          </a:xfrm>
+          <a:prstGeom prst="rect">
+            <a:avLst/>
+          </a:prstGeom>
+          <a:noFill/>
+          <a:ln/>
+        </p:spPr>
+        <p:txBody>
+          <a:bodyPr wrap="square" rtlCol="0" anchor="ctr"/>
+          <a:lstStyle/>
+          <a:p>
+            <a:pPr indent="0" marL="0">
+              <a:buNone/>
+            </a:pPr>
+            <a:r>
+              <a:rPr lang="en-US" sz="1500" b="1" dirty="0">
                 <a:solidFill>
                   <a:srgbClr val="4FD1FF"/>
                 </a:solidFill>
@@ -5609,9 +6491,9 @@
                 <a:ea typeface="Cambria" pitchFamily="34" charset="-122"/>
                 <a:cs typeface="Cambria" pitchFamily="34" charset="-120"/>
               </a:rPr>
-              <a:t>review_mark → mark</a:t>
-            </a:r>
-            <a:endParaRPr lang="en-US" sz="1600" dirty="0"/>
+              <a:t>Промоутер / детрактор</a:t>
+            </a:r>
+            <a:endParaRPr lang="en-US" sz="1500" dirty="0"/>
           </a:p>
         </p:txBody>
       </p:sp>
@@ -5623,24 +6505,24 @@
         </p:nvSpPr>
         <p:spPr>
           <a:xfrm>
-            <a:off x="4297680" y="1920240"/>
-            <a:ext cx="7251192" cy="960120"/>
-          </a:xfrm>
-          <a:prstGeom prst="rect">
-            <a:avLst/>
-          </a:prstGeom>
-          <a:noFill/>
-          <a:ln/>
-        </p:spPr>
-        <p:txBody>
-          <a:bodyPr wrap="square" rtlCol="0" anchor="ctr"/>
-          <a:lstStyle/>
-          <a:p>
-            <a:pPr indent="0" marL="0">
-              <a:buNone/>
-            </a:pPr>
-            <a:r>
-              <a:rPr lang="en-US" sz="1300" dirty="0">
+            <a:off x="4480560" y="1874520"/>
+            <a:ext cx="7068312" cy="1097280"/>
+          </a:xfrm>
+          <a:prstGeom prst="rect">
+            <a:avLst/>
+          </a:prstGeom>
+          <a:noFill/>
+          <a:ln/>
+        </p:spPr>
+        <p:txBody>
+          <a:bodyPr wrap="square" rtlCol="0" anchor="ctr"/>
+          <a:lstStyle/>
+          <a:p>
+            <a:pPr indent="0" marL="0">
+              <a:buNone/>
+            </a:pPr>
+            <a:r>
+              <a:rPr lang="en-US" sz="1250" dirty="0">
                 <a:solidFill>
                   <a:srgbClr val="E6ECFF"/>
                 </a:solidFill>
@@ -5648,9 +6530,9 @@
                 <a:ea typeface="Calibri" pitchFamily="34" charset="-122"/>
                 <a:cs typeface="Calibri" pitchFamily="34" charset="-120"/>
               </a:rPr>
-              <a:t>У 19% отзывов вместо оценки — текстовая тональность. Смэппил в единую шкалу 1–5, чтобы не терять 11 тыс. отзывов.</a:t>
-            </a:r>
-            <a:endParaRPr lang="en-US" sz="1300" dirty="0"/>
+              <a:t>Считал строго по формуле организаторов (оценка 1-3 или негатив без оценки = детрактор). По пути нашёл и исправил свою же ошибку — см. следующий слайд.</a:t>
+            </a:r>
+            <a:endParaRPr lang="en-US" sz="1250" dirty="0"/>
           </a:p>
         </p:txBody>
       </p:sp>
@@ -5662,12 +6544,12 @@
         </p:nvSpPr>
         <p:spPr>
           <a:xfrm>
-            <a:off x="548640" y="3200400"/>
-            <a:ext cx="11091672" cy="1234440"/>
+            <a:off x="548640" y="3246120"/>
+            <a:ext cx="11091672" cy="1371600"/>
           </a:xfrm>
           <a:prstGeom prst="roundRect">
             <a:avLst>
-              <a:gd name="adj" fmla="val 7407"/>
+              <a:gd name="adj" fmla="val 6667"/>
             </a:avLst>
           </a:prstGeom>
           <a:solidFill>
@@ -5684,7 +6566,7 @@
         </p:nvSpPr>
         <p:spPr>
           <a:xfrm>
-            <a:off x="822960" y="3611880"/>
+            <a:off x="822960" y="3703320"/>
             <a:ext cx="128016" cy="128016"/>
           </a:xfrm>
           <a:prstGeom prst="ellipse">
@@ -5704,24 +6586,24 @@
         </p:nvSpPr>
         <p:spPr>
           <a:xfrm>
-            <a:off x="1097280" y="3337560"/>
-            <a:ext cx="3017520" cy="960120"/>
-          </a:xfrm>
-          <a:prstGeom prst="rect">
-            <a:avLst/>
-          </a:prstGeom>
-          <a:noFill/>
-          <a:ln/>
-        </p:spPr>
-        <p:txBody>
-          <a:bodyPr wrap="square" rtlCol="0" anchor="ctr"/>
-          <a:lstStyle/>
-          <a:p>
-            <a:pPr indent="0" marL="0">
-              <a:buNone/>
-            </a:pPr>
-            <a:r>
-              <a:rPr lang="en-US" sz="1600" b="1" dirty="0">
+            <a:off x="1097280" y="3383280"/>
+            <a:ext cx="3200400" cy="1097280"/>
+          </a:xfrm>
+          <a:prstGeom prst="rect">
+            <a:avLst/>
+          </a:prstGeom>
+          <a:noFill/>
+          <a:ln/>
+        </p:spPr>
+        <p:txBody>
+          <a:bodyPr wrap="square" rtlCol="0" anchor="ctr"/>
+          <a:lstStyle/>
+          <a:p>
+            <a:pPr indent="0" marL="0">
+              <a:buNone/>
+            </a:pPr>
+            <a:r>
+              <a:rPr lang="en-US" sz="1500" b="1" dirty="0">
                 <a:solidFill>
                   <a:srgbClr val="FF6B81"/>
                 </a:solidFill>
@@ -5731,7 +6613,7 @@
               </a:rPr>
               <a:t>csat_score</a:t>
             </a:r>
-            <a:endParaRPr lang="en-US" sz="1600" dirty="0"/>
+            <a:endParaRPr lang="en-US" sz="1500" dirty="0"/>
           </a:p>
         </p:txBody>
       </p:sp>
@@ -5743,24 +6625,24 @@
         </p:nvSpPr>
         <p:spPr>
           <a:xfrm>
-            <a:off x="4297680" y="3337560"/>
-            <a:ext cx="7251192" cy="960120"/>
-          </a:xfrm>
-          <a:prstGeom prst="rect">
-            <a:avLst/>
-          </a:prstGeom>
-          <a:noFill/>
-          <a:ln/>
-        </p:spPr>
-        <p:txBody>
-          <a:bodyPr wrap="square" rtlCol="0" anchor="ctr"/>
-          <a:lstStyle/>
-          <a:p>
-            <a:pPr indent="0" marL="0">
-              <a:buNone/>
-            </a:pPr>
-            <a:r>
-              <a:rPr lang="en-US" sz="1300" dirty="0">
+            <a:off x="4480560" y="3383280"/>
+            <a:ext cx="7068312" cy="1097280"/>
+          </a:xfrm>
+          <a:prstGeom prst="rect">
+            <a:avLst/>
+          </a:prstGeom>
+          <a:noFill/>
+          <a:ln/>
+        </p:spPr>
+        <p:txBody>
+          <a:bodyPr wrap="square" rtlCol="0" anchor="ctr"/>
+          <a:lstStyle/>
+          <a:p>
+            <a:pPr indent="0" marL="0">
+              <a:buNone/>
+            </a:pPr>
+            <a:r>
+              <a:rPr lang="en-US" sz="1250" dirty="0">
                 <a:solidFill>
                   <a:srgbClr val="E6ECFF"/>
                 </a:solidFill>
@@ -5768,9 +6650,9 @@
                 <a:ea typeface="Calibri" pitchFamily="34" charset="-122"/>
                 <a:cs typeface="Calibri" pitchFamily="34" charset="-120"/>
               </a:rPr>
-              <a:t>Официальная метрика удовлетворённости заполнена только у 6% отзывов (3 407 из 56 820) — непригодна как основной ряд.</a:t>
-            </a:r>
-            <a:endParaRPr lang="en-US" sz="1300" dirty="0"/>
+              <a:t>Та же шкала 1-5, что и review_mark, а не отдельная метрика 0-1. Заполнена только у 6% отзывов — использую как проверку, не как основной ряд.</a:t>
+            </a:r>
+            <a:endParaRPr lang="en-US" sz="1250" dirty="0"/>
           </a:p>
         </p:txBody>
       </p:sp>
@@ -5782,12 +6664,12 @@
         </p:nvSpPr>
         <p:spPr>
           <a:xfrm>
-            <a:off x="548640" y="4617720"/>
-            <a:ext cx="11091672" cy="1234440"/>
+            <a:off x="548640" y="4754880"/>
+            <a:ext cx="11091672" cy="1371600"/>
           </a:xfrm>
           <a:prstGeom prst="roundRect">
             <a:avLst>
-              <a:gd name="adj" fmla="val 7407"/>
+              <a:gd name="adj" fmla="val 6667"/>
             </a:avLst>
           </a:prstGeom>
           <a:solidFill>
@@ -5804,7 +6686,7 @@
         </p:nvSpPr>
         <p:spPr>
           <a:xfrm>
-            <a:off x="822960" y="5029200"/>
+            <a:off x="822960" y="5212080"/>
             <a:ext cx="128016" cy="128016"/>
           </a:xfrm>
           <a:prstGeom prst="ellipse">
@@ -5824,24 +6706,24 @@
         </p:nvSpPr>
         <p:spPr>
           <a:xfrm>
-            <a:off x="1097280" y="4754880"/>
-            <a:ext cx="3017520" cy="960120"/>
-          </a:xfrm>
-          <a:prstGeom prst="rect">
-            <a:avLst/>
-          </a:prstGeom>
-          <a:noFill/>
-          <a:ln/>
-        </p:spPr>
-        <p:txBody>
-          <a:bodyPr wrap="square" rtlCol="0" anchor="ctr"/>
-          <a:lstStyle/>
-          <a:p>
-            <a:pPr indent="0" marL="0">
-              <a:buNone/>
-            </a:pPr>
-            <a:r>
-              <a:rPr lang="en-US" sz="1600" b="1" dirty="0">
+            <a:off x="1097280" y="4892040"/>
+            <a:ext cx="3200400" cy="1097280"/>
+          </a:xfrm>
+          <a:prstGeom prst="rect">
+            <a:avLst/>
+          </a:prstGeom>
+          <a:noFill/>
+          <a:ln/>
+        </p:spPr>
+        <p:txBody>
+          <a:bodyPr wrap="square" rtlCol="0" anchor="ctr"/>
+          <a:lstStyle/>
+          <a:p>
+            <a:pPr indent="0" marL="0">
+              <a:buNone/>
+            </a:pPr>
+            <a:r>
+              <a:rPr lang="en-US" sz="1500" b="1" dirty="0">
                 <a:solidFill>
                   <a:srgbClr val="7C8CFF"/>
                 </a:solidFill>
@@ -5849,9 +6731,9 @@
                 <a:ea typeface="Cambria" pitchFamily="34" charset="-122"/>
                 <a:cs typeface="Cambria" pitchFamily="34" charset="-120"/>
               </a:rPr>
-              <a:t>review_source</a:t>
-            </a:r>
-            <a:endParaRPr lang="en-US" sz="1600" dirty="0"/>
+              <a:t>23% отзывов не привязаны к клиенту</a:t>
+            </a:r>
+            <a:endParaRPr lang="en-US" sz="1500" dirty="0"/>
           </a:p>
         </p:txBody>
       </p:sp>
@@ -5863,24 +6745,24 @@
         </p:nvSpPr>
         <p:spPr>
           <a:xfrm>
-            <a:off x="4297680" y="4754880"/>
-            <a:ext cx="7251192" cy="960120"/>
-          </a:xfrm>
-          <a:prstGeom prst="rect">
-            <a:avLst/>
-          </a:prstGeom>
-          <a:noFill/>
-          <a:ln/>
-        </p:spPr>
-        <p:txBody>
-          <a:bodyPr wrap="square" rtlCol="0" anchor="ctr"/>
-          <a:lstStyle/>
-          <a:p>
-            <a:pPr indent="0" marL="0">
-              <a:buNone/>
-            </a:pPr>
-            <a:r>
-              <a:rPr lang="en-US" sz="1300" dirty="0">
+            <a:off x="4480560" y="4892040"/>
+            <a:ext cx="7068312" cy="1097280"/>
+          </a:xfrm>
+          <a:prstGeom prst="rect">
+            <a:avLst/>
+          </a:prstGeom>
+          <a:noFill/>
+          <a:ln/>
+        </p:spPr>
+        <p:txBody>
+          <a:bodyPr wrap="square" rtlCol="0" anchor="ctr"/>
+          <a:lstStyle/>
+          <a:p>
+            <a:pPr indent="0" marL="0">
+              <a:buNone/>
+            </a:pPr>
+            <a:r>
+              <a:rPr lang="en-US" sz="1250" dirty="0">
                 <a:solidFill>
                   <a:srgbClr val="E6ECFF"/>
                 </a:solidFill>
@@ -5888,9 +6770,9 @@
                 <a:ea typeface="Calibri" pitchFamily="34" charset="-122"/>
                 <a:cs typeface="Calibri" pitchFamily="34" charset="-120"/>
               </a:rPr>
-              <a:t>Не 2 площадки, а 20. Разбивка только на banki.ru/sravni.ru давала неполную и вводящую в заблуждение картину — см. гипотезу H3.</a:t>
-            </a:r>
-            <a:endParaRPr lang="en-US" sz="1300" dirty="0"/>
+              <a:t>У них ниже доля недовольных (25% против 36% в среднем) — несопоставленные с CRM отзывы систематически спокойнее.</a:t>
+            </a:r>
+            <a:endParaRPr lang="en-US" sz="1250" dirty="0"/>
           </a:p>
         </p:txBody>
       </p:sp>
@@ -6013,7 +6895,7 @@
         <p:spPr>
           <a:xfrm>
             <a:off x="548640" y="411480"/>
-            <a:ext cx="7315200" cy="320040"/>
+            <a:ext cx="9144000" cy="320040"/>
           </a:xfrm>
           <a:prstGeom prst="rect">
             <a:avLst/>
@@ -6037,7 +6919,7 @@
                 <a:ea typeface="Calibri" pitchFamily="34" charset="-122"/>
                 <a:cs typeface="Calibri" pitchFamily="34" charset="-120"/>
               </a:rPr>
-              <a:t>ГИПОТЕЗА H1</a:t>
+              <a:t>ПРОЗРАЧНОСТЬ МЕТОДИКИ</a:t>
             </a:r>
             <a:endParaRPr lang="en-US" sz="1300" dirty="0"/>
           </a:p>
@@ -6068,7 +6950,7 @@
               <a:buNone/>
             </a:pPr>
             <a:r>
-              <a:rPr lang="en-US" sz="2200" b="1" dirty="0">
+              <a:rPr lang="en-US" sz="2400" b="1" dirty="0">
                 <a:solidFill>
                   <a:srgbClr val="E6ECFF"/>
                 </a:solidFill>
@@ -6076,49 +6958,200 @@
                 <a:ea typeface="Cambria" pitchFamily="34" charset="-122"/>
                 <a:cs typeface="Cambria" pitchFamily="34" charset="-120"/>
               </a:rPr>
-              <a:t>Чем дольше решают вопрос — тем ниже оценка</a:t>
-            </a:r>
-            <a:endParaRPr lang="en-US" sz="2200" dirty="0"/>
-          </a:p>
-        </p:txBody>
-      </p:sp>
-      <p:sp>
-        <p:nvSpPr>
-          <p:cNvPr id="4" name="Shape 2"/>
-          <p:cNvSpPr/>
-          <p:nvPr/>
-        </p:nvSpPr>
-        <p:spPr>
-          <a:xfrm>
-            <a:off x="548640" y="1554480"/>
-            <a:ext cx="2377440" cy="384048"/>
+              <a:t>Нашёл свою же ошибку в разметке — и это изменило один из выводов</a:t>
+            </a:r>
+            <a:endParaRPr lang="en-US" sz="2400" dirty="0"/>
+          </a:p>
+        </p:txBody>
+      </p:sp>
+      <p:sp>
+        <p:nvSpPr>
+          <p:cNvPr id="4" name="Text 2"/>
+          <p:cNvSpPr/>
+          <p:nvPr/>
+        </p:nvSpPr>
+        <p:spPr>
+          <a:xfrm>
+            <a:off x="548640" y="1737360"/>
+            <a:ext cx="5486400" cy="2011680"/>
+          </a:xfrm>
+          <a:prstGeom prst="rect">
+            <a:avLst/>
+          </a:prstGeom>
+          <a:noFill/>
+          <a:ln/>
+        </p:spPr>
+        <p:txBody>
+          <a:bodyPr wrap="square" rtlCol="0" anchor="t"/>
+          <a:lstStyle/>
+          <a:p>
+            <a:pPr indent="0" marL="0">
+              <a:buNone/>
+            </a:pPr>
+            <a:r>
+              <a:rPr lang="en-US" sz="1400" dirty="0">
+                <a:solidFill>
+                  <a:srgbClr val="E6ECFF"/>
+                </a:solidFill>
+                <a:latin typeface="Calibri" pitchFamily="34" charset="0"/>
+                <a:ea typeface="Calibri" pitchFamily="34" charset="-122"/>
+                <a:cs typeface="Calibri" pitchFamily="34" charset="-120"/>
+              </a:rPr>
+              <a:t>Организаторы дали точную формулу: «нейтральные и позитивные без оценки — промоутеры, негативные без оценки — детракторы». В первой версии анализа я по ошибке смэппил все «без оценки» отзывы в детракторы.</a:t>
+            </a:r>
+            <a:endParaRPr lang="en-US" sz="1400" dirty="0"/>
+          </a:p>
+        </p:txBody>
+      </p:sp>
+      <p:sp>
+        <p:nvSpPr>
+          <p:cNvPr id="5" name="Text 3"/>
+          <p:cNvSpPr/>
+          <p:nvPr/>
+        </p:nvSpPr>
+        <p:spPr>
+          <a:xfrm>
+            <a:off x="548640" y="3657600"/>
+            <a:ext cx="5486400" cy="1463040"/>
+          </a:xfrm>
+          <a:prstGeom prst="rect">
+            <a:avLst/>
+          </a:prstGeom>
+          <a:noFill/>
+          <a:ln/>
+        </p:spPr>
+        <p:txBody>
+          <a:bodyPr wrap="square" rtlCol="0" anchor="t"/>
+          <a:lstStyle/>
+          <a:p>
+            <a:pPr indent="0" marL="0">
+              <a:buNone/>
+            </a:pPr>
+            <a:r>
+              <a:rPr lang="en-US" sz="1300" dirty="0">
+                <a:solidFill>
+                  <a:srgbClr val="8891C5"/>
+                </a:solidFill>
+                <a:latin typeface="Calibri" pitchFamily="34" charset="0"/>
+                <a:ea typeface="Calibri" pitchFamily="34" charset="-122"/>
+                <a:cs typeface="Calibri" pitchFamily="34" charset="-120"/>
+              </a:rPr>
+              <a:t>Разница — 1 782 отзыва (3.1%), но она несимметрично легла на конкретные источники: 624 — с площадки «пульс», 602 — вообще без указанного источника.</a:t>
+            </a:r>
+            <a:endParaRPr lang="en-US" sz="1300" dirty="0"/>
+          </a:p>
+        </p:txBody>
+      </p:sp>
+      <p:sp>
+        <p:nvSpPr>
+          <p:cNvPr id="6" name="Shape 4"/>
+          <p:cNvSpPr/>
+          <p:nvPr/>
+        </p:nvSpPr>
+        <p:spPr>
+          <a:xfrm>
+            <a:off x="6400800" y="1737360"/>
+            <a:ext cx="5212080" cy="4297680"/>
           </a:xfrm>
           <a:prstGeom prst="roundRect">
             <a:avLst>
-              <a:gd name="adj" fmla="val 19048"/>
+              <a:gd name="adj" fmla="val 2128"/>
             </a:avLst>
           </a:prstGeom>
           <a:solidFill>
             <a:srgbClr val="131A3A"/>
           </a:solidFill>
-          <a:ln w="15875">
-            <a:solidFill>
-              <a:srgbClr val="4FD1FF"/>
-            </a:solidFill>
-            <a:prstDash val="solid"/>
-          </a:ln>
-        </p:spPr>
-      </p:sp>
-      <p:sp>
-        <p:nvSpPr>
-          <p:cNvPr id="5" name="Text 3"/>
-          <p:cNvSpPr/>
-          <p:nvPr/>
-        </p:nvSpPr>
-        <p:spPr>
-          <a:xfrm>
-            <a:off x="548640" y="1554480"/>
-            <a:ext cx="2377440" cy="384048"/>
+          <a:ln/>
+        </p:spPr>
+      </p:sp>
+      <p:sp>
+        <p:nvSpPr>
+          <p:cNvPr id="7" name="Text 5"/>
+          <p:cNvSpPr/>
+          <p:nvPr/>
+        </p:nvSpPr>
+        <p:spPr>
+          <a:xfrm>
+            <a:off x="6675120" y="1965960"/>
+            <a:ext cx="4572000" cy="457200"/>
+          </a:xfrm>
+          <a:prstGeom prst="rect">
+            <a:avLst/>
+          </a:prstGeom>
+          <a:noFill/>
+          <a:ln/>
+        </p:spPr>
+        <p:txBody>
+          <a:bodyPr wrap="square" rtlCol="0" anchor="ctr"/>
+          <a:lstStyle/>
+          <a:p>
+            <a:pPr indent="0" marL="0">
+              <a:buNone/>
+            </a:pPr>
+            <a:r>
+              <a:rPr lang="en-US" sz="1400" b="1" dirty="0">
+                <a:solidFill>
+                  <a:srgbClr val="4FD1FF"/>
+                </a:solidFill>
+                <a:latin typeface="Cambria" pitchFamily="34" charset="0"/>
+                <a:ea typeface="Cambria" pitchFamily="34" charset="-122"/>
+                <a:cs typeface="Cambria" pitchFamily="34" charset="-120"/>
+              </a:rPr>
+              <a:t>До и после исправления</a:t>
+            </a:r>
+            <a:endParaRPr lang="en-US" sz="1400" dirty="0"/>
+          </a:p>
+        </p:txBody>
+      </p:sp>
+      <p:sp>
+        <p:nvSpPr>
+          <p:cNvPr id="8" name="Text 6"/>
+          <p:cNvSpPr/>
+          <p:nvPr/>
+        </p:nvSpPr>
+        <p:spPr>
+          <a:xfrm>
+            <a:off x="6675120" y="2606040"/>
+            <a:ext cx="2377440" cy="457200"/>
+          </a:xfrm>
+          <a:prstGeom prst="rect">
+            <a:avLst/>
+          </a:prstGeom>
+          <a:noFill/>
+          <a:ln/>
+        </p:spPr>
+        <p:txBody>
+          <a:bodyPr wrap="square" rtlCol="0" anchor="ctr"/>
+          <a:lstStyle/>
+          <a:p>
+            <a:pPr indent="0" marL="0">
+              <a:buNone/>
+            </a:pPr>
+            <a:r>
+              <a:rPr lang="en-US" sz="1250" dirty="0">
+                <a:solidFill>
+                  <a:srgbClr val="E6ECFF"/>
+                </a:solidFill>
+                <a:latin typeface="Calibri" pitchFamily="34" charset="0"/>
+                <a:ea typeface="Calibri" pitchFamily="34" charset="-122"/>
+                <a:cs typeface="Calibri" pitchFamily="34" charset="-120"/>
+              </a:rPr>
+              <a:t>«нет» (без источника)</a:t>
+            </a:r>
+            <a:endParaRPr lang="en-US" sz="1250" dirty="0"/>
+          </a:p>
+        </p:txBody>
+      </p:sp>
+      <p:sp>
+        <p:nvSpPr>
+          <p:cNvPr id="9" name="Text 7"/>
+          <p:cNvSpPr/>
+          <p:nvPr/>
+        </p:nvSpPr>
+        <p:spPr>
+          <a:xfrm>
+            <a:off x="9052560" y="2606040"/>
+            <a:ext cx="1097280" cy="457200"/>
           </a:xfrm>
           <a:prstGeom prst="rect">
             <a:avLst/>
@@ -6134,7 +7167,85 @@
               <a:buNone/>
             </a:pPr>
             <a:r>
-              <a:rPr lang="en-US" sz="1200" b="1" dirty="0">
+              <a:rPr lang="en-US" sz="1300" b="1" dirty="0">
+                <a:solidFill>
+                  <a:srgbClr val="FF6B81"/>
+                </a:solidFill>
+                <a:latin typeface="Calibri" pitchFamily="34" charset="0"/>
+                <a:ea typeface="Calibri" pitchFamily="34" charset="-122"/>
+                <a:cs typeface="Calibri" pitchFamily="34" charset="-120"/>
+              </a:rPr>
+              <a:t>100%</a:t>
+            </a:r>
+            <a:endParaRPr lang="en-US" sz="1300" dirty="0"/>
+          </a:p>
+        </p:txBody>
+      </p:sp>
+      <p:sp>
+        <p:nvSpPr>
+          <p:cNvPr id="10" name="Text 8"/>
+          <p:cNvSpPr/>
+          <p:nvPr/>
+        </p:nvSpPr>
+        <p:spPr>
+          <a:xfrm>
+            <a:off x="10104120" y="2606040"/>
+            <a:ext cx="365760" cy="457200"/>
+          </a:xfrm>
+          <a:prstGeom prst="rect">
+            <a:avLst/>
+          </a:prstGeom>
+          <a:noFill/>
+          <a:ln/>
+        </p:spPr>
+        <p:txBody>
+          <a:bodyPr wrap="square" rtlCol="0" anchor="ctr"/>
+          <a:lstStyle/>
+          <a:p>
+            <a:pPr algn="ctr" indent="0" marL="0">
+              <a:buNone/>
+            </a:pPr>
+            <a:r>
+              <a:rPr lang="en-US" sz="1300" dirty="0">
+                <a:solidFill>
+                  <a:srgbClr val="8891C5"/>
+                </a:solidFill>
+                <a:latin typeface="Calibri" pitchFamily="34" charset="0"/>
+                <a:ea typeface="Calibri" pitchFamily="34" charset="-122"/>
+                <a:cs typeface="Calibri" pitchFamily="34" charset="-120"/>
+              </a:rPr>
+              <a:t>-&gt;</a:t>
+            </a:r>
+            <a:endParaRPr lang="en-US" sz="1300" dirty="0"/>
+          </a:p>
+        </p:txBody>
+      </p:sp>
+      <p:sp>
+        <p:nvSpPr>
+          <p:cNvPr id="11" name="Text 9"/>
+          <p:cNvSpPr/>
+          <p:nvPr/>
+        </p:nvSpPr>
+        <p:spPr>
+          <a:xfrm>
+            <a:off x="10424160" y="2606040"/>
+            <a:ext cx="1005840" cy="457200"/>
+          </a:xfrm>
+          <a:prstGeom prst="rect">
+            <a:avLst/>
+          </a:prstGeom>
+          <a:noFill/>
+          <a:ln/>
+        </p:spPr>
+        <p:txBody>
+          <a:bodyPr wrap="square" rtlCol="0" anchor="ctr"/>
+          <a:lstStyle/>
+          <a:p>
+            <a:pPr algn="ctr" indent="0" marL="0">
+              <a:buNone/>
+            </a:pPr>
+            <a:r>
+              <a:rPr lang="en-US" sz="1300" b="1" dirty="0">
                 <a:solidFill>
                   <a:srgbClr val="4FD1FF"/>
                 </a:solidFill>
@@ -6142,61 +7253,155 @@
                 <a:ea typeface="Calibri" pitchFamily="34" charset="-122"/>
                 <a:cs typeface="Calibri" pitchFamily="34" charset="-120"/>
               </a:rPr>
-              <a:t>ПОДТВЕРЖДЕНА</a:t>
-            </a:r>
-            <a:endParaRPr lang="en-US" sz="1200" dirty="0"/>
-          </a:p>
-        </p:txBody>
-      </p:sp>
-      <p:pic>
-        <p:nvPicPr>
-          <p:cNvPr id="6" name="Image 0" descr="C:\Users\igora\edu_portfolios\tbank-reviews-analysis\images\02_processing_time_vs_detractors.png">    </p:cNvPr>
-          <p:cNvPicPr>
-            <a:picLocks noChangeAspect="1"/>
-          </p:cNvPicPr>
-          <p:nvPr/>
-        </p:nvPicPr>
-        <p:blipFill>
-          <a:blip r:embed="rId1"/>
-          <a:srcRect l="0" r="0" t="0" b="0"/>
-          <a:stretch/>
-        </p:blipFill>
-        <p:spPr>
-          <a:xfrm>
-            <a:off x="548640" y="2148840"/>
-            <a:ext cx="6035040" cy="4023360"/>
-          </a:xfrm>
-          <a:prstGeom prst="rect">
-            <a:avLst/>
-          </a:prstGeom>
-        </p:spPr>
-      </p:pic>
-      <p:sp>
-        <p:nvSpPr>
-          <p:cNvPr id="7" name="Text 4"/>
-          <p:cNvSpPr/>
-          <p:nvPr/>
-        </p:nvSpPr>
-        <p:spPr>
-          <a:xfrm>
-            <a:off x="6903720" y="2148840"/>
-            <a:ext cx="4754880" cy="457200"/>
-          </a:xfrm>
-          <a:prstGeom prst="rect">
-            <a:avLst/>
-          </a:prstGeom>
-          <a:noFill/>
-          <a:ln/>
-        </p:spPr>
-        <p:txBody>
-          <a:bodyPr wrap="square" rtlCol="0" anchor="ctr"/>
-          <a:lstStyle/>
-          <a:p>
-            <a:pPr indent="0" marL="0">
-              <a:buNone/>
-            </a:pPr>
-            <a:r>
-              <a:rPr lang="en-US" sz="1350" b="1" dirty="0">
+              <a:t>0%</a:t>
+            </a:r>
+            <a:endParaRPr lang="en-US" sz="1300" dirty="0"/>
+          </a:p>
+        </p:txBody>
+      </p:sp>
+      <p:sp>
+        <p:nvSpPr>
+          <p:cNvPr id="12" name="Text 10"/>
+          <p:cNvSpPr/>
+          <p:nvPr/>
+        </p:nvSpPr>
+        <p:spPr>
+          <a:xfrm>
+            <a:off x="6675120" y="3291840"/>
+            <a:ext cx="2377440" cy="457200"/>
+          </a:xfrm>
+          <a:prstGeom prst="rect">
+            <a:avLst/>
+          </a:prstGeom>
+          <a:noFill/>
+          <a:ln/>
+        </p:spPr>
+        <p:txBody>
+          <a:bodyPr wrap="square" rtlCol="0" anchor="ctr"/>
+          <a:lstStyle/>
+          <a:p>
+            <a:pPr indent="0" marL="0">
+              <a:buNone/>
+            </a:pPr>
+            <a:r>
+              <a:rPr lang="en-US" sz="1250" dirty="0">
+                <a:solidFill>
+                  <a:srgbClr val="E6ECFF"/>
+                </a:solidFill>
+                <a:latin typeface="Calibri" pitchFamily="34" charset="0"/>
+                <a:ea typeface="Calibri" pitchFamily="34" charset="-122"/>
+                <a:cs typeface="Calibri" pitchFamily="34" charset="-120"/>
+              </a:rPr>
+              <a:t>«пульс»</a:t>
+            </a:r>
+            <a:endParaRPr lang="en-US" sz="1250" dirty="0"/>
+          </a:p>
+        </p:txBody>
+      </p:sp>
+      <p:sp>
+        <p:nvSpPr>
+          <p:cNvPr id="13" name="Text 11"/>
+          <p:cNvSpPr/>
+          <p:nvPr/>
+        </p:nvSpPr>
+        <p:spPr>
+          <a:xfrm>
+            <a:off x="9052560" y="3291840"/>
+            <a:ext cx="1097280" cy="457200"/>
+          </a:xfrm>
+          <a:prstGeom prst="rect">
+            <a:avLst/>
+          </a:prstGeom>
+          <a:noFill/>
+          <a:ln/>
+        </p:spPr>
+        <p:txBody>
+          <a:bodyPr wrap="square" rtlCol="0" anchor="ctr"/>
+          <a:lstStyle/>
+          <a:p>
+            <a:pPr algn="ctr" indent="0" marL="0">
+              <a:buNone/>
+            </a:pPr>
+            <a:r>
+              <a:rPr lang="en-US" sz="1300" b="1" dirty="0">
+                <a:solidFill>
+                  <a:srgbClr val="FF6B81"/>
+                </a:solidFill>
+                <a:latin typeface="Calibri" pitchFamily="34" charset="0"/>
+                <a:ea typeface="Calibri" pitchFamily="34" charset="-122"/>
+                <a:cs typeface="Calibri" pitchFamily="34" charset="-120"/>
+              </a:rPr>
+              <a:t>99.5%</a:t>
+            </a:r>
+            <a:endParaRPr lang="en-US" sz="1300" dirty="0"/>
+          </a:p>
+        </p:txBody>
+      </p:sp>
+      <p:sp>
+        <p:nvSpPr>
+          <p:cNvPr id="14" name="Text 12"/>
+          <p:cNvSpPr/>
+          <p:nvPr/>
+        </p:nvSpPr>
+        <p:spPr>
+          <a:xfrm>
+            <a:off x="10104120" y="3291840"/>
+            <a:ext cx="365760" cy="457200"/>
+          </a:xfrm>
+          <a:prstGeom prst="rect">
+            <a:avLst/>
+          </a:prstGeom>
+          <a:noFill/>
+          <a:ln/>
+        </p:spPr>
+        <p:txBody>
+          <a:bodyPr wrap="square" rtlCol="0" anchor="ctr"/>
+          <a:lstStyle/>
+          <a:p>
+            <a:pPr algn="ctr" indent="0" marL="0">
+              <a:buNone/>
+            </a:pPr>
+            <a:r>
+              <a:rPr lang="en-US" sz="1300" dirty="0">
+                <a:solidFill>
+                  <a:srgbClr val="8891C5"/>
+                </a:solidFill>
+                <a:latin typeface="Calibri" pitchFamily="34" charset="0"/>
+                <a:ea typeface="Calibri" pitchFamily="34" charset="-122"/>
+                <a:cs typeface="Calibri" pitchFamily="34" charset="-120"/>
+              </a:rPr>
+              <a:t>-&gt;</a:t>
+            </a:r>
+            <a:endParaRPr lang="en-US" sz="1300" dirty="0"/>
+          </a:p>
+        </p:txBody>
+      </p:sp>
+      <p:sp>
+        <p:nvSpPr>
+          <p:cNvPr id="15" name="Text 13"/>
+          <p:cNvSpPr/>
+          <p:nvPr/>
+        </p:nvSpPr>
+        <p:spPr>
+          <a:xfrm>
+            <a:off x="10424160" y="3291840"/>
+            <a:ext cx="1005840" cy="457200"/>
+          </a:xfrm>
+          <a:prstGeom prst="rect">
+            <a:avLst/>
+          </a:prstGeom>
+          <a:noFill/>
+          <a:ln/>
+        </p:spPr>
+        <p:txBody>
+          <a:bodyPr wrap="square" rtlCol="0" anchor="ctr"/>
+          <a:lstStyle/>
+          <a:p>
+            <a:pPr algn="ctr" indent="0" marL="0">
+              <a:buNone/>
+            </a:pPr>
+            <a:r>
+              <a:rPr lang="en-US" sz="1300" b="1" dirty="0">
                 <a:solidFill>
                   <a:srgbClr val="4FD1FF"/>
                 </a:solidFill>
@@ -6204,38 +7409,155 @@
                 <a:ea typeface="Calibri" pitchFamily="34" charset="-122"/>
                 <a:cs typeface="Calibri" pitchFamily="34" charset="-120"/>
               </a:rPr>
-              <a:t>Spearman ρ = −0.47, p &lt; 0.001</a:t>
-            </a:r>
-            <a:endParaRPr lang="en-US" sz="1350" dirty="0"/>
-          </a:p>
-        </p:txBody>
-      </p:sp>
-      <p:sp>
-        <p:nvSpPr>
-          <p:cNvPr id="8" name="Text 5"/>
-          <p:cNvSpPr/>
-          <p:nvPr/>
-        </p:nvSpPr>
-        <p:spPr>
-          <a:xfrm>
-            <a:off x="6903720" y="2569464"/>
-            <a:ext cx="4754880" cy="457200"/>
-          </a:xfrm>
-          <a:prstGeom prst="rect">
-            <a:avLst/>
-          </a:prstGeom>
-          <a:noFill/>
-          <a:ln/>
-        </p:spPr>
-        <p:txBody>
-          <a:bodyPr wrap="square" rtlCol="0" anchor="ctr"/>
-          <a:lstStyle/>
-          <a:p>
-            <a:pPr indent="0" marL="0">
-              <a:buNone/>
-            </a:pPr>
-            <a:r>
-              <a:rPr lang="en-US" sz="1350" b="1" dirty="0">
+              <a:t>50.8%</a:t>
+            </a:r>
+            <a:endParaRPr lang="en-US" sz="1300" dirty="0"/>
+          </a:p>
+        </p:txBody>
+      </p:sp>
+      <p:sp>
+        <p:nvSpPr>
+          <p:cNvPr id="16" name="Text 14"/>
+          <p:cNvSpPr/>
+          <p:nvPr/>
+        </p:nvSpPr>
+        <p:spPr>
+          <a:xfrm>
+            <a:off x="6675120" y="3977640"/>
+            <a:ext cx="2377440" cy="457200"/>
+          </a:xfrm>
+          <a:prstGeom prst="rect">
+            <a:avLst/>
+          </a:prstGeom>
+          <a:noFill/>
+          <a:ln/>
+        </p:spPr>
+        <p:txBody>
+          <a:bodyPr wrap="square" rtlCol="0" anchor="ctr"/>
+          <a:lstStyle/>
+          <a:p>
+            <a:pPr indent="0" marL="0">
+              <a:buNone/>
+            </a:pPr>
+            <a:r>
+              <a:rPr lang="en-US" sz="1250" dirty="0">
+                <a:solidFill>
+                  <a:srgbClr val="E6ECFF"/>
+                </a:solidFill>
+                <a:latin typeface="Calibri" pitchFamily="34" charset="0"/>
+                <a:ea typeface="Calibri" pitchFamily="34" charset="-122"/>
+                <a:cs typeface="Calibri" pitchFamily="34" charset="-120"/>
+              </a:rPr>
+              <a:t>Все отзывы (среднее)</a:t>
+            </a:r>
+            <a:endParaRPr lang="en-US" sz="1250" dirty="0"/>
+          </a:p>
+        </p:txBody>
+      </p:sp>
+      <p:sp>
+        <p:nvSpPr>
+          <p:cNvPr id="17" name="Text 15"/>
+          <p:cNvSpPr/>
+          <p:nvPr/>
+        </p:nvSpPr>
+        <p:spPr>
+          <a:xfrm>
+            <a:off x="9052560" y="3977640"/>
+            <a:ext cx="1097280" cy="457200"/>
+          </a:xfrm>
+          <a:prstGeom prst="rect">
+            <a:avLst/>
+          </a:prstGeom>
+          <a:noFill/>
+          <a:ln/>
+        </p:spPr>
+        <p:txBody>
+          <a:bodyPr wrap="square" rtlCol="0" anchor="ctr"/>
+          <a:lstStyle/>
+          <a:p>
+            <a:pPr algn="ctr" indent="0" marL="0">
+              <a:buNone/>
+            </a:pPr>
+            <a:r>
+              <a:rPr lang="en-US" sz="1300" b="1" dirty="0">
+                <a:solidFill>
+                  <a:srgbClr val="FF6B81"/>
+                </a:solidFill>
+                <a:latin typeface="Calibri" pitchFamily="34" charset="0"/>
+                <a:ea typeface="Calibri" pitchFamily="34" charset="-122"/>
+                <a:cs typeface="Calibri" pitchFamily="34" charset="-120"/>
+              </a:rPr>
+              <a:t>39.2%</a:t>
+            </a:r>
+            <a:endParaRPr lang="en-US" sz="1300" dirty="0"/>
+          </a:p>
+        </p:txBody>
+      </p:sp>
+      <p:sp>
+        <p:nvSpPr>
+          <p:cNvPr id="18" name="Text 16"/>
+          <p:cNvSpPr/>
+          <p:nvPr/>
+        </p:nvSpPr>
+        <p:spPr>
+          <a:xfrm>
+            <a:off x="10104120" y="3977640"/>
+            <a:ext cx="365760" cy="457200"/>
+          </a:xfrm>
+          <a:prstGeom prst="rect">
+            <a:avLst/>
+          </a:prstGeom>
+          <a:noFill/>
+          <a:ln/>
+        </p:spPr>
+        <p:txBody>
+          <a:bodyPr wrap="square" rtlCol="0" anchor="ctr"/>
+          <a:lstStyle/>
+          <a:p>
+            <a:pPr algn="ctr" indent="0" marL="0">
+              <a:buNone/>
+            </a:pPr>
+            <a:r>
+              <a:rPr lang="en-US" sz="1300" dirty="0">
+                <a:solidFill>
+                  <a:srgbClr val="8891C5"/>
+                </a:solidFill>
+                <a:latin typeface="Calibri" pitchFamily="34" charset="0"/>
+                <a:ea typeface="Calibri" pitchFamily="34" charset="-122"/>
+                <a:cs typeface="Calibri" pitchFamily="34" charset="-120"/>
+              </a:rPr>
+              <a:t>-&gt;</a:t>
+            </a:r>
+            <a:endParaRPr lang="en-US" sz="1300" dirty="0"/>
+          </a:p>
+        </p:txBody>
+      </p:sp>
+      <p:sp>
+        <p:nvSpPr>
+          <p:cNvPr id="19" name="Text 17"/>
+          <p:cNvSpPr/>
+          <p:nvPr/>
+        </p:nvSpPr>
+        <p:spPr>
+          <a:xfrm>
+            <a:off x="10424160" y="3977640"/>
+            <a:ext cx="1005840" cy="457200"/>
+          </a:xfrm>
+          <a:prstGeom prst="rect">
+            <a:avLst/>
+          </a:prstGeom>
+          <a:noFill/>
+          <a:ln/>
+        </p:spPr>
+        <p:txBody>
+          <a:bodyPr wrap="square" rtlCol="0" anchor="ctr"/>
+          <a:lstStyle/>
+          <a:p>
+            <a:pPr algn="ctr" indent="0" marL="0">
+              <a:buNone/>
+            </a:pPr>
+            <a:r>
+              <a:rPr lang="en-US" sz="1300" b="1" dirty="0">
                 <a:solidFill>
                   <a:srgbClr val="4FD1FF"/>
                 </a:solidFill>
@@ -6243,22 +7565,22 @@
                 <a:ea typeface="Calibri" pitchFamily="34" charset="-122"/>
                 <a:cs typeface="Calibri" pitchFamily="34" charset="-120"/>
               </a:rPr>
-              <a:t>n = 56 575</a:t>
-            </a:r>
-            <a:endParaRPr lang="en-US" sz="1350" dirty="0"/>
-          </a:p>
-        </p:txBody>
-      </p:sp>
-      <p:sp>
-        <p:nvSpPr>
-          <p:cNvPr id="9" name="Text 6"/>
-          <p:cNvSpPr/>
-          <p:nvPr/>
-        </p:nvSpPr>
-        <p:spPr>
-          <a:xfrm>
-            <a:off x="6903720" y="3127248"/>
-            <a:ext cx="4754880" cy="3017520"/>
+              <a:t>36.1%</a:t>
+            </a:r>
+            <a:endParaRPr lang="en-US" sz="1300" dirty="0"/>
+          </a:p>
+        </p:txBody>
+      </p:sp>
+      <p:sp>
+        <p:nvSpPr>
+          <p:cNvPr id="20" name="Text 18"/>
+          <p:cNvSpPr/>
+          <p:nvPr/>
+        </p:nvSpPr>
+        <p:spPr>
+          <a:xfrm>
+            <a:off x="6675120" y="4937760"/>
+            <a:ext cx="4663440" cy="914400"/>
           </a:xfrm>
           <a:prstGeom prst="rect">
             <a:avLst/>
@@ -6274,7 +7596,7 @@
               <a:buNone/>
             </a:pPr>
             <a:r>
-              <a:rPr lang="en-US" sz="1200" dirty="0">
+              <a:rPr lang="en-US" sz="1150" i="1" dirty="0">
                 <a:solidFill>
                   <a:srgbClr val="8891C5"/>
                 </a:solidFill>
@@ -6282,15 +7604,15 @@
                 <a:ea typeface="Calibri" pitchFamily="34" charset="-122"/>
                 <a:cs typeface="Calibri" pitchFamily="34" charset="-120"/>
               </a:rPr>
-              <a:t>Обращения, закрытые за час, дают 20% недовольных — те, что тянутся 1–3 дня, 94%. Но осторожно с причинностью: сложные кейсы и решаются дольше, и злят сильнее — это может быть общая причина, а не цепочка «долго → зол».</a:t>
-            </a:r>
-            <a:endParaRPr lang="en-US" sz="1200" dirty="0"/>
-          </a:p>
-        </p:txBody>
-      </p:sp>
-      <p:sp>
-        <p:nvSpPr>
-          <p:cNvPr id="10" name="Text 7"/>
+              <a:t>Неожиданно ровные 99-100% на подвыборке — сам по себе повод перепроверить методику, а не сразу делать громкий вывод.</a:t>
+            </a:r>
+            <a:endParaRPr lang="en-US" sz="1150" dirty="0"/>
+          </a:p>
+        </p:txBody>
+      </p:sp>
+      <p:sp>
+        <p:nvSpPr>
+          <p:cNvPr id="21" name="Text 19"/>
           <p:cNvSpPr/>
           <p:nvPr/>
         </p:nvSpPr>
@@ -6329,7 +7651,7 @@
       </p:sp>
       <p:sp>
         <p:nvSpPr>
-          <p:cNvPr id="11" name="Text 8"/>
+          <p:cNvPr id="22" name="Text 20"/>
           <p:cNvSpPr/>
           <p:nvPr/>
         </p:nvSpPr>
@@ -6407,7 +7729,7 @@
         <p:spPr>
           <a:xfrm>
             <a:off x="548640" y="411480"/>
-            <a:ext cx="7315200" cy="320040"/>
+            <a:ext cx="9144000" cy="320040"/>
           </a:xfrm>
           <a:prstGeom prst="rect">
             <a:avLst/>
@@ -6431,7 +7753,7 @@
                 <a:ea typeface="Calibri" pitchFamily="34" charset="-122"/>
                 <a:cs typeface="Calibri" pitchFamily="34" charset="-120"/>
               </a:rPr>
-              <a:t>ГИПОТЕЗА H2</a:t>
+              <a:t>ГИПОТЕЗА H1</a:t>
             </a:r>
             <a:endParaRPr lang="en-US" sz="1300" dirty="0"/>
           </a:p>
@@ -6462,7 +7784,7 @@
               <a:buNone/>
             </a:pPr>
             <a:r>
-              <a:rPr lang="en-US" sz="2200" b="1" dirty="0">
+              <a:rPr lang="en-US" sz="2100" b="1" dirty="0">
                 <a:solidFill>
                   <a:srgbClr val="E6ECFF"/>
                 </a:solidFill>
@@ -6470,9 +7792,9 @@
                 <a:ea typeface="Cambria" pitchFamily="34" charset="-122"/>
                 <a:cs typeface="Cambria" pitchFamily="34" charset="-120"/>
               </a:rPr>
-              <a:t>Удовлетворённость растёт вместе с ценностью клиентского сегмента</a:t>
-            </a:r>
-            <a:endParaRPr lang="en-US" sz="2200" dirty="0"/>
+              <a:t>Чем дольше решают вопрос — тем ниже оценка</a:t>
+            </a:r>
+            <a:endParaRPr lang="en-US" sz="2100" dirty="0"/>
           </a:p>
         </p:txBody>
       </p:sp>
@@ -6484,8 +7806,8 @@
         </p:nvSpPr>
         <p:spPr>
           <a:xfrm>
-            <a:off x="548640" y="1554480"/>
-            <a:ext cx="2377440" cy="384048"/>
+            <a:off x="548640" y="1508760"/>
+            <a:ext cx="2468880" cy="384048"/>
           </a:xfrm>
           <a:prstGeom prst="roundRect">
             <a:avLst>
@@ -6511,8 +7833,8 @@
         </p:nvSpPr>
         <p:spPr>
           <a:xfrm>
-            <a:off x="548640" y="1554480"/>
-            <a:ext cx="2377440" cy="384048"/>
+            <a:off x="548640" y="1508760"/>
+            <a:ext cx="2468880" cy="384048"/>
           </a:xfrm>
           <a:prstGeom prst="rect">
             <a:avLst/>
@@ -6536,7 +7858,7 @@
                 <a:ea typeface="Calibri" pitchFamily="34" charset="-122"/>
                 <a:cs typeface="Calibri" pitchFamily="34" charset="-120"/>
               </a:rPr>
-              <a:t>ПОДТВЕРЖДЕНА</a:t>
+              <a:t>ПОДТВЕРЖДЕНА (с оговоркой)</a:t>
             </a:r>
             <a:endParaRPr lang="en-US" sz="1200" dirty="0"/>
           </a:p>
@@ -6544,7 +7866,7 @@
       </p:sp>
       <p:pic>
         <p:nvPicPr>
-          <p:cNvPr id="6" name="Image 0" descr="C:\Users\igora\edu_portfolios\tbank-reviews-analysis\images\09_segment_satisfaction.png">    </p:cNvPr>
+          <p:cNvPr id="6" name="Image 0" descr="C:\Users\igora\edu_portfolios\tbank-reviews-analysis\images\02_processing_time_vs_detractors.png">    </p:cNvPr>
           <p:cNvPicPr>
             <a:picLocks noChangeAspect="1"/>
           </p:cNvPicPr>
@@ -6557,8 +7879,8 @@
         </p:blipFill>
         <p:spPr>
           <a:xfrm>
-            <a:off x="548640" y="2148840"/>
-            <a:ext cx="6035040" cy="4023360"/>
+            <a:off x="548640" y="2103120"/>
+            <a:ext cx="6035040" cy="4069080"/>
           </a:xfrm>
           <a:prstGeom prst="rect">
             <a:avLst/>
@@ -6573,7 +7895,7 @@
         </p:nvSpPr>
         <p:spPr>
           <a:xfrm>
-            <a:off x="6903720" y="2148840"/>
+            <a:off x="6903720" y="2103120"/>
             <a:ext cx="4754880" cy="457200"/>
           </a:xfrm>
           <a:prstGeom prst="rect">
@@ -6590,7 +7912,7 @@
               <a:buNone/>
             </a:pPr>
             <a:r>
-              <a:rPr lang="en-US" sz="1350" b="1" dirty="0">
+              <a:rPr lang="en-US" sz="1300" b="1" dirty="0">
                 <a:solidFill>
                   <a:srgbClr val="4FD1FF"/>
                 </a:solidFill>
@@ -6598,9 +7920,9 @@
                 <a:ea typeface="Calibri" pitchFamily="34" charset="-122"/>
                 <a:cs typeface="Calibri" pitchFamily="34" charset="-120"/>
               </a:rPr>
-              <a:t>3.13 (Защищённые) → 4.06 (Высокодоходные с ПМ)</a:t>
-            </a:r>
-            <a:endParaRPr lang="en-US" sz="1350" dirty="0"/>
+              <a:t>Spearman ρ = −0.47 по детрактор-флагу, p &lt; 0.001</a:t>
+            </a:r>
+            <a:endParaRPr lang="en-US" sz="1300" dirty="0"/>
           </a:p>
         </p:txBody>
       </p:sp>
@@ -6612,7 +7934,7 @@
         </p:nvSpPr>
         <p:spPr>
           <a:xfrm>
-            <a:off x="6903720" y="2569464"/>
+            <a:off x="6903720" y="2505456"/>
             <a:ext cx="4754880" cy="457200"/>
           </a:xfrm>
           <a:prstGeom prst="rect">
@@ -6629,7 +7951,7 @@
               <a:buNone/>
             </a:pPr>
             <a:r>
-              <a:rPr lang="en-US" sz="1350" b="1" dirty="0">
+              <a:rPr lang="en-US" sz="1300" b="1" dirty="0">
                 <a:solidFill>
                   <a:srgbClr val="4FD1FF"/>
                 </a:solidFill>
@@ -6637,9 +7959,9 @@
                 <a:ea typeface="Calibri" pitchFamily="34" charset="-122"/>
                 <a:cs typeface="Calibri" pitchFamily="34" charset="-120"/>
               </a:rPr>
-              <a:t>ANOVA F = 131.6, p &lt; 0.001</a:t>
-            </a:r>
-            <a:endParaRPr lang="en-US" sz="1350" dirty="0"/>
+              <a:t>Но по csat_score: ρ = 0.048 (почти нет эффекта)</a:t>
+            </a:r>
+            <a:endParaRPr lang="en-US" sz="1300" dirty="0"/>
           </a:p>
         </p:txBody>
       </p:sp>
@@ -6651,8 +7973,8 @@
         </p:nvSpPr>
         <p:spPr>
           <a:xfrm>
-            <a:off x="6903720" y="3127248"/>
-            <a:ext cx="4754880" cy="3017520"/>
+            <a:off x="6903720" y="3044952"/>
+            <a:ext cx="4754880" cy="3291840"/>
           </a:xfrm>
           <a:prstGeom prst="rect">
             <a:avLst/>
@@ -6668,7 +7990,7 @@
               <a:buNone/>
             </a:pPr>
             <a:r>
-              <a:rPr lang="en-US" sz="1200" dirty="0">
+              <a:rPr lang="en-US" sz="1150" dirty="0">
                 <a:solidFill>
                   <a:srgbClr val="8891C5"/>
                 </a:solidFill>
@@ -6676,9 +7998,9 @@
                 <a:ea typeface="Calibri" pitchFamily="34" charset="-122"/>
                 <a:cs typeface="Calibri" pitchFamily="34" charset="-120"/>
               </a:rPr>
-              <a:t>Монотонная зависимость почти без исключений. Вероятная причина — не «более обеспеченные мягче», а разница в уровне обслуживания (выделенная линия поддержки). Вопрос для бизнеса: что из premium-сервиса дёшево перенести на массовый сегмент.</a:t>
-            </a:r>
-            <a:endParaRPr lang="en-US" sz="1200" dirty="0"/>
+              <a:t>Обращения, закрытые за час, дают 20% недовольных — за 1-3 дня — 88%. Но независимая проверка через официальный csat_score эффект почти не находит — вероятно, csat считается на узкой, уже эскалированной подвыборке. Не стоит обещать бизнесу линейный эффект от простого ускорения SLA.</a:t>
+            </a:r>
+            <a:endParaRPr lang="en-US" sz="1150" dirty="0"/>
           </a:p>
         </p:txBody>
       </p:sp>
@@ -6801,7 +8123,7 @@
         <p:spPr>
           <a:xfrm>
             <a:off x="548640" y="411480"/>
-            <a:ext cx="7315200" cy="320040"/>
+            <a:ext cx="9144000" cy="320040"/>
           </a:xfrm>
           <a:prstGeom prst="rect">
             <a:avLst/>
@@ -6825,7 +8147,7 @@
                 <a:ea typeface="Calibri" pitchFamily="34" charset="-122"/>
                 <a:cs typeface="Calibri" pitchFamily="34" charset="-120"/>
               </a:rPr>
-              <a:t>ГИПОТЕЗА H3</a:t>
+              <a:t>ГИПОТЕЗА H2</a:t>
             </a:r>
             <a:endParaRPr lang="en-US" sz="1300" dirty="0"/>
           </a:p>
@@ -6856,7 +8178,7 @@
               <a:buNone/>
             </a:pPr>
             <a:r>
-              <a:rPr lang="en-US" sz="2200" b="1" dirty="0">
+              <a:rPr lang="en-US" sz="2100" b="1" dirty="0">
                 <a:solidFill>
                   <a:srgbClr val="E6ECFF"/>
                 </a:solidFill>
@@ -6864,9 +8186,9 @@
                 <a:ea typeface="Cambria" pitchFamily="34" charset="-122"/>
                 <a:cs typeface="Cambria" pitchFamily="34" charset="-120"/>
               </a:rPr>
-              <a:t>Доля недовольных различается между источниками отзывов</a:t>
-            </a:r>
-            <a:endParaRPr lang="en-US" sz="2200" dirty="0"/>
+              <a:t>Удовлетворённость растёт вместе с ценностью клиентского сегмента</a:t>
+            </a:r>
+            <a:endParaRPr lang="en-US" sz="2100" dirty="0"/>
           </a:p>
         </p:txBody>
       </p:sp>
@@ -6878,8 +8200,8 @@
         </p:nvSpPr>
         <p:spPr>
           <a:xfrm>
-            <a:off x="548640" y="1554480"/>
-            <a:ext cx="2377440" cy="384048"/>
+            <a:off x="548640" y="1508760"/>
+            <a:ext cx="2468880" cy="384048"/>
           </a:xfrm>
           <a:prstGeom prst="roundRect">
             <a:avLst>
@@ -6905,8 +8227,8 @@
         </p:nvSpPr>
         <p:spPr>
           <a:xfrm>
-            <a:off x="548640" y="1554480"/>
-            <a:ext cx="2377440" cy="384048"/>
+            <a:off x="548640" y="1508760"/>
+            <a:ext cx="2468880" cy="384048"/>
           </a:xfrm>
           <a:prstGeom prst="rect">
             <a:avLst/>
@@ -6930,7 +8252,7 @@
                 <a:ea typeface="Calibri" pitchFamily="34" charset="-122"/>
                 <a:cs typeface="Calibri" pitchFamily="34" charset="-120"/>
               </a:rPr>
-              <a:t>ПОДТВЕРЖДЕНА (иначе, чем ждали)</a:t>
+              <a:t>ПОДТВЕРЖДЕНА</a:t>
             </a:r>
             <a:endParaRPr lang="en-US" sz="1200" dirty="0"/>
           </a:p>
@@ -6938,7 +8260,7 @@
       </p:sp>
       <p:pic>
         <p:nvPicPr>
-          <p:cNvPr id="6" name="Image 0" descr="C:\Users\igora\edu_portfolios\tbank-reviews-analysis\images\10_platform_breakdown.png">    </p:cNvPr>
+          <p:cNvPr id="6" name="Image 0" descr="C:\Users\igora\edu_portfolios\tbank-reviews-analysis\images\09_segment_satisfaction.png">    </p:cNvPr>
           <p:cNvPicPr>
             <a:picLocks noChangeAspect="1"/>
           </p:cNvPicPr>
@@ -6951,8 +8273,8 @@
         </p:blipFill>
         <p:spPr>
           <a:xfrm>
-            <a:off x="548640" y="2148840"/>
-            <a:ext cx="6035040" cy="4023360"/>
+            <a:off x="548640" y="2103120"/>
+            <a:ext cx="6035040" cy="4069080"/>
           </a:xfrm>
           <a:prstGeom prst="rect">
             <a:avLst/>
@@ -6967,7 +8289,7 @@
         </p:nvSpPr>
         <p:spPr>
           <a:xfrm>
-            <a:off x="6903720" y="2148840"/>
+            <a:off x="6903720" y="2103120"/>
             <a:ext cx="4754880" cy="457200"/>
           </a:xfrm>
           <a:prstGeom prst="rect">
@@ -6984,7 +8306,7 @@
               <a:buNone/>
             </a:pPr>
             <a:r>
-              <a:rPr lang="en-US" sz="1350" b="1" dirty="0">
+              <a:rPr lang="en-US" sz="1300" b="1" dirty="0">
                 <a:solidFill>
                   <a:srgbClr val="4FD1FF"/>
                 </a:solidFill>
@@ -6992,9 +8314,9 @@
                 <a:ea typeface="Calibri" pitchFamily="34" charset="-122"/>
                 <a:cs typeface="Calibri" pitchFamily="34" charset="-120"/>
               </a:rPr>
-              <a:t>χ² = 5315, p &lt; 0.001, 20 источников</a:t>
-            </a:r>
-            <a:endParaRPr lang="en-US" sz="1350" dirty="0"/>
+              <a:t>46.4% (Защищённые) -&gt; 20.8% (Высокодоходные с ПМ)</a:t>
+            </a:r>
+            <a:endParaRPr lang="en-US" sz="1300" dirty="0"/>
           </a:p>
         </p:txBody>
       </p:sp>
@@ -7006,8 +8328,47 @@
         </p:nvSpPr>
         <p:spPr>
           <a:xfrm>
-            <a:off x="6903720" y="2706624"/>
-            <a:ext cx="4754880" cy="3017520"/>
+            <a:off x="6903720" y="2505456"/>
+            <a:ext cx="4754880" cy="457200"/>
+          </a:xfrm>
+          <a:prstGeom prst="rect">
+            <a:avLst/>
+          </a:prstGeom>
+          <a:noFill/>
+          <a:ln/>
+        </p:spPr>
+        <p:txBody>
+          <a:bodyPr wrap="square" rtlCol="0" anchor="ctr"/>
+          <a:lstStyle/>
+          <a:p>
+            <a:pPr indent="0" marL="0">
+              <a:buNone/>
+            </a:pPr>
+            <a:r>
+              <a:rPr lang="en-US" sz="1300" b="1" dirty="0">
+                <a:solidFill>
+                  <a:srgbClr val="4FD1FF"/>
+                </a:solidFill>
+                <a:latin typeface="Calibri" pitchFamily="34" charset="0"/>
+                <a:ea typeface="Calibri" pitchFamily="34" charset="-122"/>
+                <a:cs typeface="Calibri" pitchFamily="34" charset="-120"/>
+              </a:rPr>
+              <a:t>ANOVA F = 131.6, p &lt; 0.001</a:t>
+            </a:r>
+            <a:endParaRPr lang="en-US" sz="1300" dirty="0"/>
+          </a:p>
+        </p:txBody>
+      </p:sp>
+      <p:sp>
+        <p:nvSpPr>
+          <p:cNvPr id="9" name="Text 6"/>
+          <p:cNvSpPr/>
+          <p:nvPr/>
+        </p:nvSpPr>
+        <p:spPr>
+          <a:xfrm>
+            <a:off x="6903720" y="3044952"/>
+            <a:ext cx="4754880" cy="3291840"/>
           </a:xfrm>
           <a:prstGeom prst="rect">
             <a:avLst/>
@@ -7023,7 +8384,7 @@
               <a:buNone/>
             </a:pPr>
             <a:r>
-              <a:rPr lang="en-US" sz="1200" dirty="0">
+              <a:rPr lang="en-US" sz="1150" dirty="0">
                 <a:solidFill>
                   <a:srgbClr val="8891C5"/>
                 </a:solidFill>
@@ -7031,15 +8392,15 @@
                 <a:ea typeface="Calibri" pitchFamily="34" charset="-122"/>
                 <a:cs typeface="Calibri" pitchFamily="34" charset="-120"/>
               </a:rPr>
-              <a:t>Главное деление — не между banki.ru (36%) и sravni.ru (20%), а между «витринами мнений» и каналами эскалации жалоб: «пульс» — 99.5% детракторов, обращения без источника — 100%, otzovik — 75%. Считать долю негатива по всем источникам смешанно — методологическая ошибка: разные каналы, разная природа.</a:t>
-            </a:r>
-            <a:endParaRPr lang="en-US" sz="1200" dirty="0"/>
-          </a:p>
-        </p:txBody>
-      </p:sp>
-      <p:sp>
-        <p:nvSpPr>
-          <p:cNvPr id="9" name="Text 6"/>
+              <a:t>Монотонная зависимость без единого исключения. Вероятная причина — не «более обеспеченные мягче», а разница в уровне обслуживания (выделенная линия поддержки). Вопрос для бизнеса: что из premium-сервиса дёшево перенести на массовый сегмент.</a:t>
+            </a:r>
+            <a:endParaRPr lang="en-US" sz="1150" dirty="0"/>
+          </a:p>
+        </p:txBody>
+      </p:sp>
+      <p:sp>
+        <p:nvSpPr>
+          <p:cNvPr id="10" name="Text 7"/>
           <p:cNvSpPr/>
           <p:nvPr/>
         </p:nvSpPr>
@@ -7078,7 +8439,7 @@
       </p:sp>
       <p:sp>
         <p:nvSpPr>
-          <p:cNvPr id="10" name="Text 7"/>
+          <p:cNvPr id="11" name="Text 8"/>
           <p:cNvSpPr/>
           <p:nvPr/>
         </p:nvSpPr>
@@ -7156,7 +8517,7 @@
         <p:spPr>
           <a:xfrm>
             <a:off x="548640" y="411480"/>
-            <a:ext cx="7315200" cy="320040"/>
+            <a:ext cx="9144000" cy="320040"/>
           </a:xfrm>
           <a:prstGeom prst="rect">
             <a:avLst/>
@@ -7180,7 +8541,7 @@
                 <a:ea typeface="Calibri" pitchFamily="34" charset="-122"/>
                 <a:cs typeface="Calibri" pitchFamily="34" charset="-120"/>
               </a:rPr>
-              <a:t>ГИПОТЕЗА H4</a:t>
+              <a:t>ГИПОТЕЗА H3</a:t>
             </a:r>
             <a:endParaRPr lang="en-US" sz="1300" dirty="0"/>
           </a:p>
@@ -7211,7 +8572,7 @@
               <a:buNone/>
             </a:pPr>
             <a:r>
-              <a:rPr lang="en-US" sz="2200" b="1" dirty="0">
+              <a:rPr lang="en-US" sz="2100" b="1" dirty="0">
                 <a:solidFill>
                   <a:srgbClr val="E6ECFF"/>
                 </a:solidFill>
@@ -7219,9 +8580,9 @@
                 <a:ea typeface="Cambria" pitchFamily="34" charset="-122"/>
                 <a:cs typeface="Cambria" pitchFamily="34" charset="-120"/>
               </a:rPr>
-              <a:t>Охват поддержки различается по направлениям бизнеса</a:t>
-            </a:r>
-            <a:endParaRPr lang="en-US" sz="2200" dirty="0"/>
+              <a:t>Доля недовольных различается между источниками отзывов</a:t>
+            </a:r>
+            <a:endParaRPr lang="en-US" sz="2100" dirty="0"/>
           </a:p>
         </p:txBody>
       </p:sp>
@@ -7233,8 +8594,8 @@
         </p:nvSpPr>
         <p:spPr>
           <a:xfrm>
-            <a:off x="548640" y="1554480"/>
-            <a:ext cx="2377440" cy="384048"/>
+            <a:off x="548640" y="1508760"/>
+            <a:ext cx="2468880" cy="384048"/>
           </a:xfrm>
           <a:prstGeom prst="roundRect">
             <a:avLst>
@@ -7260,8 +8621,8 @@
         </p:nvSpPr>
         <p:spPr>
           <a:xfrm>
-            <a:off x="548640" y="1554480"/>
-            <a:ext cx="2377440" cy="384048"/>
+            <a:off x="548640" y="1508760"/>
+            <a:ext cx="2468880" cy="384048"/>
           </a:xfrm>
           <a:prstGeom prst="rect">
             <a:avLst/>
@@ -7285,7 +8646,7 @@
                 <a:ea typeface="Calibri" pitchFamily="34" charset="-122"/>
                 <a:cs typeface="Calibri" pitchFamily="34" charset="-120"/>
               </a:rPr>
-              <a:t>ПОДТВЕРЖДЕНА</a:t>
+              <a:t>ПОДТВЕРЖДЕНА (умереннее, чем казалось)</a:t>
             </a:r>
             <a:endParaRPr lang="en-US" sz="1200" dirty="0"/>
           </a:p>
@@ -7293,7 +8654,7 @@
       </p:sp>
       <p:pic>
         <p:nvPicPr>
-          <p:cNvPr id="6" name="Image 0" descr="C:\Users\igora\edu_portfolios\tbank-reviews-analysis\images\11_resolution_by_business_line.png">    </p:cNvPr>
+          <p:cNvPr id="6" name="Image 0" descr="C:\Users\igora\edu_portfolios\tbank-reviews-analysis\images\10_platform_breakdown.png">    </p:cNvPr>
           <p:cNvPicPr>
             <a:picLocks noChangeAspect="1"/>
           </p:cNvPicPr>
@@ -7306,8 +8667,8 @@
         </p:blipFill>
         <p:spPr>
           <a:xfrm>
-            <a:off x="548640" y="2148840"/>
-            <a:ext cx="6035040" cy="4023360"/>
+            <a:off x="548640" y="2103120"/>
+            <a:ext cx="6035040" cy="4069080"/>
           </a:xfrm>
           <a:prstGeom prst="rect">
             <a:avLst/>
@@ -7322,7 +8683,7 @@
         </p:nvSpPr>
         <p:spPr>
           <a:xfrm>
-            <a:off x="6903720" y="2148840"/>
+            <a:off x="6903720" y="2103120"/>
             <a:ext cx="4754880" cy="457200"/>
           </a:xfrm>
           <a:prstGeom prst="rect">
@@ -7339,7 +8700,7 @@
               <a:buNone/>
             </a:pPr>
             <a:r>
-              <a:rPr lang="en-US" sz="1350" b="1" dirty="0">
+              <a:rPr lang="en-US" sz="1300" b="1" dirty="0">
                 <a:solidFill>
                   <a:srgbClr val="4FD1FF"/>
                 </a:solidFill>
@@ -7347,9 +8708,9 @@
                 <a:ea typeface="Calibri" pitchFamily="34" charset="-122"/>
                 <a:cs typeface="Calibri" pitchFamily="34" charset="-120"/>
               </a:rPr>
-              <a:t>От 0.9% (mobile) до 74% (sme) детракторов</a:t>
-            </a:r>
-            <a:endParaRPr lang="en-US" sz="1350" dirty="0"/>
+              <a:t>χ² значим, p &lt; 0.001, 20 источников</a:t>
+            </a:r>
+            <a:endParaRPr lang="en-US" sz="1300" dirty="0"/>
           </a:p>
         </p:txBody>
       </p:sp>
@@ -7361,7 +8722,7 @@
         </p:nvSpPr>
         <p:spPr>
           <a:xfrm>
-            <a:off x="6903720" y="2569464"/>
+            <a:off x="6903720" y="2505456"/>
             <a:ext cx="4754880" cy="457200"/>
           </a:xfrm>
           <a:prstGeom prst="rect">
@@ -7378,7 +8739,7 @@
               <a:buNone/>
             </a:pPr>
             <a:r>
-              <a:rPr lang="en-US" sz="1350" b="1" dirty="0">
+              <a:rPr lang="en-US" sz="1300" b="1" dirty="0">
                 <a:solidFill>
                   <a:srgbClr val="4FD1FF"/>
                 </a:solidFill>
@@ -7386,9 +8747,9 @@
                 <a:ea typeface="Calibri" pitchFamily="34" charset="-122"/>
                 <a:cs typeface="Calibri" pitchFamily="34" charset="-120"/>
               </a:rPr>
-              <a:t>с меткой «решено», χ² = 2178, p &lt; 0.001</a:t>
-            </a:r>
-            <a:endParaRPr lang="en-US" sz="1350" dirty="0"/>
+              <a:t>После исправления методики — без экстремумов</a:t>
+            </a:r>
+            <a:endParaRPr lang="en-US" sz="1300" dirty="0"/>
           </a:p>
         </p:txBody>
       </p:sp>
@@ -7400,8 +8761,8 @@
         </p:nvSpPr>
         <p:spPr>
           <a:xfrm>
-            <a:off x="6903720" y="3127248"/>
-            <a:ext cx="4754880" cy="3017520"/>
+            <a:off x="6903720" y="3044952"/>
+            <a:ext cx="4754880" cy="3291840"/>
           </a:xfrm>
           <a:prstGeom prst="rect">
             <a:avLst/>
@@ -7417,7 +8778,7 @@
               <a:buNone/>
             </a:pPr>
             <a:r>
-              <a:rPr lang="en-US" sz="1200" dirty="0">
+              <a:rPr lang="en-US" sz="1150" dirty="0">
                 <a:solidFill>
                   <a:srgbClr val="8891C5"/>
                 </a:solidFill>
@@ -7425,9 +8786,9 @@
                 <a:ea typeface="Calibri" pitchFamily="34" charset="-122"/>
                 <a:cs typeface="Calibri" pitchFamily="34" charset="-120"/>
               </a:rPr>
-              <a:t>«Решение проблемы поднимает оценку» на этих данных не проверить — нет повторного опроса после решения. Но операционный вопрос проверяем: получают ли жалобы одинаковый охват поддержки в разных направлениях. Разброс огромный — кандидат на разбор с владельцем процесса mobile.</a:t>
-            </a:r>
-            <a:endParaRPr lang="en-US" sz="1200" dirty="0"/>
+              <a:t>banki.ru — 35%, sravni.ru — 20%, otzovik — 75%, «пульс» — 51% (было 99.5% на ошибочных данных, см. слайд про методику). Разброс большой и значимый, но не такой драматичный, как в первой версии анализа — важно считать репутационную метрику отдельно от каналов эскалации жалоб, но без перегиба в «одна площадка = 100% негатива».</a:t>
+            </a:r>
+            <a:endParaRPr lang="en-US" sz="1150" dirty="0"/>
           </a:p>
         </p:txBody>
       </p:sp>
@@ -7550,7 +8911,7 @@
         <p:spPr>
           <a:xfrm>
             <a:off x="548640" y="411480"/>
-            <a:ext cx="7315200" cy="320040"/>
+            <a:ext cx="9144000" cy="320040"/>
           </a:xfrm>
           <a:prstGeom prst="rect">
             <a:avLst/>
@@ -7574,7 +8935,7 @@
                 <a:ea typeface="Calibri" pitchFamily="34" charset="-122"/>
                 <a:cs typeface="Calibri" pitchFamily="34" charset="-120"/>
               </a:rPr>
-              <a:t>ГИПОТЕЗА H5</a:t>
+              <a:t>ГИПОТЕЗА H4</a:t>
             </a:r>
             <a:endParaRPr lang="en-US" sz="1300" dirty="0"/>
           </a:p>
@@ -7605,7 +8966,7 @@
               <a:buNone/>
             </a:pPr>
             <a:r>
-              <a:rPr lang="en-US" sz="2200" b="1" dirty="0">
+              <a:rPr lang="en-US" sz="2100" b="1" dirty="0">
                 <a:solidFill>
                   <a:srgbClr val="E6ECFF"/>
                 </a:solidFill>
@@ -7613,9 +8974,9 @@
                 <a:ea typeface="Cambria" pitchFamily="34" charset="-122"/>
                 <a:cs typeface="Cambria" pitchFamily="34" charset="-120"/>
               </a:rPr>
-              <a:t>Новые клиенты (стаж &lt; 3 мес.) менее довольны действующих</a:t>
-            </a:r>
-            <a:endParaRPr lang="en-US" sz="2200" dirty="0"/>
+              <a:t>Охват поддержки различается по направлениям бизнеса</a:t>
+            </a:r>
+            <a:endParaRPr lang="en-US" sz="2100" dirty="0"/>
           </a:p>
         </p:txBody>
       </p:sp>
@@ -7627,8 +8988,8 @@
         </p:nvSpPr>
         <p:spPr>
           <a:xfrm>
-            <a:off x="548640" y="1554480"/>
-            <a:ext cx="2377440" cy="384048"/>
+            <a:off x="548640" y="1508760"/>
+            <a:ext cx="2468880" cy="384048"/>
           </a:xfrm>
           <a:prstGeom prst="roundRect">
             <a:avLst>
@@ -7654,8 +9015,8 @@
         </p:nvSpPr>
         <p:spPr>
           <a:xfrm>
-            <a:off x="548640" y="1554480"/>
-            <a:ext cx="2377440" cy="384048"/>
+            <a:off x="548640" y="1508760"/>
+            <a:ext cx="2468880" cy="384048"/>
           </a:xfrm>
           <a:prstGeom prst="rect">
             <a:avLst/>
@@ -7687,7 +9048,7 @@
       </p:sp>
       <p:pic>
         <p:nvPicPr>
-          <p:cNvPr id="6" name="Image 0" descr="C:\Users\igora\edu_portfolios\tbank-reviews-analysis\images\08_new_vs_existing.png">    </p:cNvPr>
+          <p:cNvPr id="6" name="Image 0" descr="C:\Users\igora\edu_portfolios\tbank-reviews-analysis\images\11_resolution_by_business_line.png">    </p:cNvPr>
           <p:cNvPicPr>
             <a:picLocks noChangeAspect="1"/>
           </p:cNvPicPr>
@@ -7700,8 +9061,8 @@
         </p:blipFill>
         <p:spPr>
           <a:xfrm>
-            <a:off x="548640" y="2148840"/>
-            <a:ext cx="6035040" cy="4023360"/>
+            <a:off x="548640" y="2103120"/>
+            <a:ext cx="6035040" cy="4069080"/>
           </a:xfrm>
           <a:prstGeom prst="rect">
             <a:avLst/>
@@ -7716,7 +9077,7 @@
         </p:nvSpPr>
         <p:spPr>
           <a:xfrm>
-            <a:off x="6903720" y="2148840"/>
+            <a:off x="6903720" y="2103120"/>
             <a:ext cx="4754880" cy="457200"/>
           </a:xfrm>
           <a:prstGeom prst="rect">
@@ -7733,7 +9094,7 @@
               <a:buNone/>
             </a:pPr>
             <a:r>
-              <a:rPr lang="en-US" sz="1350" b="1" dirty="0">
+              <a:rPr lang="en-US" sz="1300" b="1" dirty="0">
                 <a:solidFill>
                   <a:srgbClr val="4FD1FF"/>
                 </a:solidFill>
@@ -7741,9 +9102,9 @@
                 <a:ea typeface="Calibri" pitchFamily="34" charset="-122"/>
                 <a:cs typeface="Calibri" pitchFamily="34" charset="-120"/>
               </a:rPr>
-              <a:t>2.95 (новые) vs 3.37 (действующие)</a:t>
-            </a:r>
-            <a:endParaRPr lang="en-US" sz="1350" dirty="0"/>
+              <a:t>От 0.9% (mobile) до 74% (sme) решённых</a:t>
+            </a:r>
+            <a:endParaRPr lang="en-US" sz="1300" dirty="0"/>
           </a:p>
         </p:txBody>
       </p:sp>
@@ -7755,7 +9116,7 @@
         </p:nvSpPr>
         <p:spPr>
           <a:xfrm>
-            <a:off x="6903720" y="2569464"/>
+            <a:off x="6903720" y="2505456"/>
             <a:ext cx="4754880" cy="457200"/>
           </a:xfrm>
           <a:prstGeom prst="rect">
@@ -7772,7 +9133,7 @@
               <a:buNone/>
             </a:pPr>
             <a:r>
-              <a:rPr lang="en-US" sz="1350" b="1" dirty="0">
+              <a:rPr lang="en-US" sz="1300" b="1" dirty="0">
                 <a:solidFill>
                   <a:srgbClr val="4FD1FF"/>
                 </a:solidFill>
@@ -7780,9 +9141,9 @@
                 <a:ea typeface="Calibri" pitchFamily="34" charset="-122"/>
                 <a:cs typeface="Calibri" pitchFamily="34" charset="-120"/>
               </a:rPr>
-              <a:t>Welch t-test, p &lt; 0.001</a:t>
-            </a:r>
-            <a:endParaRPr lang="en-US" sz="1350" dirty="0"/>
+              <a:t>жалоб, χ² значим, p &lt; 0.001</a:t>
+            </a:r>
+            <a:endParaRPr lang="en-US" sz="1300" dirty="0"/>
           </a:p>
         </p:txBody>
       </p:sp>
@@ -7794,8 +9155,8 @@
         </p:nvSpPr>
         <p:spPr>
           <a:xfrm>
-            <a:off x="6903720" y="3127248"/>
-            <a:ext cx="4754880" cy="3017520"/>
+            <a:off x="6903720" y="3044952"/>
+            <a:ext cx="4754880" cy="3291840"/>
           </a:xfrm>
           <a:prstGeom prst="rect">
             <a:avLst/>
@@ -7811,7 +9172,7 @@
               <a:buNone/>
             </a:pPr>
             <a:r>
-              <a:rPr lang="en-US" sz="1200" dirty="0">
+              <a:rPr lang="en-US" sz="1150" dirty="0">
                 <a:solidFill>
                   <a:srgbClr val="8891C5"/>
                 </a:solidFill>
@@ -7819,9 +9180,9 @@
                 <a:ea typeface="Calibri" pitchFamily="34" charset="-122"/>
                 <a:cs typeface="Calibri" pitchFamily="34" charset="-120"/>
               </a:rPr>
-              <a:t>Классический сигнал про онбординг: первое впечатление и первые проблемы бьют по оценке сильнее, чем у клиентов, уже «притёршихся» к банку. Гипотеза для проверки: усиленное сопровождение первых 3 месяцев может дать непропорционально большой эффект на итоговую удовлетворённость.</a:t>
-            </a:r>
-            <a:endParaRPr lang="en-US" sz="1200" dirty="0"/>
+              <a:t>«Решение проблемы поднимает оценку» на этих данных не проверить — нет повторного опроса. Но охват поддержки — проверяемый операционный вопрос, и разброс огромный. Дальше — что с этим делать по объёму, а не только по проценту.</a:t>
+            </a:r>
+            <a:endParaRPr lang="en-US" sz="1150" dirty="0"/>
           </a:p>
         </p:txBody>
       </p:sp>
@@ -7944,7 +9305,7 @@
         <p:spPr>
           <a:xfrm>
             <a:off x="548640" y="411480"/>
-            <a:ext cx="7315200" cy="320040"/>
+            <a:ext cx="9144000" cy="320040"/>
           </a:xfrm>
           <a:prstGeom prst="rect">
             <a:avLst/>
@@ -7968,7 +9329,7 @@
                 <a:ea typeface="Calibri" pitchFamily="34" charset="-122"/>
                 <a:cs typeface="Calibri" pitchFamily="34" charset="-120"/>
               </a:rPr>
-              <a:t>ПО ПУТИ</a:t>
+              <a:t>ГИПОТЕЗА H4, ПРОДОЛЖЕНИЕ</a:t>
             </a:r>
             <a:endParaRPr lang="en-US" sz="1300" dirty="0"/>
           </a:p>
@@ -7999,7 +9360,7 @@
               <a:buNone/>
             </a:pPr>
             <a:r>
-              <a:rPr lang="en-US" sz="2400" b="1" dirty="0">
+              <a:rPr lang="en-US" sz="2600" b="1" dirty="0">
                 <a:solidFill>
                   <a:srgbClr val="E6ECFF"/>
                 </a:solidFill>
@@ -8007,26 +9368,49 @@
                 <a:ea typeface="Cambria" pitchFamily="34" charset="-122"/>
                 <a:cs typeface="Cambria" pitchFamily="34" charset="-120"/>
               </a:rPr>
-              <a:t>Что рассматривалось, но не попало в финальные гипотезы</a:t>
-            </a:r>
-            <a:endParaRPr lang="en-US" sz="2400" dirty="0"/>
-          </a:p>
-        </p:txBody>
-      </p:sp>
-      <p:sp>
-        <p:nvSpPr>
-          <p:cNvPr id="4" name="Shape 2"/>
-          <p:cNvSpPr/>
-          <p:nvPr/>
-        </p:nvSpPr>
-        <p:spPr>
-          <a:xfrm>
-            <a:off x="548640" y="1828800"/>
-            <a:ext cx="11091672" cy="1737360"/>
+              <a:t>Доля vs объём — два разных типа проблем</a:t>
+            </a:r>
+            <a:endParaRPr lang="en-US" sz="2600" dirty="0"/>
+          </a:p>
+        </p:txBody>
+      </p:sp>
+      <p:pic>
+        <p:nvPicPr>
+          <p:cNvPr id="4" name="Image 0" descr="C:\Users\igora\edu_portfolios\tbank-reviews-analysis\images\12_unresolved_priority.png">    </p:cNvPr>
+          <p:cNvPicPr>
+            <a:picLocks noChangeAspect="1"/>
+          </p:cNvPicPr>
+          <p:nvPr/>
+        </p:nvPicPr>
+        <p:blipFill>
+          <a:blip r:embed="rId1"/>
+          <a:srcRect l="0" r="0" t="0" b="0"/>
+          <a:stretch/>
+        </p:blipFill>
+        <p:spPr>
+          <a:xfrm>
+            <a:off x="457200" y="1691640"/>
+            <a:ext cx="6126480" cy="4480560"/>
+          </a:xfrm>
+          <a:prstGeom prst="rect">
+            <a:avLst/>
+          </a:prstGeom>
+        </p:spPr>
+      </p:pic>
+      <p:sp>
+        <p:nvSpPr>
+          <p:cNvPr id="5" name="Shape 2"/>
+          <p:cNvSpPr/>
+          <p:nvPr/>
+        </p:nvSpPr>
+        <p:spPr>
+          <a:xfrm>
+            <a:off x="6858000" y="1691640"/>
+            <a:ext cx="4846320" cy="2103120"/>
           </a:xfrm>
           <a:prstGeom prst="roundRect">
             <a:avLst>
-              <a:gd name="adj" fmla="val 5263"/>
+              <a:gd name="adj" fmla="val 4348"/>
             </a:avLst>
           </a:prstGeom>
           <a:solidFill>
@@ -8037,53 +9421,53 @@
       </p:sp>
       <p:sp>
         <p:nvSpPr>
-          <p:cNvPr id="5" name="Text 3"/>
-          <p:cNvSpPr/>
-          <p:nvPr/>
-        </p:nvSpPr>
-        <p:spPr>
-          <a:xfrm>
-            <a:off x="868680" y="2011680"/>
-            <a:ext cx="10451592" cy="457200"/>
-          </a:xfrm>
-          <a:prstGeom prst="rect">
-            <a:avLst/>
-          </a:prstGeom>
-          <a:noFill/>
-          <a:ln/>
-        </p:spPr>
-        <p:txBody>
-          <a:bodyPr wrap="square" rtlCol="0" anchor="ctr"/>
-          <a:lstStyle/>
-          <a:p>
-            <a:pPr indent="0" marL="0">
-              <a:buNone/>
-            </a:pPr>
-            <a:r>
-              <a:rPr lang="en-US" sz="1600" b="1" dirty="0">
-                <a:solidFill>
-                  <a:srgbClr val="8891C5"/>
+          <p:cNvPr id="6" name="Text 3"/>
+          <p:cNvSpPr/>
+          <p:nvPr/>
+        </p:nvSpPr>
+        <p:spPr>
+          <a:xfrm>
+            <a:off x="7132320" y="1874520"/>
+            <a:ext cx="4389120" cy="457200"/>
+          </a:xfrm>
+          <a:prstGeom prst="rect">
+            <a:avLst/>
+          </a:prstGeom>
+          <a:noFill/>
+          <a:ln/>
+        </p:spPr>
+        <p:txBody>
+          <a:bodyPr wrap="square" rtlCol="0" anchor="ctr"/>
+          <a:lstStyle/>
+          <a:p>
+            <a:pPr indent="0" marL="0">
+              <a:buNone/>
+            </a:pPr>
+            <a:r>
+              <a:rPr lang="en-US" sz="1400" b="1" dirty="0">
+                <a:solidFill>
+                  <a:srgbClr val="4FD1FF"/>
                 </a:solidFill>
                 <a:latin typeface="Cambria" pitchFamily="34" charset="0"/>
                 <a:ea typeface="Cambria" pitchFamily="34" charset="-122"/>
                 <a:cs typeface="Cambria" pitchFamily="34" charset="-120"/>
               </a:rPr>
-              <a:t>Возраст клиента</a:t>
-            </a:r>
-            <a:endParaRPr lang="en-US" sz="1600" dirty="0"/>
-          </a:p>
-        </p:txBody>
-      </p:sp>
-      <p:sp>
-        <p:nvSpPr>
-          <p:cNvPr id="6" name="Text 4"/>
-          <p:cNvSpPr/>
-          <p:nvPr/>
-        </p:nvSpPr>
-        <p:spPr>
-          <a:xfrm>
-            <a:off x="868680" y="2514600"/>
-            <a:ext cx="10451592" cy="914400"/>
+              <a:t>Депозиты — объёмная проблема</a:t>
+            </a:r>
+            <a:endParaRPr lang="en-US" sz="1400" dirty="0"/>
+          </a:p>
+        </p:txBody>
+      </p:sp>
+      <p:sp>
+        <p:nvSpPr>
+          <p:cNvPr id="7" name="Text 4"/>
+          <p:cNvSpPr/>
+          <p:nvPr/>
+        </p:nvSpPr>
+        <p:spPr>
+          <a:xfrm>
+            <a:off x="7132320" y="2377440"/>
+            <a:ext cx="4389120" cy="1325880"/>
           </a:xfrm>
           <a:prstGeom prst="rect">
             <a:avLst/>
@@ -8099,7 +9483,7 @@
               <a:buNone/>
             </a:pPr>
             <a:r>
-              <a:rPr lang="en-US" sz="1300" dirty="0">
+              <a:rPr lang="en-US" sz="1200" dirty="0">
                 <a:solidFill>
                   <a:srgbClr val="E6ECFF"/>
                 </a:solidFill>
@@ -8107,26 +9491,26 @@
                 <a:ea typeface="Calibri" pitchFamily="34" charset="-122"/>
                 <a:cs typeface="Calibri" pitchFamily="34" charset="-120"/>
               </a:rPr>
-              <a:t>Разброс оценки между возрастными группами — меньше 0.15 балла у основных сегментов. Эффекта нет, сегментировать коммуникацию по возрасту не имеет смысла.</a:t>
-            </a:r>
-            <a:endParaRPr lang="en-US" sz="1300" dirty="0"/>
-          </a:p>
-        </p:txBody>
-      </p:sp>
-      <p:sp>
-        <p:nvSpPr>
-          <p:cNvPr id="7" name="Shape 5"/>
-          <p:cNvSpPr/>
-          <p:nvPr/>
-        </p:nvSpPr>
-        <p:spPr>
-          <a:xfrm>
-            <a:off x="548640" y="3794760"/>
-            <a:ext cx="11091672" cy="1737360"/>
+              <a:t>≈35% всех нерешённых жалоб банка, но доля недовольных (36%) около средней — просто масштаб направления (19 144 отзыва) делает абсолютное число большим.</a:t>
+            </a:r>
+            <a:endParaRPr lang="en-US" sz="1200" dirty="0"/>
+          </a:p>
+        </p:txBody>
+      </p:sp>
+      <p:sp>
+        <p:nvSpPr>
+          <p:cNvPr id="8" name="Shape 5"/>
+          <p:cNvSpPr/>
+          <p:nvPr/>
+        </p:nvSpPr>
+        <p:spPr>
+          <a:xfrm>
+            <a:off x="6858000" y="3977640"/>
+            <a:ext cx="4846320" cy="2194560"/>
           </a:xfrm>
           <a:prstGeom prst="roundRect">
             <a:avLst>
-              <a:gd name="adj" fmla="val 5263"/>
+              <a:gd name="adj" fmla="val 4167"/>
             </a:avLst>
           </a:prstGeom>
           <a:solidFill>
@@ -8137,53 +9521,53 @@
       </p:sp>
       <p:sp>
         <p:nvSpPr>
-          <p:cNvPr id="8" name="Text 6"/>
-          <p:cNvSpPr/>
-          <p:nvPr/>
-        </p:nvSpPr>
-        <p:spPr>
-          <a:xfrm>
-            <a:off x="868680" y="3977640"/>
-            <a:ext cx="10451592" cy="457200"/>
-          </a:xfrm>
-          <a:prstGeom prst="rect">
-            <a:avLst/>
-          </a:prstGeom>
-          <a:noFill/>
-          <a:ln/>
-        </p:spPr>
-        <p:txBody>
-          <a:bodyPr wrap="square" rtlCol="0" anchor="ctr"/>
-          <a:lstStyle/>
-          <a:p>
-            <a:pPr indent="0" marL="0">
-              <a:buNone/>
-            </a:pPr>
-            <a:r>
-              <a:rPr lang="en-US" sz="1600" b="1" dirty="0">
-                <a:solidFill>
-                  <a:srgbClr val="8891C5"/>
+          <p:cNvPr id="9" name="Text 6"/>
+          <p:cNvSpPr/>
+          <p:nvPr/>
+        </p:nvSpPr>
+        <p:spPr>
+          <a:xfrm>
+            <a:off x="7132320" y="4160520"/>
+            <a:ext cx="4389120" cy="457200"/>
+          </a:xfrm>
+          <a:prstGeom prst="rect">
+            <a:avLst/>
+          </a:prstGeom>
+          <a:noFill/>
+          <a:ln/>
+        </p:spPr>
+        <p:txBody>
+          <a:bodyPr wrap="square" rtlCol="0" anchor="ctr"/>
+          <a:lstStyle/>
+          <a:p>
+            <a:pPr indent="0" marL="0">
+              <a:buNone/>
+            </a:pPr>
+            <a:r>
+              <a:rPr lang="en-US" sz="1400" b="1" dirty="0">
+                <a:solidFill>
+                  <a:srgbClr val="FF6B81"/>
                 </a:solidFill>
                 <a:latin typeface="Cambria" pitchFamily="34" charset="0"/>
                 <a:ea typeface="Cambria" pitchFamily="34" charset="-122"/>
                 <a:cs typeface="Cambria" pitchFamily="34" charset="-120"/>
               </a:rPr>
-              <a:t>«Решение проблемы поднимает CSAT»</a:t>
-            </a:r>
-            <a:endParaRPr lang="en-US" sz="1600" dirty="0"/>
-          </a:p>
-        </p:txBody>
-      </p:sp>
-      <p:sp>
-        <p:nvSpPr>
-          <p:cNvPr id="9" name="Text 7"/>
-          <p:cNvSpPr/>
-          <p:nvPr/>
-        </p:nvSpPr>
-        <p:spPr>
-          <a:xfrm>
-            <a:off x="868680" y="4480560"/>
-            <a:ext cx="10451592" cy="914400"/>
+              <a:t>Mobile — процессная дыра</a:t>
+            </a:r>
+            <a:endParaRPr lang="en-US" sz="1400" dirty="0"/>
+          </a:p>
+        </p:txBody>
+      </p:sp>
+      <p:sp>
+        <p:nvSpPr>
+          <p:cNvPr id="10" name="Text 7"/>
+          <p:cNvSpPr/>
+          <p:nvPr/>
+        </p:nvSpPr>
+        <p:spPr>
+          <a:xfrm>
+            <a:off x="7132320" y="4617720"/>
+            <a:ext cx="4389120" cy="1463040"/>
           </a:xfrm>
           <a:prstGeom prst="rect">
             <a:avLst/>
@@ -8199,7 +9583,7 @@
               <a:buNone/>
             </a:pPr>
             <a:r>
-              <a:rPr lang="en-US" sz="1300" dirty="0">
+              <a:rPr lang="en-US" sz="1200" dirty="0">
                 <a:solidFill>
                   <a:srgbClr val="E6ECFF"/>
                 </a:solidFill>
@@ -8207,15 +9591,15 @@
                 <a:ea typeface="Calibri" pitchFamily="34" charset="-122"/>
                 <a:cs typeface="Calibri" pitchFamily="34" charset="-120"/>
               </a:rPr>
-              <a:t>В датасете нет повторной оценки после решения — гипотезу в исходной формулировке нельзя проверить. Переформулирована в H4 (охват поддержки по направлениям).</a:t>
-            </a:r>
-            <a:endParaRPr lang="en-US" sz="1300" dirty="0"/>
-          </a:p>
-        </p:txBody>
-      </p:sp>
-      <p:sp>
-        <p:nvSpPr>
-          <p:cNvPr id="10" name="Text 8"/>
+              <a:t>Жалоб немного (779), но 89% недовольных и почти нулевой охват (0.9% решённых) — жалобы туда как будто не доходят до статуса «решено». Не «работать усерднее», а разобраться, куда деваются заявки.</a:t>
+            </a:r>
+            <a:endParaRPr lang="en-US" sz="1200" dirty="0"/>
+          </a:p>
+        </p:txBody>
+      </p:sp>
+      <p:sp>
+        <p:nvSpPr>
+          <p:cNvPr id="11" name="Text 8"/>
           <p:cNvSpPr/>
           <p:nvPr/>
         </p:nvSpPr>
@@ -8254,7 +9638,7 @@
       </p:sp>
       <p:sp>
         <p:nvSpPr>
-          <p:cNvPr id="11" name="Text 9"/>
+          <p:cNvPr id="12" name="Text 9"/>
           <p:cNvSpPr/>
           <p:nvPr/>
         </p:nvSpPr>
